--- a/manaberu/slides/manaberu-08-publish-web.pptx
+++ b/manaberu/slides/manaberu-08-publish-web.pptx
@@ -13,9 +13,10 @@
     <p:sldId id="261" r:id="rId7"/>
     <p:sldId id="262" r:id="rId8"/>
     <p:sldId id="263" r:id="rId9"/>
+    <p:sldId id="264" r:id="rId10"/>
   </p:sldIdLst>
   <p:notesMasterIdLst>
-    <p:notesMasterId r:id="rId10"/>
+    <p:notesMasterId r:id="rId11"/>
   </p:notesMasterIdLst>
   <p:sldSz cx="9144000" cy="5143500"/>
   <p:notesSz cx="5143500" cy="9144000"/>
@@ -114,24 +115,25 @@
   <p:extLst>
     <p:ext uri="{521415D9-36F7-43E2-AB2F-B90AF26B5E84}">
       <p14:sectionLst xmlns:p14="http://schemas.microsoft.com/office/powerpoint/2010/main">
-        <p14:section name="導入" id="{f136ec33-f744-8328-3d19-d2212e208acb}">
+        <p14:section name="導入" id="{120d3cf5-ac0e-9373-400e-ff8c98ea1ac4}">
           <p14:sldIdLst>
             <p14:sldId id="256"/>
             <p14:sldId id="257"/>
           </p14:sldIdLst>
         </p14:section>
-        <p14:section name="本編" id="{129f12f4-9467-c707-0346-a3258daaa743}">
+        <p14:section name="本編" id="{822d8ef1-d304-00cf-c101-4871e7e78f66}">
           <p14:sldIdLst>
             <p14:sldId id="258"/>
             <p14:sldId id="259"/>
             <p14:sldId id="260"/>
             <p14:sldId id="261"/>
+            <p14:sldId id="262"/>
           </p14:sldIdLst>
         </p14:section>
-        <p14:section name="まとめ" id="{2d519c0c-35f6-f652-9dd8-ad063e837467}">
+        <p14:section name="まとめ" id="{9a6156ff-eae9-911e-3429-6863f3132b29}">
           <p14:sldIdLst>
-            <p14:sldId id="262"/>
             <p14:sldId id="263"/>
+            <p14:sldId id="264"/>
           </p14:sldIdLst>
         </p14:section>
       </p14:sectionLst>
@@ -1066,7 +1068,7 @@
           <a:p>
             <a:r>
               <a:rPr lang="en-US" dirty="0"/>
-              <a:t>宿題の目安時間を伝える。質問は講座グループへ（24時間以内に返信・土日祝を除く）。</a:t>
+              <a:t>講師デモ版（manaberu/demo）の画面。受講者のページと見比べて、スマホでの押しやすさを確かめてもらう。</a:t>
             </a:r>
             <a:endParaRPr lang="en-US" dirty="0"/>
           </a:p>
@@ -1154,7 +1156,7 @@
           <a:p>
             <a:r>
               <a:rPr lang="en-US" dirty="0"/>
-              <a:t>次回までの宿題をもう一度確認して終了。</a:t>
+              <a:t>宿題の目安時間を伝える。質問は講座グループへ（24時間以内に返信・土日祝を除く）。</a:t>
             </a:r>
             <a:endParaRPr lang="en-US" dirty="0"/>
           </a:p>
@@ -1178,6 +1180,94 @@
             <a:fld id="{F7021451-1387-4CA6-816F-3879F97B5CBC}" type="slidenum">
               <a:rPr lang="en-US"/>
               <a:t>8</a:t>
+            </a:fld>
+            <a:endParaRPr lang="en-US"/>
+          </a:p>
+        </p:txBody>
+      </p:sp>
+    </p:spTree>
+    <p:extLst>
+      <p:ext uri="{BB962C8B-B14F-4D97-AF65-F5344CB8AC3E}">
+        <p14:creationId xmlns:p14="http://schemas.microsoft.com/office/powerpoint/2010/main" val="1024086991"/>
+      </p:ext>
+    </p:extLst>
+  </p:cSld>
+  <p:clrMapOvr>
+    <a:masterClrMapping/>
+  </p:clrMapOvr>
+</p:notes>
+</file>
+
+<file path=ppt/notesSlides/notesSlide9.xml><?xml version="1.0" encoding="utf-8"?>
+<p:notes xmlns:a="http://schemas.openxmlformats.org/drawingml/2006/main" xmlns:r="http://schemas.openxmlformats.org/officeDocument/2006/relationships" xmlns:p="http://schemas.openxmlformats.org/presentationml/2006/main">
+  <p:cSld>
+    <p:spTree>
+      <p:nvGrpSpPr>
+        <p:cNvPr id="1" name=""/>
+        <p:cNvGrpSpPr/>
+        <p:nvPr/>
+      </p:nvGrpSpPr>
+      <p:grpSpPr>
+        <a:xfrm>
+          <a:off x="0" y="0"/>
+          <a:ext cx="0" cy="0"/>
+          <a:chOff x="0" y="0"/>
+          <a:chExt cx="0" cy="0"/>
+        </a:xfrm>
+      </p:grpSpPr>
+      <p:sp>
+        <p:nvSpPr>
+          <p:cNvPr id="2" name="Slide Image Placeholder 1"/>
+          <p:cNvSpPr>
+            <a:spLocks noGrp="1" noRot="1" noChangeAspect="1"/>
+          </p:cNvSpPr>
+          <p:nvPr>
+            <p:ph type="sldImg"/>
+          </p:nvPr>
+        </p:nvSpPr>
+        <p:spPr/>
+      </p:sp>
+      <p:sp>
+        <p:nvSpPr>
+          <p:cNvPr id="3" name="Notes Placeholder 2"/>
+          <p:cNvSpPr>
+            <a:spLocks noGrp="1"/>
+          </p:cNvSpPr>
+          <p:nvPr>
+            <p:ph type="body" idx="1"/>
+          </p:nvPr>
+        </p:nvSpPr>
+        <p:spPr/>
+        <p:txBody>
+          <a:bodyPr/>
+          <a:lstStyle/>
+          <a:p>
+            <a:r>
+              <a:rPr lang="en-US" dirty="0"/>
+              <a:t>次回までの宿題をもう一度確認して終了。</a:t>
+            </a:r>
+            <a:endParaRPr lang="en-US" dirty="0"/>
+          </a:p>
+        </p:txBody>
+      </p:sp>
+      <p:sp>
+        <p:nvSpPr>
+          <p:cNvPr id="4" name="Slide Number Placeholder 3"/>
+          <p:cNvSpPr>
+            <a:spLocks noGrp="1"/>
+          </p:cNvSpPr>
+          <p:nvPr>
+            <p:ph type="sldNum" sz="quarter" idx="10"/>
+          </p:nvPr>
+        </p:nvSpPr>
+        <p:spPr/>
+        <p:txBody>
+          <a:bodyPr/>
+          <a:lstStyle/>
+          <a:p>
+            <a:fld id="{F7021451-1387-4CA6-816F-3879F97B5CBC}" type="slidenum">
+              <a:rPr lang="en-US"/>
+              <a:t>9</a:t>
             </a:fld>
             <a:endParaRPr lang="en-US"/>
           </a:p>
@@ -5950,6 +6040,631 @@
                   <a:schemeClr val="tx1"/>
                 </a:solidFill>
               </a:rPr>
+              <a:t>受付ページの完成イメージ（スマホ）</a:t>
+            </a:r>
+            <a:endParaRPr lang="en-US" sz="2400" dirty="0"/>
+          </a:p>
+        </p:txBody>
+      </p:sp>
+      <p:sp>
+        <p:nvSpPr>
+          <p:cNvPr id="3" name="chip"/>
+          <p:cNvSpPr/>
+          <p:nvPr/>
+        </p:nvSpPr>
+        <p:spPr>
+          <a:xfrm>
+            <a:off x="548640" y="292608"/>
+            <a:ext cx="1207008" cy="292608"/>
+          </a:xfrm>
+          <a:prstGeom prst="roundRect">
+            <a:avLst>
+              <a:gd name="adj" fmla="val 50000"/>
+            </a:avLst>
+          </a:prstGeom>
+          <a:solidFill>
+            <a:schemeClr val="tx1"/>
+          </a:solidFill>
+          <a:ln w="12700">
+            <a:solidFill>
+              <a:schemeClr val="tx1"/>
+            </a:solidFill>
+            <a:prstDash val="solid"/>
+          </a:ln>
+        </p:spPr>
+      </p:sp>
+      <p:sp>
+        <p:nvSpPr>
+          <p:cNvPr id="4" name="chip-text"/>
+          <p:cNvSpPr txBox="1"/>
+          <p:nvPr/>
+        </p:nvSpPr>
+        <p:spPr>
+          <a:xfrm>
+            <a:off x="548640" y="292608"/>
+            <a:ext cx="1207008" cy="292608"/>
+          </a:xfrm>
+          <a:prstGeom prst="rect">
+            <a:avLst/>
+          </a:prstGeom>
+          <a:noFill/>
+          <a:ln/>
+        </p:spPr>
+        <p:txBody>
+          <a:bodyPr wrap="square" lIns="0" tIns="0" rIns="0" bIns="0" rtlCol="0" anchor="ctr"/>
+          <a:lstStyle/>
+          <a:p>
+            <a:pPr algn="ctr" indent="0" marL="0">
+              <a:buNone/>
+            </a:pPr>
+            <a:r>
+              <a:rPr lang="en-US" sz="1100" b="1" dirty="0">
+                <a:solidFill>
+                  <a:schemeClr val="accent1"/>
+                </a:solidFill>
+              </a:rPr>
+              <a:t>完成イメージ</a:t>
+            </a:r>
+            <a:endParaRPr lang="en-US" sz="1100" dirty="0"/>
+          </a:p>
+        </p:txBody>
+      </p:sp>
+      <p:sp>
+        <p:nvSpPr>
+          <p:cNvPr id="6" name="phone-frame"/>
+          <p:cNvSpPr/>
+          <p:nvPr/>
+        </p:nvSpPr>
+        <p:spPr>
+          <a:xfrm>
+            <a:off x="548640" y="1417320"/>
+            <a:ext cx="1563178" cy="3145536"/>
+          </a:xfrm>
+          <a:prstGeom prst="roundRect">
+            <a:avLst>
+              <a:gd name="adj" fmla="val 8189"/>
+            </a:avLst>
+          </a:prstGeom>
+          <a:solidFill>
+            <a:srgbClr val="1A1A1A"/>
+          </a:solidFill>
+          <a:ln w="12700">
+            <a:solidFill>
+              <a:srgbClr val="1A1A1A"/>
+            </a:solidFill>
+            <a:prstDash val="solid"/>
+          </a:ln>
+          <a:effectLst>
+            <a:outerShdw sx="100000" sy="100000" kx="0" ky="0" algn="bl" rotWithShape="0" blurRad="101600" dist="38100" dir="2700000">
+              <a:srgbClr val="000000">
+                <a:alpha val="18000"/>
+              </a:srgbClr>
+            </a:outerShdw>
+          </a:effectLst>
+        </p:spPr>
+      </p:sp>
+      <p:pic>
+        <p:nvPicPr>
+          <p:cNvPr id="7" name="phone-screen" descr="まなべ食堂の予約ページ（入力前）">    </p:cNvPr>
+          <p:cNvPicPr>
+            <a:picLocks noChangeAspect="1"/>
+          </p:cNvPicPr>
+          <p:nvPr/>
+        </p:nvPicPr>
+        <p:blipFill>
+          <a:blip r:embed="rId1"/>
+          <a:stretch>
+            <a:fillRect/>
+          </a:stretch>
+        </p:blipFill>
+        <p:spPr>
+          <a:xfrm>
+            <a:off x="612648" y="1481328"/>
+            <a:ext cx="1435162" cy="3017520"/>
+          </a:xfrm>
+          <a:prstGeom prst="rect">
+            <a:avLst/>
+          </a:prstGeom>
+        </p:spPr>
+      </p:pic>
+      <p:sp>
+        <p:nvSpPr>
+          <p:cNvPr id="8" name="phone-num"/>
+          <p:cNvSpPr/>
+          <p:nvPr/>
+        </p:nvSpPr>
+        <p:spPr>
+          <a:xfrm>
+            <a:off x="438912" y="1307592"/>
+            <a:ext cx="365760" cy="365760"/>
+          </a:xfrm>
+          <a:prstGeom prst="ellipse">
+            <a:avLst/>
+          </a:prstGeom>
+          <a:solidFill>
+            <a:schemeClr val="accent1"/>
+          </a:solidFill>
+          <a:ln w="15875">
+            <a:solidFill>
+              <a:srgbClr val="1A1A1A"/>
+            </a:solidFill>
+            <a:prstDash val="solid"/>
+          </a:ln>
+        </p:spPr>
+      </p:sp>
+      <p:sp>
+        <p:nvSpPr>
+          <p:cNvPr id="9" name="Text 5"/>
+          <p:cNvSpPr txBox="1"/>
+          <p:nvPr/>
+        </p:nvSpPr>
+        <p:spPr>
+          <a:xfrm>
+            <a:off x="438912" y="1307592"/>
+            <a:ext cx="365760" cy="365760"/>
+          </a:xfrm>
+          <a:prstGeom prst="rect">
+            <a:avLst/>
+          </a:prstGeom>
+          <a:noFill/>
+          <a:ln/>
+        </p:spPr>
+        <p:txBody>
+          <a:bodyPr wrap="square" lIns="0" tIns="0" rIns="0" bIns="0" rtlCol="0" anchor="ctr"/>
+          <a:lstStyle/>
+          <a:p>
+            <a:pPr algn="ctr" indent="0" marL="0">
+              <a:buNone/>
+            </a:pPr>
+            <a:r>
+              <a:rPr lang="en-US" sz="1300" b="1" dirty="0">
+                <a:solidFill>
+                  <a:schemeClr val="tx1"/>
+                </a:solidFill>
+              </a:rPr>
+              <a:t>1</a:t>
+            </a:r>
+            <a:endParaRPr lang="en-US" sz="1300" dirty="0"/>
+          </a:p>
+        </p:txBody>
+      </p:sp>
+      <p:sp>
+        <p:nvSpPr>
+          <p:cNvPr id="10" name="phone-frame"/>
+          <p:cNvSpPr/>
+          <p:nvPr/>
+        </p:nvSpPr>
+        <p:spPr>
+          <a:xfrm>
+            <a:off x="2386138" y="1417320"/>
+            <a:ext cx="1563178" cy="3145536"/>
+          </a:xfrm>
+          <a:prstGeom prst="roundRect">
+            <a:avLst>
+              <a:gd name="adj" fmla="val 8189"/>
+            </a:avLst>
+          </a:prstGeom>
+          <a:solidFill>
+            <a:srgbClr val="1A1A1A"/>
+          </a:solidFill>
+          <a:ln w="12700">
+            <a:solidFill>
+              <a:srgbClr val="1A1A1A"/>
+            </a:solidFill>
+            <a:prstDash val="solid"/>
+          </a:ln>
+          <a:effectLst>
+            <a:outerShdw sx="100000" sy="100000" kx="0" ky="0" algn="bl" rotWithShape="0" blurRad="101600" dist="38100" dir="2700000">
+              <a:srgbClr val="000000">
+                <a:alpha val="18000"/>
+              </a:srgbClr>
+            </a:outerShdw>
+          </a:effectLst>
+        </p:spPr>
+      </p:sp>
+      <p:pic>
+        <p:nvPicPr>
+          <p:cNvPr id="11" name="phone-screen" descr="必須項目が空のときのエラー表示">    </p:cNvPr>
+          <p:cNvPicPr>
+            <a:picLocks noChangeAspect="1"/>
+          </p:cNvPicPr>
+          <p:nvPr/>
+        </p:nvPicPr>
+        <p:blipFill>
+          <a:blip r:embed="rId2"/>
+          <a:stretch>
+            <a:fillRect/>
+          </a:stretch>
+        </p:blipFill>
+        <p:spPr>
+          <a:xfrm>
+            <a:off x="2450146" y="1481328"/>
+            <a:ext cx="1435162" cy="3017520"/>
+          </a:xfrm>
+          <a:prstGeom prst="rect">
+            <a:avLst/>
+          </a:prstGeom>
+        </p:spPr>
+      </p:pic>
+      <p:sp>
+        <p:nvSpPr>
+          <p:cNvPr id="12" name="phone-num"/>
+          <p:cNvSpPr/>
+          <p:nvPr/>
+        </p:nvSpPr>
+        <p:spPr>
+          <a:xfrm>
+            <a:off x="2276410" y="1307592"/>
+            <a:ext cx="365760" cy="365760"/>
+          </a:xfrm>
+          <a:prstGeom prst="ellipse">
+            <a:avLst/>
+          </a:prstGeom>
+          <a:solidFill>
+            <a:schemeClr val="accent1"/>
+          </a:solidFill>
+          <a:ln w="15875">
+            <a:solidFill>
+              <a:srgbClr val="1A1A1A"/>
+            </a:solidFill>
+            <a:prstDash val="solid"/>
+          </a:ln>
+        </p:spPr>
+      </p:sp>
+      <p:sp>
+        <p:nvSpPr>
+          <p:cNvPr id="13" name="Text 8"/>
+          <p:cNvSpPr txBox="1"/>
+          <p:nvPr/>
+        </p:nvSpPr>
+        <p:spPr>
+          <a:xfrm>
+            <a:off x="2276410" y="1307592"/>
+            <a:ext cx="365760" cy="365760"/>
+          </a:xfrm>
+          <a:prstGeom prst="rect">
+            <a:avLst/>
+          </a:prstGeom>
+          <a:noFill/>
+          <a:ln/>
+        </p:spPr>
+        <p:txBody>
+          <a:bodyPr wrap="square" lIns="0" tIns="0" rIns="0" bIns="0" rtlCol="0" anchor="ctr"/>
+          <a:lstStyle/>
+          <a:p>
+            <a:pPr algn="ctr" indent="0" marL="0">
+              <a:buNone/>
+            </a:pPr>
+            <a:r>
+              <a:rPr lang="en-US" sz="1300" b="1" dirty="0">
+                <a:solidFill>
+                  <a:schemeClr val="tx1"/>
+                </a:solidFill>
+              </a:rPr>
+              <a:t>2</a:t>
+            </a:r>
+            <a:endParaRPr lang="en-US" sz="1300" dirty="0"/>
+          </a:p>
+        </p:txBody>
+      </p:sp>
+      <p:sp>
+        <p:nvSpPr>
+          <p:cNvPr id="14" name="point-head"/>
+          <p:cNvSpPr txBox="1"/>
+          <p:nvPr/>
+        </p:nvSpPr>
+        <p:spPr>
+          <a:xfrm>
+            <a:off x="4315076" y="1417320"/>
+            <a:ext cx="4280284" cy="365760"/>
+          </a:xfrm>
+          <a:prstGeom prst="rect">
+            <a:avLst/>
+          </a:prstGeom>
+          <a:noFill/>
+          <a:ln/>
+        </p:spPr>
+        <p:txBody>
+          <a:bodyPr wrap="square" lIns="0" tIns="0" rIns="0" bIns="0" rtlCol="0" anchor="t"/>
+          <a:lstStyle/>
+          <a:p>
+            <a:pPr indent="0" marL="0">
+              <a:buNone/>
+            </a:pPr>
+            <a:r>
+              <a:rPr lang="en-US" sz="1500" b="1" dirty="0">
+                <a:solidFill>
+                  <a:schemeClr val="tx1"/>
+                </a:solidFill>
+              </a:rPr>
+              <a:t>1 入力欄は大きく、必須がひと目でわかる</a:t>
+            </a:r>
+            <a:endParaRPr lang="en-US" sz="1500" dirty="0"/>
+          </a:p>
+        </p:txBody>
+      </p:sp>
+      <p:sp>
+        <p:nvSpPr>
+          <p:cNvPr id="15" name="point-body"/>
+          <p:cNvSpPr txBox="1"/>
+          <p:nvPr/>
+        </p:nvSpPr>
+        <p:spPr>
+          <a:xfrm>
+            <a:off x="4315076" y="1801368"/>
+            <a:ext cx="4280284" cy="548640"/>
+          </a:xfrm>
+          <a:prstGeom prst="rect">
+            <a:avLst/>
+          </a:prstGeom>
+          <a:noFill/>
+          <a:ln/>
+        </p:spPr>
+        <p:txBody>
+          <a:bodyPr wrap="square" lIns="0" tIns="0" rIns="0" bIns="0" rtlCol="0" anchor="t"/>
+          <a:lstStyle/>
+          <a:p>
+            <a:pPr indent="0" marL="0">
+              <a:buNone/>
+            </a:pPr>
+            <a:r>
+              <a:rPr lang="en-US" sz="1250" dirty="0">
+                <a:solidFill>
+                  <a:schemeClr val="tx1"/>
+                </a:solidFill>
+              </a:rPr>
+              <a:t>お客様はスマホで入力する。指で押しやすい大きさにし、「必須」を赤で示す</a:t>
+            </a:r>
+            <a:endParaRPr lang="en-US" sz="1250" dirty="0"/>
+          </a:p>
+        </p:txBody>
+      </p:sp>
+      <p:sp>
+        <p:nvSpPr>
+          <p:cNvPr id="16" name="point-head"/>
+          <p:cNvSpPr txBox="1"/>
+          <p:nvPr/>
+        </p:nvSpPr>
+        <p:spPr>
+          <a:xfrm>
+            <a:off x="4315076" y="2423160"/>
+            <a:ext cx="4280284" cy="365760"/>
+          </a:xfrm>
+          <a:prstGeom prst="rect">
+            <a:avLst/>
+          </a:prstGeom>
+          <a:noFill/>
+          <a:ln/>
+        </p:spPr>
+        <p:txBody>
+          <a:bodyPr wrap="square" lIns="0" tIns="0" rIns="0" bIns="0" rtlCol="0" anchor="t"/>
+          <a:lstStyle/>
+          <a:p>
+            <a:pPr indent="0" marL="0">
+              <a:buNone/>
+            </a:pPr>
+            <a:r>
+              <a:rPr lang="en-US" sz="1500" b="1" dirty="0">
+                <a:solidFill>
+                  <a:schemeClr val="tx1"/>
+                </a:solidFill>
+              </a:rPr>
+              <a:t>2 足りないときは、何が足りないかを伝える</a:t>
+            </a:r>
+            <a:endParaRPr lang="en-US" sz="1500" dirty="0"/>
+          </a:p>
+        </p:txBody>
+      </p:sp>
+      <p:sp>
+        <p:nvSpPr>
+          <p:cNvPr id="17" name="point-body"/>
+          <p:cNvSpPr txBox="1"/>
+          <p:nvPr/>
+        </p:nvSpPr>
+        <p:spPr>
+          <a:xfrm>
+            <a:off x="4315076" y="2807208"/>
+            <a:ext cx="4280284" cy="548640"/>
+          </a:xfrm>
+          <a:prstGeom prst="rect">
+            <a:avLst/>
+          </a:prstGeom>
+          <a:noFill/>
+          <a:ln/>
+        </p:spPr>
+        <p:txBody>
+          <a:bodyPr wrap="square" lIns="0" tIns="0" rIns="0" bIns="0" rtlCol="0" anchor="t"/>
+          <a:lstStyle/>
+          <a:p>
+            <a:pPr indent="0" marL="0">
+              <a:buNone/>
+            </a:pPr>
+            <a:r>
+              <a:rPr lang="en-US" sz="1250" dirty="0">
+                <a:solidFill>
+                  <a:schemeClr val="tx1"/>
+                </a:solidFill>
+              </a:rPr>
+              <a:t>空のまま送ると、送信せずに不足している項目を表示する</a:t>
+            </a:r>
+            <a:endParaRPr lang="en-US" sz="1250" dirty="0"/>
+          </a:p>
+        </p:txBody>
+      </p:sp>
+      <p:sp>
+        <p:nvSpPr>
+          <p:cNvPr id="18" name="point-head"/>
+          <p:cNvSpPr txBox="1"/>
+          <p:nvPr/>
+        </p:nvSpPr>
+        <p:spPr>
+          <a:xfrm>
+            <a:off x="4315076" y="3429000"/>
+            <a:ext cx="4280284" cy="365760"/>
+          </a:xfrm>
+          <a:prstGeom prst="rect">
+            <a:avLst/>
+          </a:prstGeom>
+          <a:noFill/>
+          <a:ln/>
+        </p:spPr>
+        <p:txBody>
+          <a:bodyPr wrap="square" lIns="0" tIns="0" rIns="0" bIns="0" rtlCol="0" anchor="t"/>
+          <a:lstStyle/>
+          <a:p>
+            <a:pPr indent="0" marL="0">
+              <a:buNone/>
+            </a:pPr>
+            <a:r>
+              <a:rPr lang="en-US" sz="1500" b="1" dirty="0">
+                <a:solidFill>
+                  <a:schemeClr val="tx1"/>
+                </a:solidFill>
+              </a:rPr>
+              <a:t>この回の範囲</a:t>
+            </a:r>
+            <a:endParaRPr lang="en-US" sz="1500" dirty="0"/>
+          </a:p>
+        </p:txBody>
+      </p:sp>
+      <p:sp>
+        <p:nvSpPr>
+          <p:cNvPr id="19" name="point-body"/>
+          <p:cNvSpPr txBox="1"/>
+          <p:nvPr/>
+        </p:nvSpPr>
+        <p:spPr>
+          <a:xfrm>
+            <a:off x="4315076" y="3813048"/>
+            <a:ext cx="4280284" cy="548640"/>
+          </a:xfrm>
+          <a:prstGeom prst="rect">
+            <a:avLst/>
+          </a:prstGeom>
+          <a:noFill/>
+          <a:ln/>
+        </p:spPr>
+        <p:txBody>
+          <a:bodyPr wrap="square" lIns="0" tIns="0" rIns="0" bIns="0" rtlCol="0" anchor="t"/>
+          <a:lstStyle/>
+          <a:p>
+            <a:pPr indent="0" marL="0">
+              <a:buNone/>
+            </a:pPr>
+            <a:r>
+              <a:rPr lang="en-US" sz="1250" dirty="0">
+                <a:solidFill>
+                  <a:schemeClr val="tx1"/>
+                </a:solidFill>
+              </a:rPr>
+              <a:t>見た目だけ。送信してもまだどこにも保存されない（保存は第9回）</a:t>
+            </a:r>
+            <a:endParaRPr lang="en-US" sz="1250" dirty="0"/>
+          </a:p>
+        </p:txBody>
+      </p:sp>
+      <p:sp>
+        <p:nvSpPr>
+          <p:cNvPr id="25" name="Slide Number Placeholder 0"/>
+          <p:cNvSpPr>
+            <a:spLocks noGrp="1"/>
+          </p:cNvSpPr>
+          <p:nvPr>
+            <p:ph type="sldNum" sz="quarter" idx="4294967295"/>
+          </p:nvPr>
+        </p:nvSpPr>
+        <p:spPr>
+          <a:xfrm>
+            <a:off x="8229600" y="4773168"/>
+            <a:ext cx="365760" cy="228600"/>
+          </a:xfrm>
+          <a:prstGeom prst="rect">
+            <a:avLst/>
+          </a:prstGeom>
+          <a:extLst>
+            <a:ext uri="{C572A759-6A51-4108-AA02-DFA0A04FC94B}">
+              <ma14:wrappingTextBoxFlag xmlns:ma14="http://schemas.microsoft.com/office/mac/drawingml/2011/main" val="0"/>
+            </a:ext>
+          </a:extLst>
+        </p:spPr>
+        <p:txBody>
+          <a:bodyPr/>
+          <a:lstStyle>
+            <a:lvl1pPr>
+              <a:defRPr sz="900">
+                <a:solidFill>
+                  <a:srgbClr val="5A6872"/>
+                </a:solidFill>
+              </a:defRPr>
+            </a:lvl1pPr>
+          </a:lstStyle>
+          <a:p>
+            <a:pPr algn="r"/>
+            <a:fld id="{F7021451-1387-4CA6-816F-3879F97B5CBC}" type="slidenum">
+              <a:rPr b="0" lang="en-US"/>
+              <a:t>7</a:t>
+            </a:fld>
+            <a:endParaRPr lang="en-US"/>
+          </a:p>
+        </p:txBody>
+      </p:sp>
+    </p:spTree>
+  </p:cSld>
+  <p:clrMapOvr>
+    <a:masterClrMapping/>
+  </p:clrMapOvr>
+</p:sld>
+</file>
+
+<file path=ppt/slides/slide8.xml><?xml version="1.0" encoding="utf-8"?>
+<p:sld xmlns:a="http://schemas.openxmlformats.org/drawingml/2006/main" xmlns:r="http://schemas.openxmlformats.org/officeDocument/2006/relationships" xmlns:p="http://schemas.openxmlformats.org/presentationml/2006/main">
+  <p:cSld name="Slide 8">
+    <p:spTree>
+      <p:nvGrpSpPr>
+        <p:cNvPr id="1" name=""/>
+        <p:cNvGrpSpPr/>
+        <p:nvPr/>
+      </p:nvGrpSpPr>
+      <p:grpSpPr>
+        <a:xfrm>
+          <a:off x="0" y="0"/>
+          <a:ext cx="0" cy="0"/>
+          <a:chOff x="0" y="0"/>
+          <a:chExt cx="0" cy="0"/>
+        </a:xfrm>
+      </p:grpSpPr>
+      <p:sp>
+        <p:nvSpPr>
+          <p:cNvPr id="2" name="Text 0"/>
+          <p:cNvSpPr/>
+          <p:nvPr>
+            <p:ph idx="100" type="title" hasCustomPrompt="1"/>
+          </p:nvPr>
+        </p:nvSpPr>
+        <p:spPr>
+          <a:xfrm>
+            <a:off x="548640" y="658368"/>
+            <a:ext cx="8046720" cy="566928"/>
+          </a:xfrm>
+          <a:prstGeom prst="rect">
+            <a:avLst/>
+          </a:prstGeom>
+          <a:noFill/>
+          <a:ln/>
+        </p:spPr>
+        <p:txBody>
+          <a:bodyPr wrap="square" lIns="0" tIns="0" rIns="0" bIns="0" rtlCol="0" anchor="ctr"/>
+          <a:lstStyle/>
+          <a:p>
+            <a:pPr algn="l" indent="0" marL="0">
+              <a:buNone/>
+            </a:pPr>
+            <a:r>
+              <a:rPr lang="en-US" sz="2400" b="1" dirty="0">
+                <a:solidFill>
+                  <a:schemeClr val="tx1"/>
+                </a:solidFill>
+              </a:rPr>
               <a:t>宿題と、今日のチェック</a:t>
             </a:r>
             <a:endParaRPr lang="en-US" sz="2400" dirty="0"/>
@@ -6392,7 +7107,7 @@
             <a:pPr algn="r"/>
             <a:fld id="{F7021451-1387-4CA6-816F-3879F97B5CBC}" type="slidenum">
               <a:rPr b="0" lang="en-US"/>
-              <a:t>7</a:t>
+              <a:t>8</a:t>
             </a:fld>
             <a:endParaRPr lang="en-US"/>
           </a:p>
@@ -6406,9 +7121,9 @@
 </p:sld>
 </file>
 
-<file path=ppt/slides/slide8.xml><?xml version="1.0" encoding="utf-8"?>
+<file path=ppt/slides/slide9.xml><?xml version="1.0" encoding="utf-8"?>
 <p:sld xmlns:a="http://schemas.openxmlformats.org/drawingml/2006/main" xmlns:r="http://schemas.openxmlformats.org/officeDocument/2006/relationships" xmlns:p="http://schemas.openxmlformats.org/presentationml/2006/main">
-  <p:cSld name="Slide 8">
+  <p:cSld name="Slide 9">
     <p:spTree>
       <p:nvGrpSpPr>
         <p:cNvPr id="1" name=""/>

--- a/manaberu/slides/manaberu-08-publish-web.pptx
+++ b/manaberu/slides/manaberu-08-publish-web.pptx
@@ -115,13 +115,13 @@
   <p:extLst>
     <p:ext uri="{521415D9-36F7-43E2-AB2F-B90AF26B5E84}">
       <p14:sectionLst xmlns:p14="http://schemas.microsoft.com/office/powerpoint/2010/main">
-        <p14:section name="導入" id="{120d3cf5-ac0e-9373-400e-ff8c98ea1ac4}">
+        <p14:section name="導入" id="{10e2a155-56f8-7654-e948-7e3adc9d2577}">
           <p14:sldIdLst>
             <p14:sldId id="256"/>
             <p14:sldId id="257"/>
           </p14:sldIdLst>
         </p14:section>
-        <p14:section name="本編" id="{822d8ef1-d304-00cf-c101-4871e7e78f66}">
+        <p14:section name="本編" id="{d18f06d8-989b-110d-c550-3fe2024728c5}">
           <p14:sldIdLst>
             <p14:sldId id="258"/>
             <p14:sldId id="259"/>
@@ -130,7 +130,7 @@
             <p14:sldId id="262"/>
           </p14:sldIdLst>
         </p14:section>
-        <p14:section name="まとめ" id="{9a6156ff-eae9-911e-3429-6863f3132b29}">
+        <p14:section name="まとめ" id="{81785e99-2926-558b-6c0b-4098a0e22445}">
           <p14:sldIdLst>
             <p14:sldId id="263"/>
             <p14:sldId id="264"/>
@@ -1318,12 +1318,19 @@
 
 <file path=ppt/slideLayouts/slideLayout2.xml><?xml version="1.0" encoding="utf-8"?>
 <p:sldLayout xmlns:a="http://schemas.openxmlformats.org/drawingml/2006/main" xmlns:r="http://schemas.openxmlformats.org/officeDocument/2006/relationships" xmlns:p="http://schemas.openxmlformats.org/presentationml/2006/main" preserve="1">
-  <p:cSld name="MANA_TITLE">
+  <p:cSld name="MANA_COVER">
     <p:bg>
       <p:bgPr>
-        <a:solidFill>
-          <a:srgbClr val="FFD600"/>
-        </a:solidFill>
+        <a:blipFill dpi="0" rotWithShape="1">
+          <a:blip r:embed="rId1">
+            <a:lum/>
+          </a:blip>
+          <a:srcRect/>
+          <a:stretch>
+            <a:fillRect/>
+          </a:stretch>
+        </a:blipFill>
+        <a:effectLst/>
       </p:bgPr>
     </p:bg>
     <p:spTree>
@@ -1340,156 +1347,6 @@
           <a:chExt cx="0" cy="0"/>
         </a:xfrm>
       </p:grpSpPr>
-      <p:sp>
-        <p:nvSpPr>
-          <p:cNvPr id="2" name="Text 0"/>
-          <p:cNvSpPr/>
-          <p:nvPr>
-            <p:ph idx="100" type="title" hasCustomPrompt="1"/>
-          </p:nvPr>
-        </p:nvSpPr>
-        <p:spPr>
-          <a:xfrm>
-            <a:off x="548640" y="1691640"/>
-            <a:ext cx="5852160" cy="1371600"/>
-          </a:xfrm>
-          <a:prstGeom prst="rect">
-            <a:avLst/>
-          </a:prstGeom>
-          <a:noFill/>
-          <a:ln/>
-        </p:spPr>
-        <p:txBody>
-          <a:bodyPr wrap="square" rtlCol="0"/>
-          <a:lstStyle>
-            <a:lvl1pPr algn="l" indent="0" marL="0">
-              <a:buNone/>
-              <a:defRPr lang="en-US" sz="3200" b="1" dirty="0">
-                <a:solidFill>
-                  <a:schemeClr val="tx1"/>
-                </a:solidFill>
-              </a:defRPr>
-            </a:lvl1pPr>
-          </a:lstStyle>
-          <a:p>
-            <a:pPr algn="l" indent="0" marL="0">
-              <a:buNone/>
-            </a:pPr>
-            <a:endParaRPr lang="en-US" sz="3200" dirty="0"/>
-          </a:p>
-        </p:txBody>
-      </p:sp>
-      <p:sp>
-        <p:nvSpPr>
-          <p:cNvPr id="3" name="Text 0"/>
-          <p:cNvSpPr/>
-          <p:nvPr>
-            <p:ph idx="101" type="body" hasCustomPrompt="1"/>
-          </p:nvPr>
-        </p:nvSpPr>
-        <p:spPr>
-          <a:xfrm>
-            <a:off x="548640" y="3246120"/>
-            <a:ext cx="5852160" cy="457200"/>
-          </a:xfrm>
-          <a:prstGeom prst="rect">
-            <a:avLst/>
-          </a:prstGeom>
-          <a:noFill/>
-          <a:ln/>
-        </p:spPr>
-        <p:txBody>
-          <a:bodyPr wrap="square" rtlCol="0"/>
-          <a:lstStyle>
-            <a:lvl1pPr indent="0" marL="0">
-              <a:buNone/>
-              <a:defRPr lang="en-US" sz="1400" dirty="0">
-                <a:solidFill>
-                  <a:schemeClr val="tx1"/>
-                </a:solidFill>
-              </a:defRPr>
-            </a:lvl1pPr>
-          </a:lstStyle>
-          <a:p>
-            <a:pPr indent="0" marL="0">
-              <a:buNone/>
-            </a:pPr>
-            <a:endParaRPr lang="en-US" sz="1400" dirty="0"/>
-          </a:p>
-        </p:txBody>
-      </p:sp>
-      <p:sp>
-        <p:nvSpPr>
-          <p:cNvPr id="4" name="Text 0"/>
-          <p:cNvSpPr/>
-          <p:nvPr/>
-        </p:nvSpPr>
-        <p:spPr>
-          <a:xfrm>
-            <a:off x="548640" y="4526280"/>
-            <a:ext cx="5486400" cy="274320"/>
-          </a:xfrm>
-          <a:prstGeom prst="rect">
-            <a:avLst/>
-          </a:prstGeom>
-          <a:noFill/>
-          <a:ln/>
-        </p:spPr>
-        <p:txBody>
-          <a:bodyPr wrap="square" lIns="0" tIns="0" rIns="0" bIns="0" rtlCol="0" anchor="ctr"/>
-          <a:lstStyle/>
-          <a:p>
-            <a:pPr indent="0" marL="0">
-              <a:buNone/>
-            </a:pPr>
-            <a:r>
-              <a:rPr lang="en-US" sz="1000" dirty="0">
-                <a:solidFill>
-                  <a:schemeClr val="tx1"/>
-                </a:solidFill>
-              </a:rPr>
-              <a:t>マナベル｜AI×Lark 構築者育成講座</a:t>
-            </a:r>
-            <a:endParaRPr lang="en-US" sz="1000" dirty="0"/>
-          </a:p>
-        </p:txBody>
-      </p:sp>
-      <p:sp>
-        <p:nvSpPr>
-          <p:cNvPr id="5" name="Text 1"/>
-          <p:cNvSpPr/>
-          <p:nvPr/>
-        </p:nvSpPr>
-        <p:spPr>
-          <a:xfrm>
-            <a:off x="6766560" y="4526280"/>
-            <a:ext cx="1828800" cy="274320"/>
-          </a:xfrm>
-          <a:prstGeom prst="rect">
-            <a:avLst/>
-          </a:prstGeom>
-          <a:noFill/>
-          <a:ln/>
-        </p:spPr>
-        <p:txBody>
-          <a:bodyPr wrap="square" lIns="0" tIns="0" rIns="0" bIns="0" rtlCol="0" anchor="ctr"/>
-          <a:lstStyle/>
-          <a:p>
-            <a:pPr algn="r" indent="0" marL="0">
-              <a:buNone/>
-            </a:pPr>
-            <a:r>
-              <a:rPr lang="en-US" sz="1000" b="1" dirty="0">
-                <a:solidFill>
-                  <a:schemeClr val="tx1"/>
-                </a:solidFill>
-              </a:rPr>
-              <a:t>ささエール</a:t>
-            </a:r>
-            <a:endParaRPr lang="en-US" sz="1000" dirty="0"/>
-          </a:p>
-        </p:txBody>
-      </p:sp>
     </p:spTree>
   </p:cSld>
   <p:clrMapOvr>
@@ -1503,9 +1360,16 @@
   <p:cSld name="MANA_CONTENT">
     <p:bg>
       <p:bgPr>
-        <a:solidFill>
-          <a:srgbClr val="FFFFFF"/>
-        </a:solidFill>
+        <a:blipFill dpi="0" rotWithShape="1">
+          <a:blip r:embed="rId1">
+            <a:lum/>
+          </a:blip>
+          <a:srcRect/>
+          <a:stretch>
+            <a:fillRect/>
+          </a:stretch>
+        </a:blipFill>
+        <a:effectLst/>
       </p:bgPr>
     </p:bg>
     <p:spTree>
@@ -1524,16 +1388,36 @@
       </p:grpSpPr>
       <p:sp>
         <p:nvSpPr>
-          <p:cNvPr id="2" name="Text 0"/>
+          <p:cNvPr id="2" name="Shape 0"/>
           <p:cNvSpPr/>
-          <p:nvPr>
-            <p:ph idx="100" type="title" hasCustomPrompt="1"/>
-          </p:nvPr>
-        </p:nvSpPr>
-        <p:spPr>
-          <a:xfrm>
-            <a:off x="548640" y="658368"/>
-            <a:ext cx="8046720" cy="566928"/>
+          <p:nvPr/>
+        </p:nvSpPr>
+        <p:spPr>
+          <a:xfrm>
+            <a:off x="6400800" y="4754880"/>
+            <a:ext cx="2423160" cy="274320"/>
+          </a:xfrm>
+          <a:prstGeom prst="rect">
+            <a:avLst>
+              <a:gd name="adj" fmla="val 50000"/>
+            </a:avLst>
+          </a:prstGeom>
+          <a:solidFill>
+            <a:srgbClr val="1A1A1A"/>
+          </a:solidFill>
+          <a:ln/>
+        </p:spPr>
+      </p:sp>
+      <p:sp>
+        <p:nvSpPr>
+          <p:cNvPr id="3" name="Text 1"/>
+          <p:cNvSpPr/>
+          <p:nvPr/>
+        </p:nvSpPr>
+        <p:spPr>
+          <a:xfrm>
+            <a:off x="6510528" y="4754880"/>
+            <a:ext cx="1828800" cy="274320"/>
           </a:xfrm>
           <a:prstGeom prst="rect">
             <a:avLst/>
@@ -1542,35 +1426,37 @@
           <a:ln/>
         </p:spPr>
         <p:txBody>
-          <a:bodyPr wrap="square" rtlCol="0"/>
-          <a:lstStyle>
-            <a:lvl1pPr algn="l" indent="0" marL="0">
-              <a:buNone/>
-              <a:defRPr lang="en-US" sz="2400" b="1" dirty="0">
-                <a:solidFill>
-                  <a:schemeClr val="tx1"/>
-                </a:solidFill>
-              </a:defRPr>
-            </a:lvl1pPr>
-          </a:lstStyle>
-          <a:p>
-            <a:pPr algn="l" indent="0" marL="0">
-              <a:buNone/>
-            </a:pPr>
-            <a:endParaRPr lang="en-US" sz="2400" dirty="0"/>
-          </a:p>
-        </p:txBody>
-      </p:sp>
-      <p:sp>
-        <p:nvSpPr>
-          <p:cNvPr id="3" name="Text 0"/>
+          <a:bodyPr wrap="square" lIns="0" tIns="0" rIns="0" bIns="0" rtlCol="0" anchor="ctr"/>
+          <a:lstStyle/>
+          <a:p>
+            <a:pPr indent="0" marL="0">
+              <a:buNone/>
+            </a:pPr>
+            <a:r>
+              <a:rPr lang="ja-JP" altLang="en-US" sz="850" b="1" dirty="0">
+                <a:solidFill>
+                  <a:srgbClr val="FFFFFF"/>
+                </a:solidFill>
+                <a:latin typeface="Noto Sans JP" pitchFamily="34" charset="0"/>
+                <a:ea typeface="Noto Sans JP" pitchFamily="34" charset="-122"/>
+                <a:cs typeface="Noto Sans JP" pitchFamily="34" charset="-120"/>
+              </a:rPr>
+              <a:t>ささエール｜OFFICE PLATA</a:t>
+            </a:r>
+            <a:endParaRPr lang="ja-JP" sz="850" dirty="0"/>
+          </a:p>
+        </p:txBody>
+      </p:sp>
+      <p:sp>
+        <p:nvSpPr>
+          <p:cNvPr id="4" name="Text 2"/>
           <p:cNvSpPr/>
           <p:nvPr/>
         </p:nvSpPr>
         <p:spPr>
           <a:xfrm>
-            <a:off x="548640" y="4773168"/>
-            <a:ext cx="6400800" cy="228600"/>
+            <a:off x="365760" y="4754880"/>
+            <a:ext cx="5852160" cy="274320"/>
           </a:xfrm>
           <a:prstGeom prst="rect">
             <a:avLst/>
@@ -1586,14 +1472,17 @@
               <a:buNone/>
             </a:pPr>
             <a:r>
-              <a:rPr lang="en-US" sz="900" dirty="0">
-                <a:solidFill>
-                  <a:schemeClr val="tx2"/>
-                </a:solidFill>
+              <a:rPr lang="ja-JP" altLang="en-US" sz="850" dirty="0">
+                <a:solidFill>
+                  <a:srgbClr val="1A1A1A"/>
+                </a:solidFill>
+                <a:latin typeface="Noto Sans JP Medium" pitchFamily="34" charset="0"/>
+                <a:ea typeface="Noto Sans JP Medium" pitchFamily="34" charset="-122"/>
+                <a:cs typeface="Noto Sans JP Medium" pitchFamily="34" charset="-120"/>
               </a:rPr>
               <a:t>マナベル　第8回　Webに公開する</a:t>
             </a:r>
-            <a:endParaRPr lang="en-US" sz="900" dirty="0"/>
+            <a:endParaRPr lang="ja-JP" sz="850" dirty="0"/>
           </a:p>
         </p:txBody>
       </p:sp>
@@ -1609,8 +1498,8 @@
         </p:nvSpPr>
         <p:spPr>
           <a:xfrm>
-            <a:off x="8229600" y="4773168"/>
-            <a:ext cx="365760" cy="228600"/>
+            <a:off x="8366760" y="4754880"/>
+            <a:ext cx="365760" cy="274320"/>
           </a:xfrm>
           <a:prstGeom prst="rect">
             <a:avLst/>
@@ -1622,169 +1511,26 @@
           </a:extLst>
         </p:spPr>
         <p:txBody>
-          <a:bodyPr/>
+          <a:bodyPr anchor="ctr"/>
           <a:lstStyle>
             <a:lvl1pPr>
-              <a:defRPr sz="900">
-                <a:solidFill>
-                  <a:srgbClr val="5A6872"/>
-                </a:solidFill>
+              <a:defRPr sz="850">
+                <a:solidFill>
+                  <a:srgbClr val="FFFFFF"/>
+                </a:solidFill>
+                <a:latin typeface="Noto Sans JP"/>
+                <a:ea typeface="Noto Sans JP"/>
+                <a:cs typeface="Noto Sans JP"/>
               </a:defRPr>
             </a:lvl1pPr>
           </a:lstStyle>
           <a:p>
             <a:pPr algn="r"/>
             <a:fld id="{F7021451-1387-4CA6-816F-3879F97B5CBC}" type="slidenum">
-              <a:rPr b="0" lang="en-US"/>
+              <a:rPr b="1" lang="en-US"/>
               <a:t>1003</a:t>
             </a:fld>
             <a:endParaRPr lang="en-US"/>
-          </a:p>
-        </p:txBody>
-      </p:sp>
-    </p:spTree>
-  </p:cSld>
-  <p:clrMapOvr>
-    <a:masterClrMapping/>
-  </p:clrMapOvr>
-</p:sldLayout>
-</file>
-
-<file path=ppt/slideLayouts/slideLayout4.xml><?xml version="1.0" encoding="utf-8"?>
-<p:sldLayout xmlns:a="http://schemas.openxmlformats.org/drawingml/2006/main" xmlns:r="http://schemas.openxmlformats.org/officeDocument/2006/relationships" xmlns:p="http://schemas.openxmlformats.org/presentationml/2006/main" preserve="1">
-  <p:cSld name="MANA_DARK">
-    <p:bg>
-      <p:bgPr>
-        <a:solidFill>
-          <a:srgbClr val="1A1A1A"/>
-        </a:solidFill>
-      </p:bgPr>
-    </p:bg>
-    <p:spTree>
-      <p:nvGrpSpPr>
-        <p:cNvPr id="1" name=""/>
-        <p:cNvGrpSpPr/>
-        <p:nvPr/>
-      </p:nvGrpSpPr>
-      <p:grpSpPr>
-        <a:xfrm>
-          <a:off x="0" y="0"/>
-          <a:ext cx="0" cy="0"/>
-          <a:chOff x="0" y="0"/>
-          <a:chExt cx="0" cy="0"/>
-        </a:xfrm>
-      </p:grpSpPr>
-      <p:sp>
-        <p:nvSpPr>
-          <p:cNvPr id="2" name="Text 0"/>
-          <p:cNvSpPr/>
-          <p:nvPr>
-            <p:ph idx="100" type="title" hasCustomPrompt="1"/>
-          </p:nvPr>
-        </p:nvSpPr>
-        <p:spPr>
-          <a:xfrm>
-            <a:off x="548640" y="1463040"/>
-            <a:ext cx="8046720" cy="1005840"/>
-          </a:xfrm>
-          <a:prstGeom prst="rect">
-            <a:avLst/>
-          </a:prstGeom>
-          <a:noFill/>
-          <a:ln/>
-        </p:spPr>
-        <p:txBody>
-          <a:bodyPr wrap="square" rtlCol="0"/>
-          <a:lstStyle>
-            <a:lvl1pPr algn="l" indent="0" marL="0">
-              <a:buNone/>
-              <a:defRPr lang="en-US" sz="3000" b="1" dirty="0">
-                <a:solidFill>
-                  <a:schemeClr val="accent1"/>
-                </a:solidFill>
-              </a:defRPr>
-            </a:lvl1pPr>
-          </a:lstStyle>
-          <a:p>
-            <a:pPr algn="l" indent="0" marL="0">
-              <a:buNone/>
-            </a:pPr>
-            <a:endParaRPr lang="en-US" sz="3000" dirty="0"/>
-          </a:p>
-        </p:txBody>
-      </p:sp>
-      <p:sp>
-        <p:nvSpPr>
-          <p:cNvPr id="3" name="Text 0"/>
-          <p:cNvSpPr/>
-          <p:nvPr>
-            <p:ph idx="101" type="body" hasCustomPrompt="1"/>
-          </p:nvPr>
-        </p:nvSpPr>
-        <p:spPr>
-          <a:xfrm>
-            <a:off x="548640" y="2606040"/>
-            <a:ext cx="8046720" cy="1097280"/>
-          </a:xfrm>
-          <a:prstGeom prst="rect">
-            <a:avLst/>
-          </a:prstGeom>
-          <a:noFill/>
-          <a:ln/>
-        </p:spPr>
-        <p:txBody>
-          <a:bodyPr wrap="square" rtlCol="0"/>
-          <a:lstStyle>
-            <a:lvl1pPr indent="0" marL="0">
-              <a:buNone/>
-              <a:defRPr lang="en-US" sz="1500" dirty="0">
-                <a:solidFill>
-                  <a:schemeClr val="bg1"/>
-                </a:solidFill>
-              </a:defRPr>
-            </a:lvl1pPr>
-          </a:lstStyle>
-          <a:p>
-            <a:pPr indent="0" marL="0">
-              <a:buNone/>
-            </a:pPr>
-            <a:endParaRPr lang="en-US" sz="1500" dirty="0"/>
-          </a:p>
-        </p:txBody>
-      </p:sp>
-      <p:sp>
-        <p:nvSpPr>
-          <p:cNvPr id="4" name="Text 0"/>
-          <p:cNvSpPr/>
-          <p:nvPr/>
-        </p:nvSpPr>
-        <p:spPr>
-          <a:xfrm>
-            <a:off x="548640" y="4526280"/>
-            <a:ext cx="5486400" cy="274320"/>
-          </a:xfrm>
-          <a:prstGeom prst="rect">
-            <a:avLst/>
-          </a:prstGeom>
-          <a:noFill/>
-          <a:ln/>
-        </p:spPr>
-        <p:txBody>
-          <a:bodyPr wrap="square" lIns="0" tIns="0" rIns="0" bIns="0" rtlCol="0" anchor="ctr"/>
-          <a:lstStyle/>
-          <a:p>
-            <a:pPr indent="0" marL="0">
-              <a:buNone/>
-            </a:pPr>
-            <a:r>
-              <a:rPr lang="en-US" sz="1000" dirty="0">
-                <a:solidFill>
-                  <a:schemeClr val="bg1"/>
-                </a:solidFill>
-              </a:rPr>
-              <a:t>マナベル｜AI×Lark 構築者育成講座</a:t>
-            </a:r>
-            <a:endParaRPr lang="en-US" sz="1000" dirty="0"/>
           </a:p>
         </p:txBody>
       </p:sp>
@@ -1825,8 +1571,8 @@
         </p:nvSpPr>
         <p:spPr>
           <a:xfrm>
-            <a:off x="8229600" y="4773168"/>
-            <a:ext cx="365760" cy="228600"/>
+            <a:off x="8366760" y="4754880"/>
+            <a:ext cx="365760" cy="274320"/>
           </a:xfrm>
           <a:prstGeom prst="rect">
             <a:avLst/>
@@ -1838,20 +1584,23 @@
           </a:extLst>
         </p:spPr>
         <p:txBody>
-          <a:bodyPr/>
+          <a:bodyPr anchor="ctr"/>
           <a:lstStyle>
             <a:lvl1pPr>
-              <a:defRPr sz="900">
-                <a:solidFill>
-                  <a:srgbClr val="5A6872"/>
-                </a:solidFill>
+              <a:defRPr sz="850">
+                <a:solidFill>
+                  <a:srgbClr val="FFFFFF"/>
+                </a:solidFill>
+                <a:latin typeface="Noto Sans JP"/>
+                <a:ea typeface="Noto Sans JP"/>
+                <a:cs typeface="Noto Sans JP"/>
               </a:defRPr>
             </a:lvl1pPr>
           </a:lstStyle>
           <a:p>
             <a:pPr algn="r"/>
             <a:fld id="{F7021451-1387-4CA6-816F-3879F97B5CBC}" type="slidenum">
-              <a:rPr b="0" lang="en-US"/>
+              <a:rPr b="1" lang="en-US"/>
               <a:t>null</a:t>
             </a:fld>
             <a:endParaRPr lang="en-US"/>
@@ -1865,7 +1614,6 @@
     <p:sldLayoutId id="2147483649" r:id="rId1"/>
     <p:sldLayoutId id="2147483650" r:id="rId2"/>
     <p:sldLayoutId id="2147483651" r:id="rId3"/>
-    <p:sldLayoutId id="2147483652" r:id="rId4"/>
   </p:sldLayoutIdLst>
   <p:hf sldNum="0" hdr="0" ftr="0" dt="0"/>
   <p:txStyles>
@@ -2138,50 +1886,92 @@
           <a:chExt cx="0" cy="0"/>
         </a:xfrm>
       </p:grpSpPr>
-      <p:sp>
-        <p:nvSpPr>
-          <p:cNvPr id="2" name="lesson-badge"/>
-          <p:cNvSpPr/>
-          <p:nvPr/>
-        </p:nvSpPr>
-        <p:spPr>
-          <a:xfrm>
-            <a:off x="548640" y="822960"/>
-            <a:ext cx="1828800" cy="566928"/>
-          </a:xfrm>
-          <a:prstGeom prst="roundRect">
-            <a:avLst>
-              <a:gd name="adj" fmla="val 50000"/>
-            </a:avLst>
+      <p:pic>
+        <p:nvPicPr>
+          <p:cNvPr id="2" name="portrait" descr="講師 笹原彰朗">    </p:cNvPr>
+          <p:cNvPicPr>
+            <a:picLocks noChangeAspect="1"/>
+          </p:cNvPicPr>
+          <p:nvPr/>
+        </p:nvPicPr>
+        <p:blipFill>
+          <a:blip r:embed="rId1"/>
+          <a:stretch>
+            <a:fillRect/>
+          </a:stretch>
+        </p:blipFill>
+        <p:spPr>
+          <a:xfrm>
+            <a:off x="6003588" y="1211580"/>
+            <a:ext cx="2866092" cy="3931920"/>
+          </a:xfrm>
+          <a:prstGeom prst="rect">
+            <a:avLst/>
+          </a:prstGeom>
+        </p:spPr>
+      </p:pic>
+      <p:sp>
+        <p:nvSpPr>
+          <p:cNvPr id="3" name="Text 0"/>
+          <p:cNvSpPr txBox="1"/>
+          <p:nvPr/>
+        </p:nvSpPr>
+        <p:spPr>
+          <a:xfrm rot="-240000">
+            <a:off x="457200" y="411480"/>
+            <a:ext cx="1600200" cy="603504"/>
+          </a:xfrm>
+          <a:prstGeom prst="rect">
+            <a:avLst/>
           </a:prstGeom>
           <a:solidFill>
             <a:srgbClr val="1A1A1A"/>
           </a:solidFill>
-          <a:ln w="12700">
+          <a:ln>
             <a:solidFill>
               <a:srgbClr val="1A1A1A"/>
             </a:solidFill>
-            <a:prstDash val="solid"/>
           </a:ln>
           <a:effectLst>
             <a:outerShdw sx="100000" sy="100000" kx="0" ky="0" algn="bl" rotWithShape="0" blurRad="101600" dist="38100" dir="2700000">
-              <a:srgbClr val="000000">
-                <a:alpha val="18000"/>
+              <a:srgbClr val="1A1A1A">
+                <a:alpha val="100000"/>
               </a:srgbClr>
             </a:outerShdw>
           </a:effectLst>
         </p:spPr>
-      </p:sp>
-      <p:sp>
-        <p:nvSpPr>
-          <p:cNvPr id="3" name="Text 1"/>
+        <p:txBody>
+          <a:bodyPr wrap="square" lIns="0" tIns="0" rIns="0" bIns="0" rtlCol="0" anchor="ctr"/>
+          <a:lstStyle/>
+          <a:p>
+            <a:pPr algn="ctr" indent="0" marL="0">
+              <a:buNone/>
+            </a:pPr>
+            <a:r>
+              <a:rPr lang="ja-JP" altLang="en-US" sz="2200" dirty="0">
+                <a:solidFill>
+                  <a:srgbClr val="FFD600"/>
+                </a:solidFill>
+                <a:latin typeface="Dela Gothic One" pitchFamily="34" charset="0"/>
+                <a:ea typeface="けいふぉんと" pitchFamily="34" charset="-122"/>
+                <a:cs typeface="Dela Gothic One" pitchFamily="34" charset="-120"/>
+              </a:rPr>
+              <a:t>第8回</a:t>
+            </a:r>
+            <a:endParaRPr lang="ja-JP" sz="2200" dirty="0"/>
+          </a:p>
+        </p:txBody>
+      </p:sp>
+      <p:sp>
+        <p:nvSpPr>
+          <p:cNvPr id="4" name="Text 1"/>
           <p:cNvSpPr txBox="1"/>
           <p:nvPr/>
         </p:nvSpPr>
         <p:spPr>
           <a:xfrm>
-            <a:off x="548640" y="822960"/>
-            <a:ext cx="1828800" cy="566928"/>
+            <a:off x="457200" y="1188720"/>
+            <a:ext cx="6035040" cy="1600200"/>
           </a:xfrm>
           <a:prstGeom prst="rect">
             <a:avLst/>
@@ -2190,6 +1980,63 @@
           <a:ln/>
         </p:spPr>
         <p:txBody>
+          <a:bodyPr wrap="square" lIns="0" tIns="0" rIns="0" bIns="0" rtlCol="0" anchor="ctr">
+            <a:normAutofit/>
+          </a:bodyPr>
+          <a:lstStyle/>
+          <a:p>
+            <a:pPr indent="0" marL="0">
+              <a:lnSpc>
+                <a:spcPct val="105000"/>
+              </a:lnSpc>
+              <a:buNone/>
+            </a:pPr>
+            <a:r>
+              <a:rPr lang="ja-JP" altLang="en-US" sz="4000" dirty="0">
+                <a:solidFill>
+                  <a:srgbClr val="1A1A1A"/>
+                </a:solidFill>
+                <a:latin typeface="Dela Gothic One" pitchFamily="34" charset="0"/>
+                <a:ea typeface="けいふぉんと" pitchFamily="34" charset="-122"/>
+                <a:cs typeface="Dela Gothic One" pitchFamily="34" charset="-120"/>
+              </a:rPr>
+              <a:t>Webに公開する</a:t>
+            </a:r>
+            <a:endParaRPr lang="ja-JP" sz="4000" dirty="0"/>
+          </a:p>
+        </p:txBody>
+      </p:sp>
+      <p:sp>
+        <p:nvSpPr>
+          <p:cNvPr id="5" name="Text 2"/>
+          <p:cNvSpPr txBox="1"/>
+          <p:nvPr/>
+        </p:nvSpPr>
+        <p:spPr>
+          <a:xfrm rot="-120000">
+            <a:off x="457200" y="2971800"/>
+            <a:ext cx="4937760" cy="502920"/>
+          </a:xfrm>
+          <a:prstGeom prst="rect">
+            <a:avLst/>
+          </a:prstGeom>
+          <a:solidFill>
+            <a:srgbClr val="DD6420"/>
+          </a:solidFill>
+          <a:ln w="19050">
+            <a:solidFill>
+              <a:srgbClr val="1A1A1A"/>
+            </a:solidFill>
+          </a:ln>
+          <a:effectLst>
+            <a:outerShdw sx="100000" sy="100000" kx="0" ky="0" algn="bl" rotWithShape="0" blurRad="101600" dist="38100" dir="2700000">
+              <a:srgbClr val="1A1A1A">
+                <a:alpha val="100000"/>
+              </a:srgbClr>
+            </a:outerShdw>
+          </a:effectLst>
+        </p:spPr>
+        <p:txBody>
           <a:bodyPr wrap="square" lIns="0" tIns="0" rIns="0" bIns="0" rtlCol="0" anchor="ctr"/>
           <a:lstStyle/>
           <a:p>
@@ -2197,109 +2044,38 @@
               <a:buNone/>
             </a:pPr>
             <a:r>
-              <a:rPr lang="en-US" sz="2200" b="1" dirty="0">
-                <a:solidFill>
-                  <a:schemeClr val="accent1"/>
-                </a:solidFill>
-              </a:rPr>
-              <a:t>第8回</a:t>
-            </a:r>
-            <a:endParaRPr lang="en-US" sz="2200" dirty="0"/>
-          </a:p>
-        </p:txBody>
-      </p:sp>
-      <p:sp>
-        <p:nvSpPr>
-          <p:cNvPr id="4" name="Text 0"/>
+              <a:rPr lang="ja-JP" altLang="en-US" sz="1600" b="1" dirty="0">
+                <a:solidFill>
+                  <a:srgbClr val="FFFFFF"/>
+                </a:solidFill>
+                <a:latin typeface="Noto Sans JP" pitchFamily="34" charset="0"/>
+                <a:ea typeface="Noto Sans JP" pitchFamily="34" charset="-122"/>
+                <a:cs typeface="Noto Sans JP" pitchFamily="34" charset="-120"/>
+              </a:rPr>
+              <a:t>フェーズ3 AIで作る｜第5週</a:t>
+            </a:r>
+            <a:endParaRPr lang="ja-JP" sz="1600" dirty="0"/>
+          </a:p>
+        </p:txBody>
+      </p:sp>
+      <p:sp>
+        <p:nvSpPr>
+          <p:cNvPr id="6" name="card"/>
           <p:cNvSpPr/>
-          <p:nvPr>
-            <p:ph idx="100" type="title" hasCustomPrompt="1"/>
-          </p:nvPr>
-        </p:nvSpPr>
-        <p:spPr>
-          <a:xfrm>
-            <a:off x="548640" y="1691640"/>
-            <a:ext cx="5852160" cy="1371600"/>
-          </a:xfrm>
-          <a:prstGeom prst="rect">
-            <a:avLst/>
-          </a:prstGeom>
-          <a:noFill/>
-          <a:ln/>
-        </p:spPr>
-        <p:txBody>
-          <a:bodyPr wrap="square" lIns="0" tIns="0" rIns="0" bIns="0" rtlCol="0" anchor="t"/>
-          <a:lstStyle/>
-          <a:p>
-            <a:pPr algn="l" indent="0" marL="0">
-              <a:buNone/>
-            </a:pPr>
-            <a:r>
-              <a:rPr lang="en-US" sz="3200" b="1" dirty="0">
-                <a:solidFill>
-                  <a:schemeClr val="tx1"/>
-                </a:solidFill>
-              </a:rPr>
-              <a:t>Webに公開する</a:t>
-            </a:r>
-            <a:endParaRPr lang="en-US" sz="3200" dirty="0"/>
-          </a:p>
-        </p:txBody>
-      </p:sp>
-      <p:sp>
-        <p:nvSpPr>
-          <p:cNvPr id="5" name="Text 0"/>
-          <p:cNvSpPr/>
-          <p:nvPr>
-            <p:ph idx="101" type="body" hasCustomPrompt="1"/>
-          </p:nvPr>
-        </p:nvSpPr>
-        <p:spPr>
-          <a:xfrm>
-            <a:off x="548640" y="3246120"/>
-            <a:ext cx="5852160" cy="457200"/>
-          </a:xfrm>
-          <a:prstGeom prst="rect">
-            <a:avLst/>
-          </a:prstGeom>
-          <a:noFill/>
-          <a:ln/>
-        </p:spPr>
-        <p:txBody>
-          <a:bodyPr wrap="square" lIns="0" tIns="0" rIns="0" bIns="0" rtlCol="0"/>
-          <a:lstStyle/>
-          <a:p>
-            <a:pPr indent="0" marL="0">
-              <a:buNone/>
-            </a:pPr>
-            <a:r>
-              <a:rPr lang="en-US" sz="1400" dirty="0">
-                <a:solidFill>
-                  <a:schemeClr val="tx1"/>
-                </a:solidFill>
-              </a:rPr>
-              <a:t>フェーズ3 AIで作る　｜　第5週</a:t>
-            </a:r>
-            <a:endParaRPr lang="en-US" sz="1400" dirty="0"/>
-          </a:p>
-        </p:txBody>
-      </p:sp>
-      <p:sp>
-        <p:nvSpPr>
-          <p:cNvPr id="6" name="title-circle"/>
-          <p:cNvSpPr/>
-          <p:nvPr/>
-        </p:nvSpPr>
-        <p:spPr>
-          <a:xfrm>
-            <a:off x="6537960" y="1188720"/>
-            <a:ext cx="2103120" cy="2103120"/>
-          </a:xfrm>
-          <a:prstGeom prst="ellipse">
-            <a:avLst/>
-          </a:prstGeom>
-          <a:solidFill>
-            <a:schemeClr val="bg1"/>
+          <p:nvPr/>
+        </p:nvSpPr>
+        <p:spPr>
+          <a:xfrm>
+            <a:off x="457200" y="3730752"/>
+            <a:ext cx="4937760" cy="896112"/>
+          </a:xfrm>
+          <a:prstGeom prst="roundRect">
+            <a:avLst>
+              <a:gd name="adj" fmla="val 10204"/>
+            </a:avLst>
+          </a:prstGeom>
+          <a:solidFill>
+            <a:srgbClr val="FFFFFF"/>
           </a:solidFill>
           <a:ln w="25400">
             <a:solidFill>
@@ -2308,38 +2084,76 @@
             <a:prstDash val="solid"/>
           </a:ln>
           <a:effectLst>
-            <a:outerShdw sx="100000" sy="100000" kx="0" ky="0" algn="bl" rotWithShape="0" blurRad="101600" dist="38100" dir="2700000">
-              <a:srgbClr val="000000">
-                <a:alpha val="18000"/>
+            <a:outerShdw sx="100000" sy="100000" kx="0" ky="0" algn="bl" rotWithShape="0" blurRad="101600" dist="50800" dir="2700000">
+              <a:srgbClr val="1A1A1A">
+                <a:alpha val="100000"/>
               </a:srgbClr>
             </a:outerShdw>
           </a:effectLst>
         </p:spPr>
       </p:sp>
-      <p:pic>
-        <p:nvPicPr>
-          <p:cNvPr id="7" name="title-icon" descr="preencoded.png">    </p:cNvPr>
-          <p:cNvPicPr>
-            <a:picLocks noChangeAspect="1"/>
-          </p:cNvPicPr>
-          <p:nvPr/>
-        </p:nvPicPr>
-        <p:blipFill>
-          <a:blip r:embed="rId1"/>
-          <a:stretch>
-            <a:fillRect/>
-          </a:stretch>
-        </p:blipFill>
-        <p:spPr>
-          <a:xfrm>
-            <a:off x="7086600" y="1737360"/>
-            <a:ext cx="1005840" cy="1005840"/>
-          </a:xfrm>
-          <a:prstGeom prst="rect">
-            <a:avLst/>
-          </a:prstGeom>
-        </p:spPr>
-      </p:pic>
+      <p:sp>
+        <p:nvSpPr>
+          <p:cNvPr id="7" name="Text 4"/>
+          <p:cNvSpPr txBox="1"/>
+          <p:nvPr/>
+        </p:nvSpPr>
+        <p:spPr>
+          <a:xfrm>
+            <a:off x="658368" y="3767328"/>
+            <a:ext cx="4572000" cy="822960"/>
+          </a:xfrm>
+          <a:prstGeom prst="rect">
+            <a:avLst/>
+          </a:prstGeom>
+          <a:noFill/>
+          <a:ln/>
+        </p:spPr>
+        <p:txBody>
+          <a:bodyPr wrap="square" lIns="0" tIns="0" rIns="0" bIns="0" rtlCol="0" anchor="ctr"/>
+          <a:lstStyle/>
+          <a:p>
+            <a:pPr indent="0" marL="0">
+              <a:spcAft>
+                <a:spcPts val="200"/>
+              </a:spcAft>
+              <a:buNone/>
+            </a:pPr>
+            <a:r>
+              <a:rPr lang="ja-JP" altLang="en-US" sz="1500" b="1" dirty="0">
+                <a:solidFill>
+                  <a:srgbClr val="1A1A1A"/>
+                </a:solidFill>
+                <a:latin typeface="Noto Sans JP" pitchFamily="34" charset="0"/>
+                <a:ea typeface="Noto Sans JP" pitchFamily="34" charset="-122"/>
+                <a:cs typeface="Noto Sans JP" pitchFamily="34" charset="-120"/>
+              </a:rPr>
+              <a:t>マナベル｜AI×Lark 構築者育成講座</a:t>
+            </a:r>
+            <a:endParaRPr lang="ja-JP" sz="1500" dirty="0"/>
+          </a:p>
+          <a:p>
+            <a:pPr indent="0" marL="0">
+              <a:spcAft>
+                <a:spcPts val="200"/>
+              </a:spcAft>
+              <a:buNone/>
+            </a:pPr>
+            <a:r>
+              <a:rPr lang="ja-JP" altLang="en-US" sz="1150" b="1" dirty="0">
+                <a:solidFill>
+                  <a:srgbClr val="DD6420"/>
+                </a:solidFill>
+                <a:latin typeface="Noto Sans JP" pitchFamily="34" charset="0"/>
+                <a:ea typeface="Noto Sans JP" pitchFamily="34" charset="-122"/>
+                <a:cs typeface="Noto Sans JP" pitchFamily="34" charset="-120"/>
+              </a:rPr>
+              <a:t>ささエール ／ OFFICE PLATA　笹原 彰朗</a:t>
+            </a:r>
+            <a:endParaRPr lang="ja-JP" sz="1500" dirty="0"/>
+          </a:p>
+        </p:txBody>
+      </p:sp>
     </p:spTree>
   </p:cSld>
   <p:clrMapOvr>
@@ -2368,15 +2182,58 @@
       <p:sp>
         <p:nvSpPr>
           <p:cNvPr id="2" name="Text 0"/>
-          <p:cNvSpPr/>
-          <p:nvPr>
-            <p:ph idx="100" type="title" hasCustomPrompt="1"/>
-          </p:nvPr>
-        </p:nvSpPr>
-        <p:spPr>
-          <a:xfrm>
-            <a:off x="548640" y="658368"/>
-            <a:ext cx="8046720" cy="566928"/>
+          <p:cNvSpPr txBox="1"/>
+          <p:nvPr/>
+        </p:nvSpPr>
+        <p:spPr>
+          <a:xfrm rot="-180000">
+            <a:off x="411480" y="201168"/>
+            <a:ext cx="1040587" cy="352044"/>
+          </a:xfrm>
+          <a:prstGeom prst="rect">
+            <a:avLst/>
+          </a:prstGeom>
+          <a:solidFill>
+            <a:srgbClr val="1A1A1A"/>
+          </a:solidFill>
+          <a:ln>
+            <a:solidFill>
+              <a:srgbClr val="1A1A1A"/>
+            </a:solidFill>
+          </a:ln>
+        </p:spPr>
+        <p:txBody>
+          <a:bodyPr wrap="square" lIns="0" tIns="0" rIns="0" bIns="0" rtlCol="0" anchor="ctr"/>
+          <a:lstStyle/>
+          <a:p>
+            <a:pPr algn="ctr" indent="0" marL="0">
+              <a:buNone/>
+            </a:pPr>
+            <a:r>
+              <a:rPr lang="ja-JP" altLang="en-US" sz="1100" dirty="0">
+                <a:solidFill>
+                  <a:srgbClr val="FFFFFF"/>
+                </a:solidFill>
+                <a:latin typeface="Dela Gothic One" pitchFamily="34" charset="0"/>
+                <a:ea typeface="けいふぉんと" pitchFamily="34" charset="-122"/>
+                <a:cs typeface="Dela Gothic One" pitchFamily="34" charset="-120"/>
+              </a:rPr>
+              <a:t>はじめに</a:t>
+            </a:r>
+            <a:endParaRPr lang="ja-JP" sz="1100" dirty="0"/>
+          </a:p>
+        </p:txBody>
+      </p:sp>
+      <p:sp>
+        <p:nvSpPr>
+          <p:cNvPr id="3" name="Text 1"/>
+          <p:cNvSpPr txBox="1"/>
+          <p:nvPr/>
+        </p:nvSpPr>
+        <p:spPr>
+          <a:xfrm>
+            <a:off x="411480" y="502920"/>
+            <a:ext cx="8321040" cy="685800"/>
           </a:xfrm>
           <a:prstGeom prst="rect">
             <a:avLst/>
@@ -2385,105 +2242,79 @@
           <a:ln/>
         </p:spPr>
         <p:txBody>
-          <a:bodyPr wrap="square" lIns="0" tIns="0" rIns="0" bIns="0" rtlCol="0" anchor="ctr"/>
-          <a:lstStyle/>
-          <a:p>
-            <a:pPr algn="l" indent="0" marL="0">
-              <a:buNone/>
-            </a:pPr>
-            <a:r>
-              <a:rPr lang="en-US" sz="2400" b="1" dirty="0">
-                <a:solidFill>
-                  <a:schemeClr val="tx1"/>
-                </a:solidFill>
+          <a:bodyPr wrap="square" lIns="0" tIns="0" rIns="0" bIns="0" rtlCol="0" anchor="ctr">
+            <a:normAutofit/>
+          </a:bodyPr>
+          <a:lstStyle/>
+          <a:p>
+            <a:pPr indent="0" marL="0">
+              <a:buNone/>
+            </a:pPr>
+            <a:r>
+              <a:rPr lang="ja-JP" altLang="en-US" sz="2600" dirty="0">
+                <a:solidFill>
+                  <a:srgbClr val="1A1A1A"/>
+                </a:solidFill>
+                <a:latin typeface="Dela Gothic One" pitchFamily="34" charset="0"/>
+                <a:ea typeface="けいふぉんと" pitchFamily="34" charset="-122"/>
+                <a:cs typeface="Dela Gothic One" pitchFamily="34" charset="-120"/>
               </a:rPr>
               <a:t>今日のゴールと流れ</a:t>
             </a:r>
-            <a:endParaRPr lang="en-US" sz="2400" dirty="0"/>
-          </a:p>
-        </p:txBody>
-      </p:sp>
-      <p:sp>
-        <p:nvSpPr>
-          <p:cNvPr id="3" name="chip"/>
+            <a:endParaRPr lang="ja-JP" sz="2600" dirty="0"/>
+          </a:p>
+        </p:txBody>
+      </p:sp>
+      <p:sp>
+        <p:nvSpPr>
+          <p:cNvPr id="4" name="card"/>
           <p:cNvSpPr/>
           <p:nvPr/>
         </p:nvSpPr>
         <p:spPr>
           <a:xfrm>
-            <a:off x="548640" y="292608"/>
-            <a:ext cx="932688" cy="292608"/>
+            <a:off x="502920" y="1371600"/>
+            <a:ext cx="3941064" cy="1280160"/>
           </a:xfrm>
           <a:prstGeom prst="roundRect">
             <a:avLst>
-              <a:gd name="adj" fmla="val 50000"/>
+              <a:gd name="adj" fmla="val 7143"/>
             </a:avLst>
           </a:prstGeom>
           <a:solidFill>
-            <a:schemeClr val="tx1"/>
-          </a:solidFill>
-          <a:ln w="12700">
+            <a:srgbClr val="FFFFFF"/>
+          </a:solidFill>
+          <a:ln w="25400">
             <a:solidFill>
-              <a:schemeClr val="tx1"/>
+              <a:srgbClr val="1A1A1A"/>
             </a:solidFill>
             <a:prstDash val="solid"/>
           </a:ln>
-        </p:spPr>
-      </p:sp>
-      <p:sp>
-        <p:nvSpPr>
-          <p:cNvPr id="4" name="chip-text"/>
-          <p:cNvSpPr txBox="1"/>
-          <p:nvPr/>
-        </p:nvSpPr>
-        <p:spPr>
-          <a:xfrm>
-            <a:off x="548640" y="292608"/>
-            <a:ext cx="932688" cy="292608"/>
-          </a:xfrm>
-          <a:prstGeom prst="rect">
-            <a:avLst/>
-          </a:prstGeom>
-          <a:noFill/>
-          <a:ln/>
-        </p:spPr>
-        <p:txBody>
-          <a:bodyPr wrap="square" lIns="0" tIns="0" rIns="0" bIns="0" rtlCol="0" anchor="ctr"/>
-          <a:lstStyle/>
-          <a:p>
-            <a:pPr algn="ctr" indent="0" marL="0">
-              <a:buNone/>
-            </a:pPr>
-            <a:r>
-              <a:rPr lang="en-US" sz="1100" b="1" dirty="0">
-                <a:solidFill>
-                  <a:schemeClr val="accent1"/>
-                </a:solidFill>
-              </a:rPr>
-              <a:t>はじめに</a:t>
-            </a:r>
-            <a:endParaRPr lang="en-US" sz="1100" dirty="0"/>
-          </a:p>
-        </p:txBody>
-      </p:sp>
-      <p:sp>
-        <p:nvSpPr>
-          <p:cNvPr id="5" name="card"/>
+          <a:effectLst>
+            <a:outerShdw sx="100000" sy="100000" kx="0" ky="0" algn="bl" rotWithShape="0" blurRad="101600" dist="50800" dir="2700000">
+              <a:srgbClr val="1A1A1A">
+                <a:alpha val="100000"/>
+              </a:srgbClr>
+            </a:outerShdw>
+          </a:effectLst>
+        </p:spPr>
+      </p:sp>
+      <p:sp>
+        <p:nvSpPr>
+          <p:cNvPr id="5" name="icon-circle"/>
           <p:cNvSpPr/>
           <p:nvPr/>
         </p:nvSpPr>
         <p:spPr>
           <a:xfrm>
-            <a:off x="548640" y="1417320"/>
-            <a:ext cx="3909060" cy="1280160"/>
-          </a:xfrm>
-          <a:prstGeom prst="roundRect">
-            <a:avLst>
-              <a:gd name="adj" fmla="val 8571"/>
-            </a:avLst>
-          </a:prstGeom>
-          <a:solidFill>
-            <a:schemeClr val="bg2"/>
+            <a:off x="685800" y="1572768"/>
+            <a:ext cx="438912" cy="438912"/>
+          </a:xfrm>
+          <a:prstGeom prst="ellipse">
+            <a:avLst/>
+          </a:prstGeom>
+          <a:solidFill>
+            <a:srgbClr val="DD6420"/>
           </a:solidFill>
           <a:ln w="19050">
             <a:solidFill>
@@ -2491,43 +2322,11 @@
             </a:solidFill>
             <a:prstDash val="solid"/>
           </a:ln>
-          <a:effectLst>
-            <a:outerShdw sx="100000" sy="100000" kx="0" ky="0" algn="bl" rotWithShape="0" blurRad="101600" dist="38100" dir="2700000">
-              <a:srgbClr val="000000">
-                <a:alpha val="18000"/>
-              </a:srgbClr>
-            </a:outerShdw>
-          </a:effectLst>
-        </p:spPr>
-      </p:sp>
-      <p:sp>
-        <p:nvSpPr>
-          <p:cNvPr id="6" name="icon-circle"/>
-          <p:cNvSpPr/>
-          <p:nvPr/>
-        </p:nvSpPr>
-        <p:spPr>
-          <a:xfrm>
-            <a:off x="731520" y="1600200"/>
-            <a:ext cx="411480" cy="411480"/>
-          </a:xfrm>
-          <a:prstGeom prst="ellipse">
-            <a:avLst/>
-          </a:prstGeom>
-          <a:solidFill>
-            <a:schemeClr val="accent1"/>
-          </a:solidFill>
-          <a:ln w="15875">
-            <a:solidFill>
-              <a:srgbClr val="1A1A1A"/>
-            </a:solidFill>
-            <a:prstDash val="solid"/>
-          </a:ln>
         </p:spPr>
       </p:sp>
       <p:pic>
         <p:nvPicPr>
-          <p:cNvPr id="7" name="icon" descr="preencoded.png">    </p:cNvPr>
+          <p:cNvPr id="6" name="icon" descr="preencoded.png">    </p:cNvPr>
           <p:cNvPicPr>
             <a:picLocks noChangeAspect="1"/>
           </p:cNvPicPr>
@@ -2541,8 +2340,8 @@
         </p:blipFill>
         <p:spPr>
           <a:xfrm>
-            <a:off x="838505" y="1707185"/>
-            <a:ext cx="197510" cy="197510"/>
+            <a:off x="795528" y="1682496"/>
+            <a:ext cx="219456" cy="219456"/>
           </a:xfrm>
           <a:prstGeom prst="rect">
             <a:avLst/>
@@ -2551,14 +2350,14 @@
       </p:pic>
       <p:sp>
         <p:nvSpPr>
-          <p:cNvPr id="8" name="goal"/>
+          <p:cNvPr id="7" name="goal"/>
           <p:cNvSpPr txBox="1"/>
           <p:nvPr/>
         </p:nvSpPr>
         <p:spPr>
           <a:xfrm>
-            <a:off x="1280160" y="1508760"/>
-            <a:ext cx="2994660" cy="1097280"/>
+            <a:off x="1252728" y="1463040"/>
+            <a:ext cx="3026664" cy="1097280"/>
           </a:xfrm>
           <a:prstGeom prst="rect">
             <a:avLst/>
@@ -2567,42 +2366,79 @@
           <a:ln/>
         </p:spPr>
         <p:txBody>
-          <a:bodyPr wrap="square" lIns="0" tIns="0" rIns="0" bIns="0" rtlCol="0" anchor="ctr"/>
+          <a:bodyPr wrap="square" lIns="0" tIns="0" rIns="0" bIns="0" rtlCol="0" anchor="ctr">
+            <a:normAutofit/>
+          </a:bodyPr>
           <a:lstStyle/>
           <a:p>
             <a:pPr indent="0" marL="0">
               <a:buNone/>
             </a:pPr>
             <a:r>
-              <a:rPr lang="en-US" sz="1400" b="1" dirty="0">
-                <a:solidFill>
-                  <a:schemeClr val="tx1"/>
-                </a:solidFill>
+              <a:rPr lang="ja-JP" altLang="en-US" sz="1400" b="1" dirty="0">
+                <a:solidFill>
+                  <a:srgbClr val="1A1A1A"/>
+                </a:solidFill>
+                <a:latin typeface="Noto Sans JP" pitchFamily="34" charset="0"/>
+                <a:ea typeface="Noto Sans JP" pitchFamily="34" charset="-122"/>
+                <a:cs typeface="Noto Sans JP" pitchFamily="34" charset="-120"/>
               </a:rPr>
               <a:t>作ったページをCloudflare Pagesで公開し、スマホで開ける</a:t>
             </a:r>
-            <a:endParaRPr lang="en-US" sz="1400" dirty="0"/>
-          </a:p>
-        </p:txBody>
-      </p:sp>
-      <p:sp>
-        <p:nvSpPr>
-          <p:cNvPr id="9" name="card"/>
+            <a:endParaRPr lang="ja-JP" sz="1400" dirty="0"/>
+          </a:p>
+        </p:txBody>
+      </p:sp>
+      <p:sp>
+        <p:nvSpPr>
+          <p:cNvPr id="8" name="card"/>
           <p:cNvSpPr/>
           <p:nvPr/>
         </p:nvSpPr>
         <p:spPr>
           <a:xfrm>
-            <a:off x="4686300" y="1417320"/>
-            <a:ext cx="3909060" cy="1280160"/>
+            <a:off x="4700016" y="1371600"/>
+            <a:ext cx="3941064" cy="1280160"/>
           </a:xfrm>
           <a:prstGeom prst="roundRect">
             <a:avLst>
-              <a:gd name="adj" fmla="val 8571"/>
+              <a:gd name="adj" fmla="val 7143"/>
             </a:avLst>
           </a:prstGeom>
           <a:solidFill>
-            <a:schemeClr val="bg2"/>
+            <a:srgbClr val="FFFFFF"/>
+          </a:solidFill>
+          <a:ln w="25400">
+            <a:solidFill>
+              <a:srgbClr val="1A1A1A"/>
+            </a:solidFill>
+            <a:prstDash val="solid"/>
+          </a:ln>
+          <a:effectLst>
+            <a:outerShdw sx="100000" sy="100000" kx="0" ky="0" algn="bl" rotWithShape="0" blurRad="101600" dist="50800" dir="2700000">
+              <a:srgbClr val="1A1A1A">
+                <a:alpha val="100000"/>
+              </a:srgbClr>
+            </a:outerShdw>
+          </a:effectLst>
+        </p:spPr>
+      </p:sp>
+      <p:sp>
+        <p:nvSpPr>
+          <p:cNvPr id="9" name="icon-circle"/>
+          <p:cNvSpPr/>
+          <p:nvPr/>
+        </p:nvSpPr>
+        <p:spPr>
+          <a:xfrm>
+            <a:off x="4882896" y="1572768"/>
+            <a:ext cx="438912" cy="438912"/>
+          </a:xfrm>
+          <a:prstGeom prst="ellipse">
+            <a:avLst/>
+          </a:prstGeom>
+          <a:solidFill>
+            <a:srgbClr val="DD6420"/>
           </a:solidFill>
           <a:ln w="19050">
             <a:solidFill>
@@ -2610,43 +2446,11 @@
             </a:solidFill>
             <a:prstDash val="solid"/>
           </a:ln>
-          <a:effectLst>
-            <a:outerShdw sx="100000" sy="100000" kx="0" ky="0" algn="bl" rotWithShape="0" blurRad="101600" dist="38100" dir="2700000">
-              <a:srgbClr val="000000">
-                <a:alpha val="18000"/>
-              </a:srgbClr>
-            </a:outerShdw>
-          </a:effectLst>
-        </p:spPr>
-      </p:sp>
-      <p:sp>
-        <p:nvSpPr>
-          <p:cNvPr id="10" name="icon-circle"/>
-          <p:cNvSpPr/>
-          <p:nvPr/>
-        </p:nvSpPr>
-        <p:spPr>
-          <a:xfrm>
-            <a:off x="4869180" y="1600200"/>
-            <a:ext cx="411480" cy="411480"/>
-          </a:xfrm>
-          <a:prstGeom prst="ellipse">
-            <a:avLst/>
-          </a:prstGeom>
-          <a:solidFill>
-            <a:schemeClr val="accent1"/>
-          </a:solidFill>
-          <a:ln w="15875">
-            <a:solidFill>
-              <a:srgbClr val="1A1A1A"/>
-            </a:solidFill>
-            <a:prstDash val="solid"/>
-          </a:ln>
         </p:spPr>
       </p:sp>
       <p:pic>
         <p:nvPicPr>
-          <p:cNvPr id="11" name="icon" descr="preencoded.png">    </p:cNvPr>
+          <p:cNvPr id="10" name="icon" descr="preencoded.png">    </p:cNvPr>
           <p:cNvPicPr>
             <a:picLocks noChangeAspect="1"/>
           </p:cNvPicPr>
@@ -2660,8 +2464,8 @@
         </p:blipFill>
         <p:spPr>
           <a:xfrm>
-            <a:off x="4976165" y="1707185"/>
-            <a:ext cx="197510" cy="197510"/>
+            <a:off x="4992624" y="1682496"/>
+            <a:ext cx="219456" cy="219456"/>
           </a:xfrm>
           <a:prstGeom prst="rect">
             <a:avLst/>
@@ -2670,14 +2474,14 @@
       </p:pic>
       <p:sp>
         <p:nvSpPr>
-          <p:cNvPr id="12" name="goal"/>
+          <p:cNvPr id="11" name="goal"/>
           <p:cNvSpPr txBox="1"/>
           <p:nvPr/>
         </p:nvSpPr>
         <p:spPr>
           <a:xfrm>
-            <a:off x="5417820" y="1508760"/>
-            <a:ext cx="2994660" cy="1097280"/>
+            <a:off x="5449824" y="1463040"/>
+            <a:ext cx="3026664" cy="1097280"/>
           </a:xfrm>
           <a:prstGeom prst="rect">
             <a:avLst/>
@@ -2686,59 +2490,105 @@
           <a:ln/>
         </p:spPr>
         <p:txBody>
+          <a:bodyPr wrap="square" lIns="0" tIns="0" rIns="0" bIns="0" rtlCol="0" anchor="ctr">
+            <a:normAutofit/>
+          </a:bodyPr>
+          <a:lstStyle/>
+          <a:p>
+            <a:pPr indent="0" marL="0">
+              <a:buNone/>
+            </a:pPr>
+            <a:r>
+              <a:rPr lang="ja-JP" altLang="en-US" sz="1400" b="1" dirty="0">
+                <a:solidFill>
+                  <a:srgbClr val="1A1A1A"/>
+                </a:solidFill>
+                <a:latin typeface="Noto Sans JP" pitchFamily="34" charset="0"/>
+                <a:ea typeface="Noto Sans JP" pitchFamily="34" charset="-122"/>
+                <a:cs typeface="Noto Sans JP" pitchFamily="34" charset="-120"/>
+              </a:rPr>
+              <a:t>GitHubに保存すると、公開ページにも自動で反映される</a:t>
+            </a:r>
+            <a:endParaRPr lang="ja-JP" sz="1400" dirty="0"/>
+          </a:p>
+        </p:txBody>
+      </p:sp>
+      <p:sp>
+        <p:nvSpPr>
+          <p:cNvPr id="12" name="Text 8"/>
+          <p:cNvSpPr txBox="1"/>
+          <p:nvPr/>
+        </p:nvSpPr>
+        <p:spPr>
+          <a:xfrm rot="-120000">
+            <a:off x="457200" y="2907792"/>
+            <a:ext cx="1915668" cy="352044"/>
+          </a:xfrm>
+          <a:prstGeom prst="rect">
+            <a:avLst/>
+          </a:prstGeom>
+          <a:solidFill>
+            <a:srgbClr val="1A1A1A"/>
+          </a:solidFill>
+          <a:ln>
+            <a:solidFill>
+              <a:srgbClr val="1A1A1A"/>
+            </a:solidFill>
+          </a:ln>
+        </p:spPr>
+        <p:txBody>
           <a:bodyPr wrap="square" lIns="0" tIns="0" rIns="0" bIns="0" rtlCol="0" anchor="ctr"/>
           <a:lstStyle/>
           <a:p>
-            <a:pPr indent="0" marL="0">
-              <a:buNone/>
-            </a:pPr>
-            <a:r>
-              <a:rPr lang="en-US" sz="1400" b="1" dirty="0">
-                <a:solidFill>
-                  <a:schemeClr val="tx1"/>
-                </a:solidFill>
-              </a:rPr>
-              <a:t>GitHubに保存すると、公開ページにも自動で反映される</a:t>
-            </a:r>
-            <a:endParaRPr lang="en-US" sz="1400" dirty="0"/>
-          </a:p>
-        </p:txBody>
-      </p:sp>
-      <p:sp>
-        <p:nvSpPr>
-          <p:cNvPr id="13" name="Text 9"/>
-          <p:cNvSpPr txBox="1"/>
-          <p:nvPr/>
-        </p:nvSpPr>
-        <p:spPr>
-          <a:xfrm>
-            <a:off x="548640" y="2971800"/>
-            <a:ext cx="3657600" cy="320040"/>
-          </a:xfrm>
-          <a:prstGeom prst="rect">
-            <a:avLst/>
-          </a:prstGeom>
-          <a:noFill/>
-          <a:ln/>
-        </p:spPr>
-        <p:txBody>
-          <a:bodyPr wrap="square" lIns="0" tIns="0" rIns="0" bIns="0" rtlCol="0" anchor="ctr"/>
-          <a:lstStyle/>
-          <a:p>
-            <a:pPr indent="0" marL="0">
-              <a:buNone/>
-            </a:pPr>
-            <a:r>
-              <a:rPr lang="en-US" sz="1300" b="1" dirty="0">
-                <a:solidFill>
-                  <a:schemeClr val="tx1"/>
-                </a:solidFill>
+            <a:pPr algn="ctr" indent="0" marL="0">
+              <a:buNone/>
+            </a:pPr>
+            <a:r>
+              <a:rPr lang="ja-JP" altLang="en-US" sz="1100" dirty="0">
+                <a:solidFill>
+                  <a:srgbClr val="FFFFFF"/>
+                </a:solidFill>
+                <a:latin typeface="Dela Gothic One" pitchFamily="34" charset="0"/>
+                <a:ea typeface="けいふぉんと" pitchFamily="34" charset="-122"/>
+                <a:cs typeface="Dela Gothic One" pitchFamily="34" charset="-120"/>
               </a:rPr>
               <a:t>今日の流れ（90分）</a:t>
             </a:r>
-            <a:endParaRPr lang="en-US" sz="1300" dirty="0"/>
-          </a:p>
-        </p:txBody>
+            <a:endParaRPr lang="ja-JP" sz="1100" dirty="0"/>
+          </a:p>
+        </p:txBody>
+      </p:sp>
+      <p:sp>
+        <p:nvSpPr>
+          <p:cNvPr id="13" name="Shape 9"/>
+          <p:cNvSpPr/>
+          <p:nvPr/>
+        </p:nvSpPr>
+        <p:spPr>
+          <a:xfrm>
+            <a:off x="502920" y="3364992"/>
+            <a:ext cx="8138160" cy="685800"/>
+          </a:xfrm>
+          <a:prstGeom prst="rect">
+            <a:avLst/>
+          </a:prstGeom>
+          <a:solidFill>
+            <a:srgbClr val="FFFFFF"/>
+          </a:solidFill>
+          <a:ln w="25400">
+            <a:solidFill>
+              <a:srgbClr val="1A1A1A"/>
+            </a:solidFill>
+            <a:prstDash val="solid"/>
+          </a:ln>
+          <a:effectLst>
+            <a:outerShdw sx="100000" sy="100000" kx="0" ky="0" algn="bl" rotWithShape="0" blurRad="101600" dist="50800" dir="2700000">
+              <a:srgbClr val="1A1A1A">
+                <a:alpha val="100000"/>
+              </a:srgbClr>
+            </a:outerShdw>
+          </a:effectLst>
+        </p:spPr>
       </p:sp>
       <p:sp>
         <p:nvSpPr>
@@ -2748,8 +2598,8 @@
         </p:nvSpPr>
         <p:spPr>
           <a:xfrm>
-            <a:off x="548640" y="3383280"/>
-            <a:ext cx="894080" cy="685800"/>
+            <a:off x="502920" y="3364992"/>
+            <a:ext cx="904240" cy="685800"/>
           </a:xfrm>
           <a:prstGeom prst="rect">
             <a:avLst/>
@@ -2773,8 +2623,8 @@
         </p:nvSpPr>
         <p:spPr>
           <a:xfrm>
-            <a:off x="548640" y="3383280"/>
-            <a:ext cx="894080" cy="685800"/>
+            <a:off x="502920" y="3364992"/>
+            <a:ext cx="904240" cy="685800"/>
           </a:xfrm>
           <a:prstGeom prst="rect">
             <a:avLst/>
@@ -2790,28 +2640,34 @@
               <a:buNone/>
             </a:pPr>
             <a:r>
-              <a:rPr lang="en-US" sz="1050" b="1" dirty="0">
+              <a:rPr lang="ja-JP" altLang="en-US" sz="1050" b="1" dirty="0">
                 <a:solidFill>
                   <a:srgbClr val="FFD600"/>
                 </a:solidFill>
+                <a:latin typeface="Noto Sans JP" pitchFamily="34" charset="0"/>
+                <a:ea typeface="Noto Sans JP" pitchFamily="34" charset="-122"/>
+                <a:cs typeface="Noto Sans JP" pitchFamily="34" charset="-120"/>
               </a:rPr>
               <a:t>ふりかえり</a:t>
             </a:r>
-            <a:endParaRPr lang="en-US" sz="1050" dirty="0"/>
+            <a:endParaRPr lang="ja-JP" sz="1050" dirty="0"/>
           </a:p>
           <a:p>
             <a:pPr algn="ctr" indent="0" marL="0">
               <a:buNone/>
             </a:pPr>
             <a:r>
-              <a:rPr lang="en-US" sz="900" b="1" dirty="0">
+              <a:rPr lang="ja-JP" altLang="en-US" sz="900" b="1" dirty="0">
                 <a:solidFill>
                   <a:srgbClr val="FFD600"/>
                 </a:solidFill>
+                <a:latin typeface="Noto Sans JP" pitchFamily="34" charset="0"/>
+                <a:ea typeface="Noto Sans JP" pitchFamily="34" charset="-122"/>
+                <a:cs typeface="Noto Sans JP" pitchFamily="34" charset="-120"/>
               </a:rPr>
               <a:t>10分</a:t>
             </a:r>
-            <a:endParaRPr lang="en-US" sz="1050" dirty="0"/>
+            <a:endParaRPr lang="ja-JP" sz="1050" dirty="0"/>
           </a:p>
         </p:txBody>
       </p:sp>
@@ -2823,8 +2679,8 @@
         </p:nvSpPr>
         <p:spPr>
           <a:xfrm>
-            <a:off x="1442720" y="3383280"/>
-            <a:ext cx="894080" cy="685800"/>
+            <a:off x="1407160" y="3364992"/>
+            <a:ext cx="904240" cy="685800"/>
           </a:xfrm>
           <a:prstGeom prst="rect">
             <a:avLst/>
@@ -2848,8 +2704,8 @@
         </p:nvSpPr>
         <p:spPr>
           <a:xfrm>
-            <a:off x="1442720" y="3383280"/>
-            <a:ext cx="894080" cy="685800"/>
+            <a:off x="1407160" y="3364992"/>
+            <a:ext cx="904240" cy="685800"/>
           </a:xfrm>
           <a:prstGeom prst="rect">
             <a:avLst/>
@@ -2865,28 +2721,34 @@
               <a:buNone/>
             </a:pPr>
             <a:r>
-              <a:rPr lang="en-US" sz="1050" b="1" dirty="0">
+              <a:rPr lang="ja-JP" altLang="en-US" sz="1050" b="1" dirty="0">
                 <a:solidFill>
                   <a:srgbClr val="FFD600"/>
                 </a:solidFill>
+                <a:latin typeface="Noto Sans JP" pitchFamily="34" charset="0"/>
+                <a:ea typeface="Noto Sans JP" pitchFamily="34" charset="-122"/>
+                <a:cs typeface="Noto Sans JP" pitchFamily="34" charset="-120"/>
               </a:rPr>
               <a:t>説明①</a:t>
             </a:r>
-            <a:endParaRPr lang="en-US" sz="1050" dirty="0"/>
+            <a:endParaRPr lang="ja-JP" sz="1050" dirty="0"/>
           </a:p>
           <a:p>
             <a:pPr algn="ctr" indent="0" marL="0">
               <a:buNone/>
             </a:pPr>
             <a:r>
-              <a:rPr lang="en-US" sz="900" b="1" dirty="0">
+              <a:rPr lang="ja-JP" altLang="en-US" sz="900" b="1" dirty="0">
                 <a:solidFill>
                   <a:srgbClr val="FFD600"/>
                 </a:solidFill>
+                <a:latin typeface="Noto Sans JP" pitchFamily="34" charset="0"/>
+                <a:ea typeface="Noto Sans JP" pitchFamily="34" charset="-122"/>
+                <a:cs typeface="Noto Sans JP" pitchFamily="34" charset="-120"/>
               </a:rPr>
               <a:t>10分</a:t>
             </a:r>
-            <a:endParaRPr lang="en-US" sz="1050" dirty="0"/>
+            <a:endParaRPr lang="ja-JP" sz="1050" dirty="0"/>
           </a:p>
         </p:txBody>
       </p:sp>
@@ -2898,8 +2760,8 @@
         </p:nvSpPr>
         <p:spPr>
           <a:xfrm>
-            <a:off x="2336800" y="3383280"/>
-            <a:ext cx="1788160" cy="685800"/>
+            <a:off x="2311400" y="3364992"/>
+            <a:ext cx="1808480" cy="685800"/>
           </a:xfrm>
           <a:prstGeom prst="rect">
             <a:avLst/>
@@ -2923,8 +2785,8 @@
         </p:nvSpPr>
         <p:spPr>
           <a:xfrm>
-            <a:off x="2336800" y="3383280"/>
-            <a:ext cx="1788160" cy="685800"/>
+            <a:off x="2311400" y="3364992"/>
+            <a:ext cx="1808480" cy="685800"/>
           </a:xfrm>
           <a:prstGeom prst="rect">
             <a:avLst/>
@@ -2940,28 +2802,34 @@
               <a:buNone/>
             </a:pPr>
             <a:r>
-              <a:rPr lang="en-US" sz="1050" b="1" dirty="0">
+              <a:rPr lang="ja-JP" altLang="en-US" sz="1050" b="1" dirty="0">
                 <a:solidFill>
                   <a:srgbClr val="FFFFFF"/>
                 </a:solidFill>
+                <a:latin typeface="Noto Sans JP" pitchFamily="34" charset="0"/>
+                <a:ea typeface="Noto Sans JP" pitchFamily="34" charset="-122"/>
+                <a:cs typeface="Noto Sans JP" pitchFamily="34" charset="-120"/>
               </a:rPr>
               <a:t>ハンズオン①</a:t>
             </a:r>
-            <a:endParaRPr lang="en-US" sz="1050" dirty="0"/>
+            <a:endParaRPr lang="ja-JP" sz="1050" dirty="0"/>
           </a:p>
           <a:p>
             <a:pPr algn="ctr" indent="0" marL="0">
               <a:buNone/>
             </a:pPr>
             <a:r>
-              <a:rPr lang="en-US" sz="900" b="1" dirty="0">
+              <a:rPr lang="ja-JP" altLang="en-US" sz="900" b="1" dirty="0">
                 <a:solidFill>
                   <a:srgbClr val="FFFFFF"/>
                 </a:solidFill>
+                <a:latin typeface="Noto Sans JP" pitchFamily="34" charset="0"/>
+                <a:ea typeface="Noto Sans JP" pitchFamily="34" charset="-122"/>
+                <a:cs typeface="Noto Sans JP" pitchFamily="34" charset="-120"/>
               </a:rPr>
               <a:t>20分</a:t>
             </a:r>
-            <a:endParaRPr lang="en-US" sz="1050" dirty="0"/>
+            <a:endParaRPr lang="ja-JP" sz="1050" dirty="0"/>
           </a:p>
         </p:txBody>
       </p:sp>
@@ -2973,8 +2841,8 @@
         </p:nvSpPr>
         <p:spPr>
           <a:xfrm>
-            <a:off x="4124960" y="3383280"/>
-            <a:ext cx="894080" cy="685800"/>
+            <a:off x="4119880" y="3364992"/>
+            <a:ext cx="904240" cy="685800"/>
           </a:xfrm>
           <a:prstGeom prst="rect">
             <a:avLst/>
@@ -2998,8 +2866,8 @@
         </p:nvSpPr>
         <p:spPr>
           <a:xfrm>
-            <a:off x="4124960" y="3383280"/>
-            <a:ext cx="894080" cy="685800"/>
+            <a:off x="4119880" y="3364992"/>
+            <a:ext cx="904240" cy="685800"/>
           </a:xfrm>
           <a:prstGeom prst="rect">
             <a:avLst/>
@@ -3015,28 +2883,34 @@
               <a:buNone/>
             </a:pPr>
             <a:r>
-              <a:rPr lang="en-US" sz="1050" b="1" dirty="0">
+              <a:rPr lang="ja-JP" altLang="en-US" sz="1050" b="1" dirty="0">
                 <a:solidFill>
                   <a:srgbClr val="FFD600"/>
                 </a:solidFill>
+                <a:latin typeface="Noto Sans JP" pitchFamily="34" charset="0"/>
+                <a:ea typeface="Noto Sans JP" pitchFamily="34" charset="-122"/>
+                <a:cs typeface="Noto Sans JP" pitchFamily="34" charset="-120"/>
               </a:rPr>
               <a:t>説明②</a:t>
             </a:r>
-            <a:endParaRPr lang="en-US" sz="1050" dirty="0"/>
+            <a:endParaRPr lang="ja-JP" sz="1050" dirty="0"/>
           </a:p>
           <a:p>
             <a:pPr algn="ctr" indent="0" marL="0">
               <a:buNone/>
             </a:pPr>
             <a:r>
-              <a:rPr lang="en-US" sz="900" b="1" dirty="0">
+              <a:rPr lang="ja-JP" altLang="en-US" sz="900" b="1" dirty="0">
                 <a:solidFill>
                   <a:srgbClr val="FFD600"/>
                 </a:solidFill>
+                <a:latin typeface="Noto Sans JP" pitchFamily="34" charset="0"/>
+                <a:ea typeface="Noto Sans JP" pitchFamily="34" charset="-122"/>
+                <a:cs typeface="Noto Sans JP" pitchFamily="34" charset="-120"/>
               </a:rPr>
               <a:t>10分</a:t>
             </a:r>
-            <a:endParaRPr lang="en-US" sz="1050" dirty="0"/>
+            <a:endParaRPr lang="ja-JP" sz="1050" dirty="0"/>
           </a:p>
         </p:txBody>
       </p:sp>
@@ -3048,8 +2922,8 @@
         </p:nvSpPr>
         <p:spPr>
           <a:xfrm>
-            <a:off x="5019040" y="3383280"/>
-            <a:ext cx="1788160" cy="685800"/>
+            <a:off x="5024120" y="3364992"/>
+            <a:ext cx="1808480" cy="685800"/>
           </a:xfrm>
           <a:prstGeom prst="rect">
             <a:avLst/>
@@ -3073,8 +2947,8 @@
         </p:nvSpPr>
         <p:spPr>
           <a:xfrm>
-            <a:off x="5019040" y="3383280"/>
-            <a:ext cx="1788160" cy="685800"/>
+            <a:off x="5024120" y="3364992"/>
+            <a:ext cx="1808480" cy="685800"/>
           </a:xfrm>
           <a:prstGeom prst="rect">
             <a:avLst/>
@@ -3090,28 +2964,34 @@
               <a:buNone/>
             </a:pPr>
             <a:r>
-              <a:rPr lang="en-US" sz="1050" b="1" dirty="0">
+              <a:rPr lang="ja-JP" altLang="en-US" sz="1050" b="1" dirty="0">
                 <a:solidFill>
                   <a:srgbClr val="FFFFFF"/>
                 </a:solidFill>
+                <a:latin typeface="Noto Sans JP" pitchFamily="34" charset="0"/>
+                <a:ea typeface="Noto Sans JP" pitchFamily="34" charset="-122"/>
+                <a:cs typeface="Noto Sans JP" pitchFamily="34" charset="-120"/>
               </a:rPr>
               <a:t>ハンズオン②</a:t>
             </a:r>
-            <a:endParaRPr lang="en-US" sz="1050" dirty="0"/>
+            <a:endParaRPr lang="ja-JP" sz="1050" dirty="0"/>
           </a:p>
           <a:p>
             <a:pPr algn="ctr" indent="0" marL="0">
               <a:buNone/>
             </a:pPr>
             <a:r>
-              <a:rPr lang="en-US" sz="900" b="1" dirty="0">
+              <a:rPr lang="ja-JP" altLang="en-US" sz="900" b="1" dirty="0">
                 <a:solidFill>
                   <a:srgbClr val="FFFFFF"/>
                 </a:solidFill>
+                <a:latin typeface="Noto Sans JP" pitchFamily="34" charset="0"/>
+                <a:ea typeface="Noto Sans JP" pitchFamily="34" charset="-122"/>
+                <a:cs typeface="Noto Sans JP" pitchFamily="34" charset="-120"/>
               </a:rPr>
               <a:t>20分</a:t>
             </a:r>
-            <a:endParaRPr lang="en-US" sz="1050" dirty="0"/>
+            <a:endParaRPr lang="ja-JP" sz="1050" dirty="0"/>
           </a:p>
         </p:txBody>
       </p:sp>
@@ -3123,8 +3003,8 @@
         </p:nvSpPr>
         <p:spPr>
           <a:xfrm>
-            <a:off x="6807200" y="3383280"/>
-            <a:ext cx="1341120" cy="685800"/>
+            <a:off x="6832600" y="3364992"/>
+            <a:ext cx="1356360" cy="685800"/>
           </a:xfrm>
           <a:prstGeom prst="rect">
             <a:avLst/>
@@ -3148,8 +3028,8 @@
         </p:nvSpPr>
         <p:spPr>
           <a:xfrm>
-            <a:off x="6807200" y="3383280"/>
-            <a:ext cx="1341120" cy="685800"/>
+            <a:off x="6832600" y="3364992"/>
+            <a:ext cx="1356360" cy="685800"/>
           </a:xfrm>
           <a:prstGeom prst="rect">
             <a:avLst/>
@@ -3165,28 +3045,34 @@
               <a:buNone/>
             </a:pPr>
             <a:r>
-              <a:rPr lang="en-US" sz="1050" b="1" dirty="0">
+              <a:rPr lang="ja-JP" altLang="en-US" sz="1050" b="1" dirty="0">
                 <a:solidFill>
                   <a:srgbClr val="FFD600"/>
                 </a:solidFill>
+                <a:latin typeface="Noto Sans JP" pitchFamily="34" charset="0"/>
+                <a:ea typeface="Noto Sans JP" pitchFamily="34" charset="-122"/>
+                <a:cs typeface="Noto Sans JP" pitchFamily="34" charset="-120"/>
               </a:rPr>
               <a:t>質問・共有</a:t>
             </a:r>
-            <a:endParaRPr lang="en-US" sz="1050" dirty="0"/>
+            <a:endParaRPr lang="ja-JP" sz="1050" dirty="0"/>
           </a:p>
           <a:p>
             <a:pPr algn="ctr" indent="0" marL="0">
               <a:buNone/>
             </a:pPr>
             <a:r>
-              <a:rPr lang="en-US" sz="900" b="1" dirty="0">
+              <a:rPr lang="ja-JP" altLang="en-US" sz="900" b="1" dirty="0">
                 <a:solidFill>
                   <a:srgbClr val="FFD600"/>
                 </a:solidFill>
+                <a:latin typeface="Noto Sans JP" pitchFamily="34" charset="0"/>
+                <a:ea typeface="Noto Sans JP" pitchFamily="34" charset="-122"/>
+                <a:cs typeface="Noto Sans JP" pitchFamily="34" charset="-120"/>
               </a:rPr>
               <a:t>15分</a:t>
             </a:r>
-            <a:endParaRPr lang="en-US" sz="1050" dirty="0"/>
+            <a:endParaRPr lang="ja-JP" sz="1050" dirty="0"/>
           </a:p>
         </p:txBody>
       </p:sp>
@@ -3198,8 +3084,8 @@
         </p:nvSpPr>
         <p:spPr>
           <a:xfrm>
-            <a:off x="8148320" y="3383280"/>
-            <a:ext cx="447040" cy="685800"/>
+            <a:off x="8188960" y="3364992"/>
+            <a:ext cx="452120" cy="685800"/>
           </a:xfrm>
           <a:prstGeom prst="rect">
             <a:avLst/>
@@ -3223,8 +3109,8 @@
         </p:nvSpPr>
         <p:spPr>
           <a:xfrm>
-            <a:off x="8148320" y="3383280"/>
-            <a:ext cx="447040" cy="685800"/>
+            <a:off x="8188960" y="3364992"/>
+            <a:ext cx="452120" cy="685800"/>
           </a:xfrm>
           <a:prstGeom prst="rect">
             <a:avLst/>
@@ -3240,28 +3126,34 @@
               <a:buNone/>
             </a:pPr>
             <a:r>
-              <a:rPr lang="en-US" sz="850" b="1" dirty="0">
+              <a:rPr lang="ja-JP" altLang="en-US" sz="850" b="1" dirty="0">
                 <a:solidFill>
                   <a:srgbClr val="FFD600"/>
                 </a:solidFill>
+                <a:latin typeface="Noto Sans JP" pitchFamily="34" charset="0"/>
+                <a:ea typeface="Noto Sans JP" pitchFamily="34" charset="-122"/>
+                <a:cs typeface="Noto Sans JP" pitchFamily="34" charset="-120"/>
               </a:rPr>
               <a:t>宿題</a:t>
             </a:r>
-            <a:endParaRPr lang="en-US" sz="850" dirty="0"/>
+            <a:endParaRPr lang="ja-JP" sz="850" dirty="0"/>
           </a:p>
           <a:p>
             <a:pPr algn="ctr" indent="0" marL="0">
               <a:buNone/>
             </a:pPr>
             <a:r>
-              <a:rPr lang="en-US" sz="900" b="1" dirty="0">
+              <a:rPr lang="ja-JP" altLang="en-US" sz="900" b="1" dirty="0">
                 <a:solidFill>
                   <a:srgbClr val="FFD600"/>
                 </a:solidFill>
+                <a:latin typeface="Noto Sans JP" pitchFamily="34" charset="0"/>
+                <a:ea typeface="Noto Sans JP" pitchFamily="34" charset="-122"/>
+                <a:cs typeface="Noto Sans JP" pitchFamily="34" charset="-120"/>
               </a:rPr>
               <a:t>5分</a:t>
             </a:r>
-            <a:endParaRPr lang="en-US" sz="850" dirty="0"/>
+            <a:endParaRPr lang="ja-JP" sz="850" dirty="0"/>
           </a:p>
         </p:txBody>
       </p:sp>
@@ -3273,7 +3165,7 @@
         </p:nvSpPr>
         <p:spPr>
           <a:xfrm>
-            <a:off x="548640" y="4160520"/>
+            <a:off x="502920" y="4187952"/>
             <a:ext cx="3657600" cy="274320"/>
           </a:xfrm>
           <a:prstGeom prst="rect">
@@ -3290,10 +3182,13 @@
               <a:buNone/>
             </a:pPr>
             <a:r>
-              <a:rPr lang="en-US" sz="1000" dirty="0">
+              <a:rPr lang="ja-JP" altLang="en-US" sz="1050" b="1" dirty="0">
                 <a:solidFill>
                   <a:srgbClr val="1A1A1A"/>
                 </a:solidFill>
+                <a:latin typeface="Noto Sans JP" pitchFamily="34" charset="0"/>
+                <a:ea typeface="Noto Sans JP" pitchFamily="34" charset="-122"/>
+                <a:cs typeface="Noto Sans JP" pitchFamily="34" charset="-120"/>
               </a:rPr>
               <a:t>■ </a:t>
             </a:r>
@@ -3301,10 +3196,13 @@
               <a:buNone/>
             </a:pPr>
             <a:r>
-              <a:rPr lang="en-US" sz="1000" dirty="0">
-                <a:solidFill>
-                  <a:schemeClr val="tx2"/>
-                </a:solidFill>
+              <a:rPr lang="ja-JP" altLang="en-US" sz="1050" b="1" dirty="0">
+                <a:solidFill>
+                  <a:srgbClr val="1A1A1A"/>
+                </a:solidFill>
+                <a:latin typeface="Noto Sans JP" pitchFamily="34" charset="0"/>
+                <a:ea typeface="Noto Sans JP" pitchFamily="34" charset="-122"/>
+                <a:cs typeface="Noto Sans JP" pitchFamily="34" charset="-120"/>
               </a:rPr>
               <a:t>聞く　</a:t>
             </a:r>
@@ -3312,10 +3210,13 @@
               <a:buNone/>
             </a:pPr>
             <a:r>
-              <a:rPr lang="en-US" sz="1000" dirty="0">
+              <a:rPr lang="ja-JP" altLang="en-US" sz="1050" b="1" dirty="0">
                 <a:solidFill>
                   <a:srgbClr val="DD6420"/>
                 </a:solidFill>
+                <a:latin typeface="Noto Sans JP" pitchFamily="34" charset="0"/>
+                <a:ea typeface="Noto Sans JP" pitchFamily="34" charset="-122"/>
+                <a:cs typeface="Noto Sans JP" pitchFamily="34" charset="-120"/>
               </a:rPr>
               <a:t>■ </a:t>
             </a:r>
@@ -3323,14 +3224,17 @@
               <a:buNone/>
             </a:pPr>
             <a:r>
-              <a:rPr lang="en-US" sz="1000" dirty="0">
-                <a:solidFill>
-                  <a:schemeClr val="tx2"/>
-                </a:solidFill>
+              <a:rPr lang="ja-JP" altLang="en-US" sz="1050" b="1" dirty="0">
+                <a:solidFill>
+                  <a:srgbClr val="1A1A1A"/>
+                </a:solidFill>
+                <a:latin typeface="Noto Sans JP" pitchFamily="34" charset="0"/>
+                <a:ea typeface="Noto Sans JP" pitchFamily="34" charset="-122"/>
+                <a:cs typeface="Noto Sans JP" pitchFamily="34" charset="-120"/>
               </a:rPr>
               <a:t>手を動かす</a:t>
             </a:r>
-            <a:endParaRPr lang="en-US" sz="1000" dirty="0"/>
+            <a:endParaRPr lang="ja-JP" sz="1050" dirty="0"/>
           </a:p>
         </p:txBody>
       </p:sp>
@@ -3346,8 +3250,8 @@
         </p:nvSpPr>
         <p:spPr>
           <a:xfrm>
-            <a:off x="8229600" y="4773168"/>
-            <a:ext cx="365760" cy="228600"/>
+            <a:off x="8366760" y="4754880"/>
+            <a:ext cx="365760" cy="274320"/>
           </a:xfrm>
           <a:prstGeom prst="rect">
             <a:avLst/>
@@ -3359,20 +3263,23 @@
           </a:extLst>
         </p:spPr>
         <p:txBody>
-          <a:bodyPr/>
+          <a:bodyPr anchor="ctr"/>
           <a:lstStyle>
             <a:lvl1pPr>
-              <a:defRPr sz="900">
-                <a:solidFill>
-                  <a:srgbClr val="5A6872"/>
-                </a:solidFill>
+              <a:defRPr sz="850">
+                <a:solidFill>
+                  <a:srgbClr val="FFFFFF"/>
+                </a:solidFill>
+                <a:latin typeface="Noto Sans JP"/>
+                <a:ea typeface="Noto Sans JP"/>
+                <a:cs typeface="Noto Sans JP"/>
               </a:defRPr>
             </a:lvl1pPr>
           </a:lstStyle>
           <a:p>
             <a:pPr algn="r"/>
             <a:fld id="{F7021451-1387-4CA6-816F-3879F97B5CBC}" type="slidenum">
-              <a:rPr b="0" lang="en-US"/>
+              <a:rPr b="1" lang="en-US"/>
               <a:t>2</a:t>
             </a:fld>
             <a:endParaRPr lang="en-US"/>
@@ -3407,15 +3314,58 @@
       <p:sp>
         <p:nvSpPr>
           <p:cNvPr id="2" name="Text 0"/>
-          <p:cNvSpPr/>
-          <p:nvPr>
-            <p:ph idx="100" type="title" hasCustomPrompt="1"/>
-          </p:nvPr>
-        </p:nvSpPr>
-        <p:spPr>
-          <a:xfrm>
-            <a:off x="548640" y="658368"/>
-            <a:ext cx="8046720" cy="566928"/>
+          <p:cNvSpPr txBox="1"/>
+          <p:nvPr/>
+        </p:nvSpPr>
+        <p:spPr>
+          <a:xfrm rot="-180000">
+            <a:off x="411480" y="201168"/>
+            <a:ext cx="1478128" cy="352044"/>
+          </a:xfrm>
+          <a:prstGeom prst="rect">
+            <a:avLst/>
+          </a:prstGeom>
+          <a:solidFill>
+            <a:srgbClr val="1A1A1A"/>
+          </a:solidFill>
+          <a:ln>
+            <a:solidFill>
+              <a:srgbClr val="1A1A1A"/>
+            </a:solidFill>
+          </a:ln>
+        </p:spPr>
+        <p:txBody>
+          <a:bodyPr wrap="square" lIns="0" tIns="0" rIns="0" bIns="0" rtlCol="0" anchor="ctr"/>
+          <a:lstStyle/>
+          <a:p>
+            <a:pPr algn="ctr" indent="0" marL="0">
+              <a:buNone/>
+            </a:pPr>
+            <a:r>
+              <a:rPr lang="ja-JP" altLang="en-US" sz="1100" dirty="0">
+                <a:solidFill>
+                  <a:srgbClr val="FFFFFF"/>
+                </a:solidFill>
+                <a:latin typeface="Dela Gothic One" pitchFamily="34" charset="0"/>
+                <a:ea typeface="けいふぉんと" pitchFamily="34" charset="-122"/>
+                <a:cs typeface="Dela Gothic One" pitchFamily="34" charset="-120"/>
+              </a:rPr>
+              <a:t>説明① 10分</a:t>
+            </a:r>
+            <a:endParaRPr lang="ja-JP" sz="1100" dirty="0"/>
+          </a:p>
+        </p:txBody>
+      </p:sp>
+      <p:sp>
+        <p:nvSpPr>
+          <p:cNvPr id="3" name="Text 1"/>
+          <p:cNvSpPr txBox="1"/>
+          <p:nvPr/>
+        </p:nvSpPr>
+        <p:spPr>
+          <a:xfrm>
+            <a:off x="411480" y="502920"/>
+            <a:ext cx="8321040" cy="685800"/>
           </a:xfrm>
           <a:prstGeom prst="rect">
             <a:avLst/>
@@ -3424,116 +3374,58 @@
           <a:ln/>
         </p:spPr>
         <p:txBody>
-          <a:bodyPr wrap="square" lIns="0" tIns="0" rIns="0" bIns="0" rtlCol="0" anchor="ctr"/>
-          <a:lstStyle/>
-          <a:p>
-            <a:pPr algn="l" indent="0" marL="0">
-              <a:buNone/>
-            </a:pPr>
-            <a:r>
-              <a:rPr lang="en-US" sz="2400" b="1" dirty="0">
-                <a:solidFill>
-                  <a:schemeClr val="tx1"/>
-                </a:solidFill>
+          <a:bodyPr wrap="square" lIns="0" tIns="0" rIns="0" bIns="0" rtlCol="0" anchor="ctr">
+            <a:normAutofit/>
+          </a:bodyPr>
+          <a:lstStyle/>
+          <a:p>
+            <a:pPr indent="0" marL="0">
+              <a:buNone/>
+            </a:pPr>
+            <a:r>
+              <a:rPr lang="ja-JP" altLang="en-US" sz="2600" dirty="0">
+                <a:solidFill>
+                  <a:srgbClr val="1A1A1A"/>
+                </a:solidFill>
+                <a:latin typeface="Dela Gothic One" pitchFamily="34" charset="0"/>
+                <a:ea typeface="けいふぉんと" pitchFamily="34" charset="-122"/>
+                <a:cs typeface="Dela Gothic One" pitchFamily="34" charset="-120"/>
               </a:rPr>
               <a:t>公開のしくみ</a:t>
             </a:r>
-            <a:endParaRPr lang="en-US" sz="2400" dirty="0"/>
-          </a:p>
-        </p:txBody>
-      </p:sp>
-      <p:sp>
-        <p:nvSpPr>
-          <p:cNvPr id="3" name="chip"/>
+            <a:endParaRPr lang="ja-JP" sz="2600" dirty="0"/>
+          </a:p>
+        </p:txBody>
+      </p:sp>
+      <p:sp>
+        <p:nvSpPr>
+          <p:cNvPr id="5" name="card"/>
           <p:cNvSpPr/>
           <p:nvPr/>
         </p:nvSpPr>
         <p:spPr>
           <a:xfrm>
-            <a:off x="548640" y="292608"/>
-            <a:ext cx="1344168" cy="292608"/>
+            <a:off x="502920" y="1691640"/>
+            <a:ext cx="1746504" cy="1600200"/>
           </a:xfrm>
           <a:prstGeom prst="roundRect">
             <a:avLst>
-              <a:gd name="adj" fmla="val 50000"/>
+              <a:gd name="adj" fmla="val 5714"/>
             </a:avLst>
           </a:prstGeom>
           <a:solidFill>
-            <a:schemeClr val="tx1"/>
-          </a:solidFill>
-          <a:ln w="12700">
-            <a:solidFill>
-              <a:schemeClr val="tx1"/>
-            </a:solidFill>
-            <a:prstDash val="solid"/>
-          </a:ln>
-        </p:spPr>
-      </p:sp>
-      <p:sp>
-        <p:nvSpPr>
-          <p:cNvPr id="4" name="chip-text"/>
-          <p:cNvSpPr txBox="1"/>
-          <p:nvPr/>
-        </p:nvSpPr>
-        <p:spPr>
-          <a:xfrm>
-            <a:off x="548640" y="292608"/>
-            <a:ext cx="1344168" cy="292608"/>
-          </a:xfrm>
-          <a:prstGeom prst="rect">
-            <a:avLst/>
-          </a:prstGeom>
-          <a:noFill/>
-          <a:ln/>
-        </p:spPr>
-        <p:txBody>
-          <a:bodyPr wrap="square" lIns="0" tIns="0" rIns="0" bIns="0" rtlCol="0" anchor="ctr"/>
-          <a:lstStyle/>
-          <a:p>
-            <a:pPr algn="ctr" indent="0" marL="0">
-              <a:buNone/>
-            </a:pPr>
-            <a:r>
-              <a:rPr lang="en-US" sz="1100" b="1" dirty="0">
-                <a:solidFill>
-                  <a:schemeClr val="accent1"/>
-                </a:solidFill>
-              </a:rPr>
-              <a:t>説明① 10分</a:t>
-            </a:r>
-            <a:endParaRPr lang="en-US" sz="1100" dirty="0"/>
-          </a:p>
-        </p:txBody>
-      </p:sp>
-      <p:sp>
-        <p:nvSpPr>
-          <p:cNvPr id="6" name="card"/>
-          <p:cNvSpPr/>
-          <p:nvPr/>
-        </p:nvSpPr>
-        <p:spPr>
-          <a:xfrm>
-            <a:off x="548640" y="1828800"/>
-            <a:ext cx="1723644" cy="1463040"/>
-          </a:xfrm>
-          <a:prstGeom prst="roundRect">
-            <a:avLst>
-              <a:gd name="adj" fmla="val 7500"/>
-            </a:avLst>
-          </a:prstGeom>
-          <a:solidFill>
-            <a:schemeClr val="bg1"/>
-          </a:solidFill>
-          <a:ln w="19050">
+            <a:srgbClr val="FFFFFF"/>
+          </a:solidFill>
+          <a:ln w="25400">
             <a:solidFill>
               <a:srgbClr val="1A1A1A"/>
             </a:solidFill>
             <a:prstDash val="solid"/>
           </a:ln>
           <a:effectLst>
-            <a:outerShdw sx="100000" sy="100000" kx="0" ky="0" algn="bl" rotWithShape="0" blurRad="101600" dist="38100" dir="2700000">
-              <a:srgbClr val="000000">
-                <a:alpha val="18000"/>
+            <a:outerShdw sx="100000" sy="100000" kx="0" ky="0" algn="bl" rotWithShape="0" blurRad="101600" dist="50800" dir="2700000">
+              <a:srgbClr val="1A1A1A">
+                <a:alpha val="100000"/>
               </a:srgbClr>
             </a:outerShdw>
           </a:effectLst>
@@ -3541,14 +3433,59 @@
       </p:sp>
       <p:sp>
         <p:nvSpPr>
-          <p:cNvPr id="7" name="Text 4"/>
+          <p:cNvPr id="6" name="Text 3"/>
           <p:cNvSpPr txBox="1"/>
           <p:nvPr/>
         </p:nvSpPr>
         <p:spPr>
-          <a:xfrm>
-            <a:off x="548640" y="1993392"/>
-            <a:ext cx="1723644" cy="274320"/>
+          <a:xfrm rot="-180000">
+            <a:off x="918972" y="1545336"/>
+            <a:ext cx="914400" cy="292608"/>
+          </a:xfrm>
+          <a:prstGeom prst="rect">
+            <a:avLst/>
+          </a:prstGeom>
+          <a:solidFill>
+            <a:srgbClr val="1A1A1A"/>
+          </a:solidFill>
+          <a:ln>
+            <a:solidFill>
+              <a:srgbClr val="1A1A1A"/>
+            </a:solidFill>
+          </a:ln>
+        </p:spPr>
+        <p:txBody>
+          <a:bodyPr wrap="square" lIns="0" tIns="0" rIns="0" bIns="0" rtlCol="0" anchor="ctr"/>
+          <a:lstStyle/>
+          <a:p>
+            <a:pPr algn="ctr" indent="0" marL="0">
+              <a:buNone/>
+            </a:pPr>
+            <a:r>
+              <a:rPr lang="ja-JP" altLang="en-US" sz="1000" dirty="0">
+                <a:solidFill>
+                  <a:srgbClr val="FFFFFF"/>
+                </a:solidFill>
+                <a:latin typeface="Dela Gothic One" pitchFamily="34" charset="0"/>
+                <a:ea typeface="けいふぉんと" pitchFamily="34" charset="-122"/>
+                <a:cs typeface="Dela Gothic One" pitchFamily="34" charset="-120"/>
+              </a:rPr>
+              <a:t>STEP 1</a:t>
+            </a:r>
+            <a:endParaRPr lang="ja-JP" sz="1000" dirty="0"/>
+          </a:p>
+        </p:txBody>
+      </p:sp>
+      <p:sp>
+        <p:nvSpPr>
+          <p:cNvPr id="7" name="flow-node"/>
+          <p:cNvSpPr txBox="1"/>
+          <p:nvPr/>
+        </p:nvSpPr>
+        <p:spPr>
+          <a:xfrm>
+            <a:off x="612648" y="1965960"/>
+            <a:ext cx="1527048" cy="1234440"/>
           </a:xfrm>
           <a:prstGeom prst="rect">
             <a:avLst/>
@@ -3557,63 +3494,32 @@
           <a:ln/>
         </p:spPr>
         <p:txBody>
-          <a:bodyPr wrap="square" lIns="0" tIns="0" rIns="0" bIns="0" rtlCol="0" anchor="ctr"/>
+          <a:bodyPr wrap="square" lIns="0" tIns="0" rIns="0" bIns="0" rtlCol="0" anchor="ctr">
+            <a:normAutofit/>
+          </a:bodyPr>
           <a:lstStyle/>
           <a:p>
             <a:pPr algn="ctr" indent="0" marL="0">
               <a:buNone/>
             </a:pPr>
             <a:r>
-              <a:rPr lang="en-US" sz="1000" b="1" dirty="0">
-                <a:solidFill>
-                  <a:schemeClr val="accent2"/>
-                </a:solidFill>
-              </a:rPr>
-              <a:t>STEP 1</a:t>
-            </a:r>
-            <a:endParaRPr lang="en-US" sz="1000" dirty="0"/>
-          </a:p>
-        </p:txBody>
-      </p:sp>
-      <p:sp>
-        <p:nvSpPr>
-          <p:cNvPr id="8" name="flow-node"/>
-          <p:cNvSpPr txBox="1"/>
-          <p:nvPr/>
-        </p:nvSpPr>
-        <p:spPr>
-          <a:xfrm>
-            <a:off x="640080" y="2286000"/>
-            <a:ext cx="1540764" cy="868680"/>
-          </a:xfrm>
-          <a:prstGeom prst="rect">
-            <a:avLst/>
-          </a:prstGeom>
-          <a:noFill/>
-          <a:ln/>
-        </p:spPr>
-        <p:txBody>
-          <a:bodyPr wrap="square" lIns="0" tIns="0" rIns="0" bIns="0" rtlCol="0" anchor="ctr"/>
-          <a:lstStyle/>
-          <a:p>
-            <a:pPr algn="ctr" indent="0" marL="0">
-              <a:buNone/>
-            </a:pPr>
-            <a:r>
-              <a:rPr lang="en-US" sz="1400" b="1" dirty="0">
-                <a:solidFill>
-                  <a:schemeClr val="tx1"/>
-                </a:solidFill>
+              <a:rPr lang="ja-JP" altLang="en-US" sz="1400" b="1" dirty="0">
+                <a:solidFill>
+                  <a:srgbClr val="1A1A1A"/>
+                </a:solidFill>
+                <a:latin typeface="Noto Sans JP" pitchFamily="34" charset="0"/>
+                <a:ea typeface="Noto Sans JP" pitchFamily="34" charset="-122"/>
+                <a:cs typeface="Noto Sans JP" pitchFamily="34" charset="-120"/>
               </a:rPr>
               <a:t>PCで作る</a:t>
             </a:r>
-            <a:endParaRPr lang="en-US" sz="1400" dirty="0"/>
+            <a:endParaRPr lang="ja-JP" sz="1400" dirty="0"/>
           </a:p>
         </p:txBody>
       </p:sp>
       <p:pic>
         <p:nvPicPr>
-          <p:cNvPr id="9" name="flow-arrow" descr="preencoded.png">    </p:cNvPr>
+          <p:cNvPr id="8" name="flow-arrow" descr="preencoded.png">    </p:cNvPr>
           <p:cNvPicPr>
             <a:picLocks noChangeAspect="1"/>
           </p:cNvPicPr>
@@ -3627,8 +3533,8 @@
         </p:blipFill>
         <p:spPr>
           <a:xfrm>
-            <a:off x="2345436" y="2441448"/>
-            <a:ext cx="237744" cy="237744"/>
+            <a:off x="2313432" y="2363724"/>
+            <a:ext cx="256032" cy="256032"/>
           </a:xfrm>
           <a:prstGeom prst="rect">
             <a:avLst/>
@@ -3637,33 +3543,33 @@
       </p:pic>
       <p:sp>
         <p:nvSpPr>
-          <p:cNvPr id="10" name="card"/>
+          <p:cNvPr id="9" name="card"/>
           <p:cNvSpPr/>
           <p:nvPr/>
         </p:nvSpPr>
         <p:spPr>
           <a:xfrm>
-            <a:off x="2656332" y="1828800"/>
-            <a:ext cx="1723644" cy="1463040"/>
+            <a:off x="2633472" y="1691640"/>
+            <a:ext cx="1746504" cy="1600200"/>
           </a:xfrm>
           <a:prstGeom prst="roundRect">
             <a:avLst>
-              <a:gd name="adj" fmla="val 7500"/>
+              <a:gd name="adj" fmla="val 5714"/>
             </a:avLst>
           </a:prstGeom>
           <a:solidFill>
-            <a:schemeClr val="bg1"/>
-          </a:solidFill>
-          <a:ln w="19050">
+            <a:srgbClr val="FFFFFF"/>
+          </a:solidFill>
+          <a:ln w="25400">
             <a:solidFill>
               <a:srgbClr val="1A1A1A"/>
             </a:solidFill>
             <a:prstDash val="solid"/>
           </a:ln>
           <a:effectLst>
-            <a:outerShdw sx="100000" sy="100000" kx="0" ky="0" algn="bl" rotWithShape="0" blurRad="101600" dist="38100" dir="2700000">
-              <a:srgbClr val="000000">
-                <a:alpha val="18000"/>
+            <a:outerShdw sx="100000" sy="100000" kx="0" ky="0" algn="bl" rotWithShape="0" blurRad="101600" dist="50800" dir="2700000">
+              <a:srgbClr val="1A1A1A">
+                <a:alpha val="100000"/>
               </a:srgbClr>
             </a:outerShdw>
           </a:effectLst>
@@ -3671,14 +3577,59 @@
       </p:sp>
       <p:sp>
         <p:nvSpPr>
-          <p:cNvPr id="11" name="Text 7"/>
+          <p:cNvPr id="10" name="Text 6"/>
           <p:cNvSpPr txBox="1"/>
           <p:nvPr/>
         </p:nvSpPr>
         <p:spPr>
-          <a:xfrm>
-            <a:off x="2656332" y="1993392"/>
-            <a:ext cx="1723644" cy="274320"/>
+          <a:xfrm rot="-180000">
+            <a:off x="3049524" y="1545336"/>
+            <a:ext cx="914400" cy="292608"/>
+          </a:xfrm>
+          <a:prstGeom prst="rect">
+            <a:avLst/>
+          </a:prstGeom>
+          <a:solidFill>
+            <a:srgbClr val="1A1A1A"/>
+          </a:solidFill>
+          <a:ln>
+            <a:solidFill>
+              <a:srgbClr val="1A1A1A"/>
+            </a:solidFill>
+          </a:ln>
+        </p:spPr>
+        <p:txBody>
+          <a:bodyPr wrap="square" lIns="0" tIns="0" rIns="0" bIns="0" rtlCol="0" anchor="ctr"/>
+          <a:lstStyle/>
+          <a:p>
+            <a:pPr algn="ctr" indent="0" marL="0">
+              <a:buNone/>
+            </a:pPr>
+            <a:r>
+              <a:rPr lang="ja-JP" altLang="en-US" sz="1000" dirty="0">
+                <a:solidFill>
+                  <a:srgbClr val="FFFFFF"/>
+                </a:solidFill>
+                <a:latin typeface="Dela Gothic One" pitchFamily="34" charset="0"/>
+                <a:ea typeface="けいふぉんと" pitchFamily="34" charset="-122"/>
+                <a:cs typeface="Dela Gothic One" pitchFamily="34" charset="-120"/>
+              </a:rPr>
+              <a:t>STEP 2</a:t>
+            </a:r>
+            <a:endParaRPr lang="ja-JP" sz="1000" dirty="0"/>
+          </a:p>
+        </p:txBody>
+      </p:sp>
+      <p:sp>
+        <p:nvSpPr>
+          <p:cNvPr id="11" name="flow-node"/>
+          <p:cNvSpPr txBox="1"/>
+          <p:nvPr/>
+        </p:nvSpPr>
+        <p:spPr>
+          <a:xfrm>
+            <a:off x="2743200" y="1965960"/>
+            <a:ext cx="1527048" cy="1234440"/>
           </a:xfrm>
           <a:prstGeom prst="rect">
             <a:avLst/>
@@ -3687,63 +3638,32 @@
           <a:ln/>
         </p:spPr>
         <p:txBody>
-          <a:bodyPr wrap="square" lIns="0" tIns="0" rIns="0" bIns="0" rtlCol="0" anchor="ctr"/>
+          <a:bodyPr wrap="square" lIns="0" tIns="0" rIns="0" bIns="0" rtlCol="0" anchor="ctr">
+            <a:normAutofit/>
+          </a:bodyPr>
           <a:lstStyle/>
           <a:p>
             <a:pPr algn="ctr" indent="0" marL="0">
               <a:buNone/>
             </a:pPr>
             <a:r>
-              <a:rPr lang="en-US" sz="1000" b="1" dirty="0">
-                <a:solidFill>
-                  <a:schemeClr val="accent2"/>
-                </a:solidFill>
-              </a:rPr>
-              <a:t>STEP 2</a:t>
-            </a:r>
-            <a:endParaRPr lang="en-US" sz="1000" dirty="0"/>
-          </a:p>
-        </p:txBody>
-      </p:sp>
-      <p:sp>
-        <p:nvSpPr>
-          <p:cNvPr id="12" name="flow-node"/>
-          <p:cNvSpPr txBox="1"/>
-          <p:nvPr/>
-        </p:nvSpPr>
-        <p:spPr>
-          <a:xfrm>
-            <a:off x="2747772" y="2286000"/>
-            <a:ext cx="1540764" cy="868680"/>
-          </a:xfrm>
-          <a:prstGeom prst="rect">
-            <a:avLst/>
-          </a:prstGeom>
-          <a:noFill/>
-          <a:ln/>
-        </p:spPr>
-        <p:txBody>
-          <a:bodyPr wrap="square" lIns="0" tIns="0" rIns="0" bIns="0" rtlCol="0" anchor="ctr"/>
-          <a:lstStyle/>
-          <a:p>
-            <a:pPr algn="ctr" indent="0" marL="0">
-              <a:buNone/>
-            </a:pPr>
-            <a:r>
-              <a:rPr lang="en-US" sz="1400" b="1" dirty="0">
-                <a:solidFill>
-                  <a:schemeClr val="tx1"/>
-                </a:solidFill>
+              <a:rPr lang="ja-JP" altLang="en-US" sz="1400" b="1" dirty="0">
+                <a:solidFill>
+                  <a:srgbClr val="1A1A1A"/>
+                </a:solidFill>
+                <a:latin typeface="Noto Sans JP" pitchFamily="34" charset="0"/>
+                <a:ea typeface="Noto Sans JP" pitchFamily="34" charset="-122"/>
+                <a:cs typeface="Noto Sans JP" pitchFamily="34" charset="-120"/>
               </a:rPr>
               <a:t>GitHubに保存</a:t>
             </a:r>
-            <a:endParaRPr lang="en-US" sz="1400" dirty="0"/>
+            <a:endParaRPr lang="ja-JP" sz="1400" dirty="0"/>
           </a:p>
         </p:txBody>
       </p:sp>
       <p:pic>
         <p:nvPicPr>
-          <p:cNvPr id="13" name="flow-arrow" descr="preencoded.png">    </p:cNvPr>
+          <p:cNvPr id="12" name="flow-arrow" descr="preencoded.png">    </p:cNvPr>
           <p:cNvPicPr>
             <a:picLocks noChangeAspect="1"/>
           </p:cNvPicPr>
@@ -3757,8 +3677,8 @@
         </p:blipFill>
         <p:spPr>
           <a:xfrm>
-            <a:off x="4453128" y="2441448"/>
-            <a:ext cx="237744" cy="237744"/>
+            <a:off x="4443984" y="2363724"/>
+            <a:ext cx="256032" cy="256032"/>
           </a:xfrm>
           <a:prstGeom prst="rect">
             <a:avLst/>
@@ -3767,33 +3687,33 @@
       </p:pic>
       <p:sp>
         <p:nvSpPr>
-          <p:cNvPr id="14" name="card"/>
+          <p:cNvPr id="13" name="card"/>
           <p:cNvSpPr/>
           <p:nvPr/>
         </p:nvSpPr>
         <p:spPr>
           <a:xfrm>
-            <a:off x="4764024" y="1828800"/>
-            <a:ext cx="1723644" cy="1463040"/>
+            <a:off x="4764024" y="1691640"/>
+            <a:ext cx="1746504" cy="1600200"/>
           </a:xfrm>
           <a:prstGeom prst="roundRect">
             <a:avLst>
-              <a:gd name="adj" fmla="val 7500"/>
+              <a:gd name="adj" fmla="val 5714"/>
             </a:avLst>
           </a:prstGeom>
           <a:solidFill>
-            <a:schemeClr val="bg1"/>
-          </a:solidFill>
-          <a:ln w="19050">
+            <a:srgbClr val="FFFFFF"/>
+          </a:solidFill>
+          <a:ln w="25400">
             <a:solidFill>
               <a:srgbClr val="1A1A1A"/>
             </a:solidFill>
             <a:prstDash val="solid"/>
           </a:ln>
           <a:effectLst>
-            <a:outerShdw sx="100000" sy="100000" kx="0" ky="0" algn="bl" rotWithShape="0" blurRad="101600" dist="38100" dir="2700000">
-              <a:srgbClr val="000000">
-                <a:alpha val="18000"/>
+            <a:outerShdw sx="100000" sy="100000" kx="0" ky="0" algn="bl" rotWithShape="0" blurRad="101600" dist="50800" dir="2700000">
+              <a:srgbClr val="1A1A1A">
+                <a:alpha val="100000"/>
               </a:srgbClr>
             </a:outerShdw>
           </a:effectLst>
@@ -3801,14 +3721,59 @@
       </p:sp>
       <p:sp>
         <p:nvSpPr>
-          <p:cNvPr id="15" name="Text 10"/>
+          <p:cNvPr id="14" name="Text 9"/>
           <p:cNvSpPr txBox="1"/>
           <p:nvPr/>
         </p:nvSpPr>
         <p:spPr>
-          <a:xfrm>
-            <a:off x="4764024" y="1993392"/>
-            <a:ext cx="1723644" cy="274320"/>
+          <a:xfrm rot="-180000">
+            <a:off x="5180076" y="1545336"/>
+            <a:ext cx="914400" cy="292608"/>
+          </a:xfrm>
+          <a:prstGeom prst="rect">
+            <a:avLst/>
+          </a:prstGeom>
+          <a:solidFill>
+            <a:srgbClr val="1A1A1A"/>
+          </a:solidFill>
+          <a:ln>
+            <a:solidFill>
+              <a:srgbClr val="1A1A1A"/>
+            </a:solidFill>
+          </a:ln>
+        </p:spPr>
+        <p:txBody>
+          <a:bodyPr wrap="square" lIns="0" tIns="0" rIns="0" bIns="0" rtlCol="0" anchor="ctr"/>
+          <a:lstStyle/>
+          <a:p>
+            <a:pPr algn="ctr" indent="0" marL="0">
+              <a:buNone/>
+            </a:pPr>
+            <a:r>
+              <a:rPr lang="ja-JP" altLang="en-US" sz="1000" dirty="0">
+                <a:solidFill>
+                  <a:srgbClr val="FFFFFF"/>
+                </a:solidFill>
+                <a:latin typeface="Dela Gothic One" pitchFamily="34" charset="0"/>
+                <a:ea typeface="けいふぉんと" pitchFamily="34" charset="-122"/>
+                <a:cs typeface="Dela Gothic One" pitchFamily="34" charset="-120"/>
+              </a:rPr>
+              <a:t>STEP 3</a:t>
+            </a:r>
+            <a:endParaRPr lang="ja-JP" sz="1000" dirty="0"/>
+          </a:p>
+        </p:txBody>
+      </p:sp>
+      <p:sp>
+        <p:nvSpPr>
+          <p:cNvPr id="15" name="flow-node"/>
+          <p:cNvSpPr txBox="1"/>
+          <p:nvPr/>
+        </p:nvSpPr>
+        <p:spPr>
+          <a:xfrm>
+            <a:off x="4873752" y="1965960"/>
+            <a:ext cx="1527048" cy="1234440"/>
           </a:xfrm>
           <a:prstGeom prst="rect">
             <a:avLst/>
@@ -3817,63 +3782,32 @@
           <a:ln/>
         </p:spPr>
         <p:txBody>
-          <a:bodyPr wrap="square" lIns="0" tIns="0" rIns="0" bIns="0" rtlCol="0" anchor="ctr"/>
+          <a:bodyPr wrap="square" lIns="0" tIns="0" rIns="0" bIns="0" rtlCol="0" anchor="ctr">
+            <a:normAutofit/>
+          </a:bodyPr>
           <a:lstStyle/>
           <a:p>
             <a:pPr algn="ctr" indent="0" marL="0">
               <a:buNone/>
             </a:pPr>
             <a:r>
-              <a:rPr lang="en-US" sz="1000" b="1" dirty="0">
-                <a:solidFill>
-                  <a:schemeClr val="accent2"/>
-                </a:solidFill>
-              </a:rPr>
-              <a:t>STEP 3</a:t>
-            </a:r>
-            <a:endParaRPr lang="en-US" sz="1000" dirty="0"/>
-          </a:p>
-        </p:txBody>
-      </p:sp>
-      <p:sp>
-        <p:nvSpPr>
-          <p:cNvPr id="16" name="flow-node"/>
-          <p:cNvSpPr txBox="1"/>
-          <p:nvPr/>
-        </p:nvSpPr>
-        <p:spPr>
-          <a:xfrm>
-            <a:off x="4855464" y="2286000"/>
-            <a:ext cx="1540764" cy="868680"/>
-          </a:xfrm>
-          <a:prstGeom prst="rect">
-            <a:avLst/>
-          </a:prstGeom>
-          <a:noFill/>
-          <a:ln/>
-        </p:spPr>
-        <p:txBody>
-          <a:bodyPr wrap="square" lIns="0" tIns="0" rIns="0" bIns="0" rtlCol="0" anchor="ctr"/>
-          <a:lstStyle/>
-          <a:p>
-            <a:pPr algn="ctr" indent="0" marL="0">
-              <a:buNone/>
-            </a:pPr>
-            <a:r>
-              <a:rPr lang="en-US" sz="1400" b="1" dirty="0">
-                <a:solidFill>
-                  <a:schemeClr val="tx1"/>
-                </a:solidFill>
+              <a:rPr lang="ja-JP" altLang="en-US" sz="1400" b="1" dirty="0">
+                <a:solidFill>
+                  <a:srgbClr val="1A1A1A"/>
+                </a:solidFill>
+                <a:latin typeface="Noto Sans JP" pitchFamily="34" charset="0"/>
+                <a:ea typeface="Noto Sans JP" pitchFamily="34" charset="-122"/>
+                <a:cs typeface="Noto Sans JP" pitchFamily="34" charset="-120"/>
               </a:rPr>
               <a:t>Cloudflareが公開</a:t>
             </a:r>
-            <a:endParaRPr lang="en-US" sz="1400" dirty="0"/>
+            <a:endParaRPr lang="ja-JP" sz="1400" dirty="0"/>
           </a:p>
         </p:txBody>
       </p:sp>
       <p:pic>
         <p:nvPicPr>
-          <p:cNvPr id="17" name="flow-arrow" descr="preencoded.png">    </p:cNvPr>
+          <p:cNvPr id="16" name="flow-arrow" descr="preencoded.png">    </p:cNvPr>
           <p:cNvPicPr>
             <a:picLocks noChangeAspect="1"/>
           </p:cNvPicPr>
@@ -3887,8 +3821,8 @@
         </p:blipFill>
         <p:spPr>
           <a:xfrm>
-            <a:off x="6560820" y="2441448"/>
-            <a:ext cx="237744" cy="237744"/>
+            <a:off x="6574536" y="2363724"/>
+            <a:ext cx="256032" cy="256032"/>
           </a:xfrm>
           <a:prstGeom prst="rect">
             <a:avLst/>
@@ -3897,33 +3831,33 @@
       </p:pic>
       <p:sp>
         <p:nvSpPr>
-          <p:cNvPr id="18" name="card"/>
+          <p:cNvPr id="17" name="card"/>
           <p:cNvSpPr/>
           <p:nvPr/>
         </p:nvSpPr>
         <p:spPr>
           <a:xfrm>
-            <a:off x="6871716" y="1828800"/>
-            <a:ext cx="1723644" cy="1463040"/>
+            <a:off x="6894576" y="1691640"/>
+            <a:ext cx="1746504" cy="1600200"/>
           </a:xfrm>
           <a:prstGeom prst="roundRect">
             <a:avLst>
-              <a:gd name="adj" fmla="val 7500"/>
+              <a:gd name="adj" fmla="val 5714"/>
             </a:avLst>
           </a:prstGeom>
           <a:solidFill>
-            <a:schemeClr val="accent1"/>
-          </a:solidFill>
-          <a:ln w="19050">
+            <a:srgbClr val="F5A623"/>
+          </a:solidFill>
+          <a:ln w="25400">
             <a:solidFill>
               <a:srgbClr val="1A1A1A"/>
             </a:solidFill>
             <a:prstDash val="solid"/>
           </a:ln>
           <a:effectLst>
-            <a:outerShdw sx="100000" sy="100000" kx="0" ky="0" algn="bl" rotWithShape="0" blurRad="101600" dist="38100" dir="2700000">
-              <a:srgbClr val="000000">
-                <a:alpha val="18000"/>
+            <a:outerShdw sx="100000" sy="100000" kx="0" ky="0" algn="bl" rotWithShape="0" blurRad="101600" dist="50800" dir="2700000">
+              <a:srgbClr val="1A1A1A">
+                <a:alpha val="100000"/>
               </a:srgbClr>
             </a:outerShdw>
           </a:effectLst>
@@ -3931,14 +3865,59 @@
       </p:sp>
       <p:sp>
         <p:nvSpPr>
-          <p:cNvPr id="19" name="Text 13"/>
+          <p:cNvPr id="18" name="Text 12"/>
           <p:cNvSpPr txBox="1"/>
           <p:nvPr/>
         </p:nvSpPr>
         <p:spPr>
-          <a:xfrm>
-            <a:off x="6871716" y="1993392"/>
-            <a:ext cx="1723644" cy="274320"/>
+          <a:xfrm rot="-180000">
+            <a:off x="7310628" y="1545336"/>
+            <a:ext cx="914400" cy="292608"/>
+          </a:xfrm>
+          <a:prstGeom prst="rect">
+            <a:avLst/>
+          </a:prstGeom>
+          <a:solidFill>
+            <a:srgbClr val="1A1A1A"/>
+          </a:solidFill>
+          <a:ln>
+            <a:solidFill>
+              <a:srgbClr val="1A1A1A"/>
+            </a:solidFill>
+          </a:ln>
+        </p:spPr>
+        <p:txBody>
+          <a:bodyPr wrap="square" lIns="0" tIns="0" rIns="0" bIns="0" rtlCol="0" anchor="ctr"/>
+          <a:lstStyle/>
+          <a:p>
+            <a:pPr algn="ctr" indent="0" marL="0">
+              <a:buNone/>
+            </a:pPr>
+            <a:r>
+              <a:rPr lang="ja-JP" altLang="en-US" sz="1000" dirty="0">
+                <a:solidFill>
+                  <a:srgbClr val="FFFFFF"/>
+                </a:solidFill>
+                <a:latin typeface="Dela Gothic One" pitchFamily="34" charset="0"/>
+                <a:ea typeface="けいふぉんと" pitchFamily="34" charset="-122"/>
+                <a:cs typeface="Dela Gothic One" pitchFamily="34" charset="-120"/>
+              </a:rPr>
+              <a:t>STEP 4</a:t>
+            </a:r>
+            <a:endParaRPr lang="ja-JP" sz="1000" dirty="0"/>
+          </a:p>
+        </p:txBody>
+      </p:sp>
+      <p:sp>
+        <p:nvSpPr>
+          <p:cNvPr id="19" name="flow-node"/>
+          <p:cNvSpPr txBox="1"/>
+          <p:nvPr/>
+        </p:nvSpPr>
+        <p:spPr>
+          <a:xfrm>
+            <a:off x="7004304" y="1965960"/>
+            <a:ext cx="1527048" cy="1234440"/>
           </a:xfrm>
           <a:prstGeom prst="rect">
             <a:avLst/>
@@ -3947,144 +3926,108 @@
           <a:ln/>
         </p:spPr>
         <p:txBody>
-          <a:bodyPr wrap="square" lIns="0" tIns="0" rIns="0" bIns="0" rtlCol="0" anchor="ctr"/>
+          <a:bodyPr wrap="square" lIns="0" tIns="0" rIns="0" bIns="0" rtlCol="0" anchor="ctr">
+            <a:normAutofit/>
+          </a:bodyPr>
           <a:lstStyle/>
           <a:p>
             <a:pPr algn="ctr" indent="0" marL="0">
               <a:buNone/>
             </a:pPr>
             <a:r>
-              <a:rPr lang="en-US" sz="1000" b="1" dirty="0">
-                <a:solidFill>
-                  <a:schemeClr val="accent2"/>
-                </a:solidFill>
-              </a:rPr>
-              <a:t>STEP 4</a:t>
-            </a:r>
-            <a:endParaRPr lang="en-US" sz="1000" dirty="0"/>
-          </a:p>
-        </p:txBody>
-      </p:sp>
-      <p:sp>
-        <p:nvSpPr>
-          <p:cNvPr id="20" name="flow-node"/>
+              <a:rPr lang="ja-JP" altLang="en-US" sz="1400" b="1" dirty="0">
+                <a:solidFill>
+                  <a:srgbClr val="1A1A1A"/>
+                </a:solidFill>
+                <a:latin typeface="Noto Sans JP" pitchFamily="34" charset="0"/>
+                <a:ea typeface="Noto Sans JP" pitchFamily="34" charset="-122"/>
+                <a:cs typeface="Noto Sans JP" pitchFamily="34" charset="-120"/>
+              </a:rPr>
+              <a:t>URLで見られる</a:t>
+            </a:r>
+            <a:endParaRPr lang="ja-JP" sz="1400" dirty="0"/>
+          </a:p>
+        </p:txBody>
+      </p:sp>
+      <p:sp>
+        <p:nvSpPr>
+          <p:cNvPr id="20" name="Text 14"/>
           <p:cNvSpPr txBox="1"/>
           <p:nvPr/>
         </p:nvSpPr>
         <p:spPr>
-          <a:xfrm>
-            <a:off x="6963156" y="2286000"/>
-            <a:ext cx="1540764" cy="868680"/>
-          </a:xfrm>
-          <a:prstGeom prst="rect">
-            <a:avLst/>
-          </a:prstGeom>
-          <a:noFill/>
-          <a:ln/>
-        </p:spPr>
-        <p:txBody>
-          <a:bodyPr wrap="square" lIns="0" tIns="0" rIns="0" bIns="0" rtlCol="0" anchor="ctr"/>
+          <a:xfrm rot="-60000">
+            <a:off x="502920" y="3794760"/>
+            <a:ext cx="8138160" cy="502920"/>
+          </a:xfrm>
+          <a:prstGeom prst="rect">
+            <a:avLst/>
+          </a:prstGeom>
+          <a:solidFill>
+            <a:srgbClr val="DD6420"/>
+          </a:solidFill>
+          <a:ln w="19050">
+            <a:solidFill>
+              <a:srgbClr val="1A1A1A"/>
+            </a:solidFill>
+          </a:ln>
+          <a:effectLst>
+            <a:outerShdw sx="100000" sy="100000" kx="0" ky="0" algn="bl" rotWithShape="0" blurRad="101600" dist="38100" dir="2700000">
+              <a:srgbClr val="1A1A1A">
+                <a:alpha val="100000"/>
+              </a:srgbClr>
+            </a:outerShdw>
+          </a:effectLst>
+        </p:spPr>
+        <p:txBody>
+          <a:bodyPr wrap="square" lIns="0" tIns="1905" rIns="1905" bIns="0" rtlCol="0" anchor="ctr">
+            <a:normAutofit/>
+          </a:bodyPr>
           <a:lstStyle/>
           <a:p>
             <a:pPr algn="ctr" indent="0" marL="0">
               <a:buNone/>
             </a:pPr>
             <a:r>
-              <a:rPr lang="en-US" sz="1400" b="1" dirty="0">
-                <a:solidFill>
-                  <a:schemeClr val="tx1"/>
-                </a:solidFill>
-              </a:rPr>
-              <a:t>URLで見られる</a:t>
-            </a:r>
-            <a:endParaRPr lang="en-US" sz="1400" dirty="0"/>
-          </a:p>
-        </p:txBody>
-      </p:sp>
-      <p:sp>
-        <p:nvSpPr>
-          <p:cNvPr id="21" name="foot-box"/>
-          <p:cNvSpPr/>
-          <p:nvPr/>
-        </p:nvSpPr>
-        <p:spPr>
-          <a:xfrm>
-            <a:off x="548640" y="3794760"/>
-            <a:ext cx="8046720" cy="502920"/>
-          </a:xfrm>
-          <a:prstGeom prst="roundRect">
-            <a:avLst>
-              <a:gd name="adj" fmla="val 18182"/>
-            </a:avLst>
-          </a:prstGeom>
-          <a:solidFill>
-            <a:schemeClr val="bg2"/>
-          </a:solidFill>
-          <a:ln w="12700">
-            <a:solidFill>
-              <a:schemeClr val="bg2"/>
-            </a:solidFill>
-            <a:prstDash val="solid"/>
-          </a:ln>
-        </p:spPr>
-      </p:sp>
-      <p:pic>
-        <p:nvPicPr>
-          <p:cNvPr id="22" name="foot-icon" descr="preencoded.png">    </p:cNvPr>
-          <p:cNvPicPr>
-            <a:picLocks noChangeAspect="1"/>
-          </p:cNvPicPr>
-          <p:nvPr/>
-        </p:nvPicPr>
-        <p:blipFill>
-          <a:blip r:embed="rId4"/>
-          <a:stretch>
-            <a:fillRect/>
-          </a:stretch>
-        </p:blipFill>
-        <p:spPr>
-          <a:xfrm>
-            <a:off x="685800" y="3922776"/>
-            <a:ext cx="246888" cy="246888"/>
-          </a:xfrm>
-          <a:prstGeom prst="rect">
-            <a:avLst/>
-          </a:prstGeom>
-        </p:spPr>
-      </p:pic>
-      <p:sp>
-        <p:nvSpPr>
-          <p:cNvPr id="23" name="foot-text"/>
-          <p:cNvSpPr txBox="1"/>
-          <p:nvPr/>
-        </p:nvSpPr>
-        <p:spPr>
-          <a:xfrm>
-            <a:off x="1051560" y="3794760"/>
-            <a:ext cx="7406640" cy="502920"/>
-          </a:xfrm>
-          <a:prstGeom prst="rect">
-            <a:avLst/>
-          </a:prstGeom>
-          <a:noFill/>
-          <a:ln/>
-        </p:spPr>
-        <p:txBody>
-          <a:bodyPr wrap="square" lIns="0" tIns="0" rIns="0" bIns="0" rtlCol="0" anchor="ctr"/>
-          <a:lstStyle/>
-          <a:p>
-            <a:pPr indent="0" marL="0">
-              <a:buNone/>
-            </a:pPr>
-            <a:r>
-              <a:rPr lang="en-US" sz="1150" dirty="0">
-                <a:solidFill>
-                  <a:schemeClr val="tx1"/>
-                </a:solidFill>
-              </a:rPr>
-              <a:t>公開＝「誰でも取りに来られる場所にファイルを置く」こと。Cloudflare Pagesは無料枠あり</a:t>
-            </a:r>
-            <a:endParaRPr lang="en-US" sz="1150" dirty="0"/>
+              <a:rPr lang="ja-JP" altLang="en-US" sz="1300" b="1" dirty="0">
+                <a:solidFill>
+                  <a:srgbClr val="FFFFFF"/>
+                </a:solidFill>
+                <a:latin typeface="Noto Sans JP" pitchFamily="34" charset="0"/>
+                <a:ea typeface="Noto Sans JP" pitchFamily="34" charset="-122"/>
+                <a:cs typeface="Noto Sans JP" pitchFamily="34" charset="-120"/>
+              </a:rPr>
+              <a:t>公開＝</a:t>
+            </a:r>
+            <a:pPr algn="ctr" indent="0" marL="0">
+              <a:buNone/>
+            </a:pPr>
+            <a:r>
+              <a:rPr lang="ja-JP" altLang="en-US" sz="1300" b="1" dirty="0">
+                <a:solidFill>
+                  <a:srgbClr val="FFD600"/>
+                </a:solidFill>
+                <a:latin typeface="Noto Sans JP" pitchFamily="34" charset="0"/>
+                <a:ea typeface="Noto Sans JP" pitchFamily="34" charset="-122"/>
+                <a:cs typeface="Noto Sans JP" pitchFamily="34" charset="-120"/>
+              </a:rPr>
+              <a:t>「誰でも取りに来られる場所にファイルを置く」</a:t>
+            </a:r>
+            <a:pPr algn="ctr" indent="0" marL="0">
+              <a:buNone/>
+            </a:pPr>
+            <a:r>
+              <a:rPr lang="ja-JP" altLang="en-US" sz="1300" b="1" dirty="0">
+                <a:solidFill>
+                  <a:srgbClr val="FFFFFF"/>
+                </a:solidFill>
+                <a:latin typeface="Noto Sans JP" pitchFamily="34" charset="0"/>
+                <a:ea typeface="Noto Sans JP" pitchFamily="34" charset="-122"/>
+                <a:cs typeface="Noto Sans JP" pitchFamily="34" charset="-120"/>
+              </a:rPr>
+              <a:t>こと。Cloudflare Pagesは無料枠あり</a:t>
+            </a:r>
+            <a:endParaRPr lang="ja-JP" sz="1300" dirty="0"/>
           </a:p>
         </p:txBody>
       </p:sp>
@@ -4100,8 +4043,8 @@
         </p:nvSpPr>
         <p:spPr>
           <a:xfrm>
-            <a:off x="8229600" y="4773168"/>
-            <a:ext cx="365760" cy="228600"/>
+            <a:off x="8366760" y="4754880"/>
+            <a:ext cx="365760" cy="274320"/>
           </a:xfrm>
           <a:prstGeom prst="rect">
             <a:avLst/>
@@ -4113,20 +4056,23 @@
           </a:extLst>
         </p:spPr>
         <p:txBody>
-          <a:bodyPr/>
+          <a:bodyPr anchor="ctr"/>
           <a:lstStyle>
             <a:lvl1pPr>
-              <a:defRPr sz="900">
-                <a:solidFill>
-                  <a:srgbClr val="5A6872"/>
-                </a:solidFill>
+              <a:defRPr sz="850">
+                <a:solidFill>
+                  <a:srgbClr val="FFFFFF"/>
+                </a:solidFill>
+                <a:latin typeface="Noto Sans JP"/>
+                <a:ea typeface="Noto Sans JP"/>
+                <a:cs typeface="Noto Sans JP"/>
               </a:defRPr>
             </a:lvl1pPr>
           </a:lstStyle>
           <a:p>
             <a:pPr algn="r"/>
             <a:fld id="{F7021451-1387-4CA6-816F-3879F97B5CBC}" type="slidenum">
-              <a:rPr b="0" lang="en-US"/>
+              <a:rPr b="1" lang="en-US"/>
               <a:t>3</a:t>
             </a:fld>
             <a:endParaRPr lang="en-US"/>
@@ -4161,15 +4107,58 @@
       <p:sp>
         <p:nvSpPr>
           <p:cNvPr id="2" name="Text 0"/>
-          <p:cNvSpPr/>
-          <p:nvPr>
-            <p:ph idx="100" type="title" hasCustomPrompt="1"/>
-          </p:nvPr>
-        </p:nvSpPr>
-        <p:spPr>
-          <a:xfrm>
-            <a:off x="548640" y="658368"/>
-            <a:ext cx="8046720" cy="566928"/>
+          <p:cNvSpPr txBox="1"/>
+          <p:nvPr/>
+        </p:nvSpPr>
+        <p:spPr>
+          <a:xfrm rot="-180000">
+            <a:off x="411480" y="201168"/>
+            <a:ext cx="1915668" cy="352044"/>
+          </a:xfrm>
+          <a:prstGeom prst="rect">
+            <a:avLst/>
+          </a:prstGeom>
+          <a:solidFill>
+            <a:srgbClr val="DD6420"/>
+          </a:solidFill>
+          <a:ln>
+            <a:solidFill>
+              <a:srgbClr val="DD6420"/>
+            </a:solidFill>
+          </a:ln>
+        </p:spPr>
+        <p:txBody>
+          <a:bodyPr wrap="square" lIns="0" tIns="0" rIns="0" bIns="0" rtlCol="0" anchor="ctr"/>
+          <a:lstStyle/>
+          <a:p>
+            <a:pPr algn="ctr" indent="0" marL="0">
+              <a:buNone/>
+            </a:pPr>
+            <a:r>
+              <a:rPr lang="ja-JP" altLang="en-US" sz="1100" dirty="0">
+                <a:solidFill>
+                  <a:srgbClr val="FFFFFF"/>
+                </a:solidFill>
+                <a:latin typeface="Dela Gothic One" pitchFamily="34" charset="0"/>
+                <a:ea typeface="けいふぉんと" pitchFamily="34" charset="-122"/>
+                <a:cs typeface="Dela Gothic One" pitchFamily="34" charset="-120"/>
+              </a:rPr>
+              <a:t>ハンズオン① 20分</a:t>
+            </a:r>
+            <a:endParaRPr lang="ja-JP" sz="1100" dirty="0"/>
+          </a:p>
+        </p:txBody>
+      </p:sp>
+      <p:sp>
+        <p:nvSpPr>
+          <p:cNvPr id="3" name="Text 1"/>
+          <p:cNvSpPr txBox="1"/>
+          <p:nvPr/>
+        </p:nvSpPr>
+        <p:spPr>
+          <a:xfrm>
+            <a:off x="411480" y="502920"/>
+            <a:ext cx="8321040" cy="685800"/>
           </a:xfrm>
           <a:prstGeom prst="rect">
             <a:avLst/>
@@ -4178,122 +4167,118 @@
           <a:ln/>
         </p:spPr>
         <p:txBody>
-          <a:bodyPr wrap="square" lIns="0" tIns="0" rIns="0" bIns="0" rtlCol="0" anchor="ctr"/>
-          <a:lstStyle/>
-          <a:p>
-            <a:pPr algn="l" indent="0" marL="0">
-              <a:buNone/>
-            </a:pPr>
-            <a:r>
-              <a:rPr lang="en-US" sz="2400" b="1" dirty="0">
-                <a:solidFill>
-                  <a:schemeClr val="tx1"/>
-                </a:solidFill>
+          <a:bodyPr wrap="square" lIns="0" tIns="0" rIns="0" bIns="0" rtlCol="0" anchor="ctr">
+            <a:normAutofit/>
+          </a:bodyPr>
+          <a:lstStyle/>
+          <a:p>
+            <a:pPr indent="0" marL="0">
+              <a:buNone/>
+            </a:pPr>
+            <a:r>
+              <a:rPr lang="ja-JP" altLang="en-US" sz="2600" dirty="0">
+                <a:solidFill>
+                  <a:srgbClr val="1A1A1A"/>
+                </a:solidFill>
+                <a:latin typeface="Dela Gothic One" pitchFamily="34" charset="0"/>
+                <a:ea typeface="けいふぉんと" pitchFamily="34" charset="-122"/>
+                <a:cs typeface="Dela Gothic One" pitchFamily="34" charset="-120"/>
               </a:rPr>
               <a:t>GitHubとつないで公開</a:t>
             </a:r>
-            <a:endParaRPr lang="en-US" sz="2400" dirty="0"/>
-          </a:p>
-        </p:txBody>
-      </p:sp>
-      <p:sp>
-        <p:nvSpPr>
-          <p:cNvPr id="3" name="chip"/>
+            <a:endParaRPr lang="ja-JP" sz="2600" dirty="0"/>
+          </a:p>
+        </p:txBody>
+      </p:sp>
+      <p:sp>
+        <p:nvSpPr>
+          <p:cNvPr id="4" name="card"/>
           <p:cNvSpPr/>
           <p:nvPr/>
         </p:nvSpPr>
         <p:spPr>
           <a:xfrm>
-            <a:off x="548640" y="292608"/>
-            <a:ext cx="1755648" cy="292608"/>
+            <a:off x="502920" y="1417320"/>
+            <a:ext cx="8138160" cy="509778"/>
           </a:xfrm>
           <a:prstGeom prst="roundRect">
             <a:avLst>
-              <a:gd name="adj" fmla="val 50000"/>
+              <a:gd name="adj" fmla="val 17937"/>
             </a:avLst>
           </a:prstGeom>
           <a:solidFill>
-            <a:schemeClr val="accent2"/>
-          </a:solidFill>
-          <a:ln w="12700">
-            <a:solidFill>
-              <a:schemeClr val="accent2"/>
-            </a:solidFill>
-            <a:prstDash val="solid"/>
-          </a:ln>
-        </p:spPr>
-      </p:sp>
-      <p:sp>
-        <p:nvSpPr>
-          <p:cNvPr id="4" name="chip-text"/>
-          <p:cNvSpPr txBox="1"/>
-          <p:nvPr/>
-        </p:nvSpPr>
-        <p:spPr>
-          <a:xfrm>
-            <a:off x="548640" y="292608"/>
-            <a:ext cx="1755648" cy="292608"/>
-          </a:xfrm>
-          <a:prstGeom prst="rect">
-            <a:avLst/>
-          </a:prstGeom>
-          <a:noFill/>
-          <a:ln/>
-        </p:spPr>
-        <p:txBody>
-          <a:bodyPr wrap="square" lIns="0" tIns="0" rIns="0" bIns="0" rtlCol="0" anchor="ctr"/>
-          <a:lstStyle/>
-          <a:p>
-            <a:pPr algn="ctr" indent="0" marL="0">
-              <a:buNone/>
-            </a:pPr>
-            <a:r>
-              <a:rPr lang="en-US" sz="1100" b="1" dirty="0">
-                <a:solidFill>
-                  <a:schemeClr val="bg1"/>
-                </a:solidFill>
-              </a:rPr>
-              <a:t>ハンズオン① 20分</a:t>
-            </a:r>
-            <a:endParaRPr lang="en-US" sz="1100" dirty="0"/>
-          </a:p>
-        </p:txBody>
-      </p:sp>
-      <p:sp>
-        <p:nvSpPr>
-          <p:cNvPr id="5" name="step-num"/>
-          <p:cNvSpPr/>
-          <p:nvPr/>
-        </p:nvSpPr>
-        <p:spPr>
-          <a:xfrm>
-            <a:off x="548640" y="1572768"/>
-            <a:ext cx="384048" cy="384048"/>
-          </a:xfrm>
-          <a:prstGeom prst="ellipse">
-            <a:avLst/>
-          </a:prstGeom>
-          <a:solidFill>
-            <a:schemeClr val="accent1"/>
-          </a:solidFill>
-          <a:ln w="15875">
+            <a:srgbClr val="FFFFFF"/>
+          </a:solidFill>
+          <a:ln w="25400">
             <a:solidFill>
               <a:srgbClr val="1A1A1A"/>
             </a:solidFill>
             <a:prstDash val="solid"/>
           </a:ln>
-        </p:spPr>
-      </p:sp>
-      <p:sp>
-        <p:nvSpPr>
-          <p:cNvPr id="6" name="step-num-text"/>
+          <a:effectLst>
+            <a:outerShdw sx="100000" sy="100000" kx="0" ky="0" algn="bl" rotWithShape="0" blurRad="101600" dist="38100" dir="2700000">
+              <a:srgbClr val="1A1A1A">
+                <a:alpha val="100000"/>
+              </a:srgbClr>
+            </a:outerShdw>
+          </a:effectLst>
+        </p:spPr>
+      </p:sp>
+      <p:sp>
+        <p:nvSpPr>
+          <p:cNvPr id="5" name="Text 3"/>
           <p:cNvSpPr txBox="1"/>
           <p:nvPr/>
         </p:nvSpPr>
         <p:spPr>
           <a:xfrm>
-            <a:off x="548640" y="1572768"/>
-            <a:ext cx="384048" cy="384048"/>
+            <a:off x="640080" y="1472184"/>
+            <a:ext cx="400050" cy="400050"/>
+          </a:xfrm>
+          <a:prstGeom prst="ellipse">
+            <a:avLst/>
+          </a:prstGeom>
+          <a:solidFill>
+            <a:srgbClr val="DD6420"/>
+          </a:solidFill>
+          <a:ln w="19050">
+            <a:solidFill>
+              <a:srgbClr val="1A1A1A"/>
+            </a:solidFill>
+          </a:ln>
+        </p:spPr>
+        <p:txBody>
+          <a:bodyPr wrap="square" lIns="0" tIns="0" rIns="0" bIns="0" rtlCol="0" anchor="ctr"/>
+          <a:lstStyle/>
+          <a:p>
+            <a:pPr algn="ctr" indent="0" marL="0">
+              <a:buNone/>
+            </a:pPr>
+            <a:r>
+              <a:rPr lang="ja-JP" altLang="en-US" sz="1500" dirty="0">
+                <a:solidFill>
+                  <a:srgbClr val="FFFFFF"/>
+                </a:solidFill>
+                <a:latin typeface="Dela Gothic One" pitchFamily="34" charset="0"/>
+                <a:ea typeface="けいふぉんと" pitchFamily="34" charset="-122"/>
+                <a:cs typeface="Dela Gothic One" pitchFamily="34" charset="-120"/>
+              </a:rPr>
+              <a:t>1</a:t>
+            </a:r>
+            <a:endParaRPr lang="ja-JP" sz="1500" dirty="0"/>
+          </a:p>
+        </p:txBody>
+      </p:sp>
+      <p:sp>
+        <p:nvSpPr>
+          <p:cNvPr id="6" name="step-text"/>
+          <p:cNvSpPr txBox="1"/>
+          <p:nvPr/>
+        </p:nvSpPr>
+        <p:spPr>
+          <a:xfrm>
+            <a:off x="1234440" y="1417320"/>
+            <a:ext cx="7269480" cy="509778"/>
           </a:xfrm>
           <a:prstGeom prst="rect">
             <a:avLst/>
@@ -4302,95 +4287,118 @@
           <a:ln/>
         </p:spPr>
         <p:txBody>
-          <a:bodyPr wrap="square" lIns="0" tIns="0" rIns="0" bIns="0" rtlCol="0" anchor="ctr"/>
-          <a:lstStyle/>
-          <a:p>
-            <a:pPr algn="ctr" indent="0" marL="0">
-              <a:buNone/>
-            </a:pPr>
-            <a:r>
-              <a:rPr lang="en-US" sz="1400" b="1" dirty="0">
-                <a:solidFill>
-                  <a:schemeClr val="tx1"/>
-                </a:solidFill>
-              </a:rPr>
-              <a:t>1</a:t>
-            </a:r>
-            <a:endParaRPr lang="en-US" sz="1400" dirty="0"/>
-          </a:p>
-        </p:txBody>
-      </p:sp>
-      <p:sp>
-        <p:nvSpPr>
-          <p:cNvPr id="7" name="step-text"/>
-          <p:cNvSpPr txBox="1"/>
-          <p:nvPr/>
-        </p:nvSpPr>
-        <p:spPr>
-          <a:xfrm>
-            <a:off x="1097280" y="1463040"/>
-            <a:ext cx="7498080" cy="603504"/>
-          </a:xfrm>
-          <a:prstGeom prst="rect">
-            <a:avLst/>
-          </a:prstGeom>
-          <a:noFill/>
-          <a:ln/>
-        </p:spPr>
-        <p:txBody>
-          <a:bodyPr wrap="square" lIns="0" tIns="0" rIns="0" bIns="0" rtlCol="0" anchor="ctr"/>
+          <a:bodyPr wrap="square" lIns="0" tIns="0" rIns="0" bIns="0" rtlCol="0" anchor="ctr">
+            <a:normAutofit/>
+          </a:bodyPr>
           <a:lstStyle/>
           <a:p>
             <a:pPr indent="0" marL="0">
               <a:buNone/>
             </a:pPr>
             <a:r>
-              <a:rPr lang="en-US" sz="1450" dirty="0">
-                <a:solidFill>
-                  <a:schemeClr val="tx1"/>
-                </a:solidFill>
+              <a:rPr lang="ja-JP" altLang="en-US" sz="1400" b="1" dirty="0">
+                <a:solidFill>
+                  <a:srgbClr val="1A1A1A"/>
+                </a:solidFill>
+                <a:latin typeface="Noto Sans JP" pitchFamily="34" charset="0"/>
+                <a:ea typeface="Noto Sans JP" pitchFamily="34" charset="-122"/>
+                <a:cs typeface="Noto Sans JP" pitchFamily="34" charset="-120"/>
               </a:rPr>
               <a:t>Cloudflareの「Workers &amp; Pages」でPagesのプロジェクトを作る</a:t>
             </a:r>
-            <a:endParaRPr lang="en-US" sz="1450" dirty="0"/>
-          </a:p>
-        </p:txBody>
-      </p:sp>
-      <p:sp>
-        <p:nvSpPr>
-          <p:cNvPr id="8" name="step-num"/>
+            <a:endParaRPr lang="ja-JP" sz="1400" dirty="0"/>
+          </a:p>
+        </p:txBody>
+      </p:sp>
+      <p:sp>
+        <p:nvSpPr>
+          <p:cNvPr id="7" name="card"/>
           <p:cNvSpPr/>
           <p:nvPr/>
         </p:nvSpPr>
         <p:spPr>
           <a:xfrm>
-            <a:off x="548640" y="2176272"/>
-            <a:ext cx="384048" cy="384048"/>
-          </a:xfrm>
-          <a:prstGeom prst="ellipse">
-            <a:avLst/>
-          </a:prstGeom>
-          <a:solidFill>
-            <a:schemeClr val="accent1"/>
-          </a:solidFill>
-          <a:ln w="15875">
+            <a:off x="502920" y="2055114"/>
+            <a:ext cx="8138160" cy="509778"/>
+          </a:xfrm>
+          <a:prstGeom prst="roundRect">
+            <a:avLst>
+              <a:gd name="adj" fmla="val 17937"/>
+            </a:avLst>
+          </a:prstGeom>
+          <a:solidFill>
+            <a:srgbClr val="FFFFFF"/>
+          </a:solidFill>
+          <a:ln w="25400">
             <a:solidFill>
               <a:srgbClr val="1A1A1A"/>
             </a:solidFill>
             <a:prstDash val="solid"/>
           </a:ln>
-        </p:spPr>
-      </p:sp>
-      <p:sp>
-        <p:nvSpPr>
-          <p:cNvPr id="9" name="step-num-text"/>
+          <a:effectLst>
+            <a:outerShdw sx="100000" sy="100000" kx="0" ky="0" algn="bl" rotWithShape="0" blurRad="101600" dist="38100" dir="2700000">
+              <a:srgbClr val="1A1A1A">
+                <a:alpha val="100000"/>
+              </a:srgbClr>
+            </a:outerShdw>
+          </a:effectLst>
+        </p:spPr>
+      </p:sp>
+      <p:sp>
+        <p:nvSpPr>
+          <p:cNvPr id="8" name="Text 6"/>
           <p:cNvSpPr txBox="1"/>
           <p:nvPr/>
         </p:nvSpPr>
         <p:spPr>
           <a:xfrm>
-            <a:off x="548640" y="2176272"/>
-            <a:ext cx="384048" cy="384048"/>
+            <a:off x="640080" y="2109978"/>
+            <a:ext cx="400050" cy="400050"/>
+          </a:xfrm>
+          <a:prstGeom prst="ellipse">
+            <a:avLst/>
+          </a:prstGeom>
+          <a:solidFill>
+            <a:srgbClr val="DD6420"/>
+          </a:solidFill>
+          <a:ln w="19050">
+            <a:solidFill>
+              <a:srgbClr val="1A1A1A"/>
+            </a:solidFill>
+          </a:ln>
+        </p:spPr>
+        <p:txBody>
+          <a:bodyPr wrap="square" lIns="0" tIns="0" rIns="0" bIns="0" rtlCol="0" anchor="ctr"/>
+          <a:lstStyle/>
+          <a:p>
+            <a:pPr algn="ctr" indent="0" marL="0">
+              <a:buNone/>
+            </a:pPr>
+            <a:r>
+              <a:rPr lang="ja-JP" altLang="en-US" sz="1500" dirty="0">
+                <a:solidFill>
+                  <a:srgbClr val="FFFFFF"/>
+                </a:solidFill>
+                <a:latin typeface="Dela Gothic One" pitchFamily="34" charset="0"/>
+                <a:ea typeface="けいふぉんと" pitchFamily="34" charset="-122"/>
+                <a:cs typeface="Dela Gothic One" pitchFamily="34" charset="-120"/>
+              </a:rPr>
+              <a:t>2</a:t>
+            </a:r>
+            <a:endParaRPr lang="ja-JP" sz="1500" dirty="0"/>
+          </a:p>
+        </p:txBody>
+      </p:sp>
+      <p:sp>
+        <p:nvSpPr>
+          <p:cNvPr id="9" name="step-text"/>
+          <p:cNvSpPr txBox="1"/>
+          <p:nvPr/>
+        </p:nvSpPr>
+        <p:spPr>
+          <a:xfrm>
+            <a:off x="1234440" y="2055114"/>
+            <a:ext cx="7269480" cy="509778"/>
           </a:xfrm>
           <a:prstGeom prst="rect">
             <a:avLst/>
@@ -4399,95 +4407,118 @@
           <a:ln/>
         </p:spPr>
         <p:txBody>
-          <a:bodyPr wrap="square" lIns="0" tIns="0" rIns="0" bIns="0" rtlCol="0" anchor="ctr"/>
-          <a:lstStyle/>
-          <a:p>
-            <a:pPr algn="ctr" indent="0" marL="0">
-              <a:buNone/>
-            </a:pPr>
-            <a:r>
-              <a:rPr lang="en-US" sz="1400" b="1" dirty="0">
-                <a:solidFill>
-                  <a:schemeClr val="tx1"/>
-                </a:solidFill>
-              </a:rPr>
-              <a:t>2</a:t>
-            </a:r>
-            <a:endParaRPr lang="en-US" sz="1400" dirty="0"/>
-          </a:p>
-        </p:txBody>
-      </p:sp>
-      <p:sp>
-        <p:nvSpPr>
-          <p:cNvPr id="10" name="step-text"/>
-          <p:cNvSpPr txBox="1"/>
-          <p:nvPr/>
-        </p:nvSpPr>
-        <p:spPr>
-          <a:xfrm>
-            <a:off x="1097280" y="2066544"/>
-            <a:ext cx="7498080" cy="603504"/>
-          </a:xfrm>
-          <a:prstGeom prst="rect">
-            <a:avLst/>
-          </a:prstGeom>
-          <a:noFill/>
-          <a:ln/>
-        </p:spPr>
-        <p:txBody>
-          <a:bodyPr wrap="square" lIns="0" tIns="0" rIns="0" bIns="0" rtlCol="0" anchor="ctr"/>
+          <a:bodyPr wrap="square" lIns="0" tIns="0" rIns="0" bIns="0" rtlCol="0" anchor="ctr">
+            <a:normAutofit/>
+          </a:bodyPr>
           <a:lstStyle/>
           <a:p>
             <a:pPr indent="0" marL="0">
               <a:buNone/>
             </a:pPr>
             <a:r>
-              <a:rPr lang="en-US" sz="1450" dirty="0">
-                <a:solidFill>
-                  <a:schemeClr val="tx1"/>
-                </a:solidFill>
+              <a:rPr lang="ja-JP" altLang="en-US" sz="1400" b="1" dirty="0">
+                <a:solidFill>
+                  <a:srgbClr val="1A1A1A"/>
+                </a:solidFill>
+                <a:latin typeface="Noto Sans JP" pitchFamily="34" charset="0"/>
+                <a:ea typeface="Noto Sans JP" pitchFamily="34" charset="-122"/>
+                <a:cs typeface="Noto Sans JP" pitchFamily="34" charset="-120"/>
               </a:rPr>
               <a:t>「Gitに接続」を選び、第7回のリポジトリを選ぶ</a:t>
             </a:r>
-            <a:endParaRPr lang="en-US" sz="1450" dirty="0"/>
-          </a:p>
-        </p:txBody>
-      </p:sp>
-      <p:sp>
-        <p:nvSpPr>
-          <p:cNvPr id="11" name="step-num"/>
+            <a:endParaRPr lang="ja-JP" sz="1400" dirty="0"/>
+          </a:p>
+        </p:txBody>
+      </p:sp>
+      <p:sp>
+        <p:nvSpPr>
+          <p:cNvPr id="10" name="card"/>
           <p:cNvSpPr/>
           <p:nvPr/>
         </p:nvSpPr>
         <p:spPr>
           <a:xfrm>
-            <a:off x="548640" y="2779776"/>
-            <a:ext cx="384048" cy="384048"/>
-          </a:xfrm>
-          <a:prstGeom prst="ellipse">
-            <a:avLst/>
-          </a:prstGeom>
-          <a:solidFill>
-            <a:schemeClr val="accent1"/>
-          </a:solidFill>
-          <a:ln w="15875">
+            <a:off x="502920" y="2692908"/>
+            <a:ext cx="8138160" cy="509778"/>
+          </a:xfrm>
+          <a:prstGeom prst="roundRect">
+            <a:avLst>
+              <a:gd name="adj" fmla="val 17937"/>
+            </a:avLst>
+          </a:prstGeom>
+          <a:solidFill>
+            <a:srgbClr val="FFFFFF"/>
+          </a:solidFill>
+          <a:ln w="25400">
             <a:solidFill>
               <a:srgbClr val="1A1A1A"/>
             </a:solidFill>
             <a:prstDash val="solid"/>
           </a:ln>
-        </p:spPr>
-      </p:sp>
-      <p:sp>
-        <p:nvSpPr>
-          <p:cNvPr id="12" name="step-num-text"/>
+          <a:effectLst>
+            <a:outerShdw sx="100000" sy="100000" kx="0" ky="0" algn="bl" rotWithShape="0" blurRad="101600" dist="38100" dir="2700000">
+              <a:srgbClr val="1A1A1A">
+                <a:alpha val="100000"/>
+              </a:srgbClr>
+            </a:outerShdw>
+          </a:effectLst>
+        </p:spPr>
+      </p:sp>
+      <p:sp>
+        <p:nvSpPr>
+          <p:cNvPr id="11" name="Text 9"/>
           <p:cNvSpPr txBox="1"/>
           <p:nvPr/>
         </p:nvSpPr>
         <p:spPr>
           <a:xfrm>
-            <a:off x="548640" y="2779776"/>
-            <a:ext cx="384048" cy="384048"/>
+            <a:off x="640080" y="2747772"/>
+            <a:ext cx="400050" cy="400050"/>
+          </a:xfrm>
+          <a:prstGeom prst="ellipse">
+            <a:avLst/>
+          </a:prstGeom>
+          <a:solidFill>
+            <a:srgbClr val="DD6420"/>
+          </a:solidFill>
+          <a:ln w="19050">
+            <a:solidFill>
+              <a:srgbClr val="1A1A1A"/>
+            </a:solidFill>
+          </a:ln>
+        </p:spPr>
+        <p:txBody>
+          <a:bodyPr wrap="square" lIns="0" tIns="0" rIns="0" bIns="0" rtlCol="0" anchor="ctr"/>
+          <a:lstStyle/>
+          <a:p>
+            <a:pPr algn="ctr" indent="0" marL="0">
+              <a:buNone/>
+            </a:pPr>
+            <a:r>
+              <a:rPr lang="ja-JP" altLang="en-US" sz="1500" dirty="0">
+                <a:solidFill>
+                  <a:srgbClr val="FFFFFF"/>
+                </a:solidFill>
+                <a:latin typeface="Dela Gothic One" pitchFamily="34" charset="0"/>
+                <a:ea typeface="けいふぉんと" pitchFamily="34" charset="-122"/>
+                <a:cs typeface="Dela Gothic One" pitchFamily="34" charset="-120"/>
+              </a:rPr>
+              <a:t>3</a:t>
+            </a:r>
+            <a:endParaRPr lang="ja-JP" sz="1500" dirty="0"/>
+          </a:p>
+        </p:txBody>
+      </p:sp>
+      <p:sp>
+        <p:nvSpPr>
+          <p:cNvPr id="12" name="step-text"/>
+          <p:cNvSpPr txBox="1"/>
+          <p:nvPr/>
+        </p:nvSpPr>
+        <p:spPr>
+          <a:xfrm>
+            <a:off x="1234440" y="2692908"/>
+            <a:ext cx="7269480" cy="509778"/>
           </a:xfrm>
           <a:prstGeom prst="rect">
             <a:avLst/>
@@ -4496,95 +4527,118 @@
           <a:ln/>
         </p:spPr>
         <p:txBody>
-          <a:bodyPr wrap="square" lIns="0" tIns="0" rIns="0" bIns="0" rtlCol="0" anchor="ctr"/>
-          <a:lstStyle/>
-          <a:p>
-            <a:pPr algn="ctr" indent="0" marL="0">
-              <a:buNone/>
-            </a:pPr>
-            <a:r>
-              <a:rPr lang="en-US" sz="1400" b="1" dirty="0">
-                <a:solidFill>
-                  <a:schemeClr val="tx1"/>
-                </a:solidFill>
-              </a:rPr>
-              <a:t>3</a:t>
-            </a:r>
-            <a:endParaRPr lang="en-US" sz="1400" dirty="0"/>
-          </a:p>
-        </p:txBody>
-      </p:sp>
-      <p:sp>
-        <p:nvSpPr>
-          <p:cNvPr id="13" name="step-text"/>
-          <p:cNvSpPr txBox="1"/>
-          <p:nvPr/>
-        </p:nvSpPr>
-        <p:spPr>
-          <a:xfrm>
-            <a:off x="1097280" y="2670048"/>
-            <a:ext cx="7498080" cy="603504"/>
-          </a:xfrm>
-          <a:prstGeom prst="rect">
-            <a:avLst/>
-          </a:prstGeom>
-          <a:noFill/>
-          <a:ln/>
-        </p:spPr>
-        <p:txBody>
-          <a:bodyPr wrap="square" lIns="0" tIns="0" rIns="0" bIns="0" rtlCol="0" anchor="ctr"/>
+          <a:bodyPr wrap="square" lIns="0" tIns="0" rIns="0" bIns="0" rtlCol="0" anchor="ctr">
+            <a:normAutofit/>
+          </a:bodyPr>
           <a:lstStyle/>
           <a:p>
             <a:pPr indent="0" marL="0">
               <a:buNone/>
             </a:pPr>
             <a:r>
-              <a:rPr lang="en-US" sz="1450" dirty="0">
-                <a:solidFill>
-                  <a:schemeClr val="tx1"/>
-                </a:solidFill>
+              <a:rPr lang="ja-JP" altLang="en-US" sz="1400" b="1" dirty="0">
+                <a:solidFill>
+                  <a:srgbClr val="1A1A1A"/>
+                </a:solidFill>
+                <a:latin typeface="Noto Sans JP" pitchFamily="34" charset="0"/>
+                <a:ea typeface="Noto Sans JP" pitchFamily="34" charset="-122"/>
+                <a:cs typeface="Noto Sans JP" pitchFamily="34" charset="-120"/>
               </a:rPr>
               <a:t>ビルド設定：フレームワークなし／ビルドコマンド空／出力先はルート</a:t>
             </a:r>
-            <a:endParaRPr lang="en-US" sz="1450" dirty="0"/>
-          </a:p>
-        </p:txBody>
-      </p:sp>
-      <p:sp>
-        <p:nvSpPr>
-          <p:cNvPr id="14" name="step-num"/>
+            <a:endParaRPr lang="ja-JP" sz="1400" dirty="0"/>
+          </a:p>
+        </p:txBody>
+      </p:sp>
+      <p:sp>
+        <p:nvSpPr>
+          <p:cNvPr id="13" name="card"/>
           <p:cNvSpPr/>
           <p:nvPr/>
         </p:nvSpPr>
         <p:spPr>
           <a:xfrm>
-            <a:off x="548640" y="3383280"/>
-            <a:ext cx="384048" cy="384048"/>
-          </a:xfrm>
-          <a:prstGeom prst="ellipse">
-            <a:avLst/>
-          </a:prstGeom>
-          <a:solidFill>
-            <a:schemeClr val="accent1"/>
-          </a:solidFill>
-          <a:ln w="15875">
+            <a:off x="502920" y="3330702"/>
+            <a:ext cx="8138160" cy="509778"/>
+          </a:xfrm>
+          <a:prstGeom prst="roundRect">
+            <a:avLst>
+              <a:gd name="adj" fmla="val 17937"/>
+            </a:avLst>
+          </a:prstGeom>
+          <a:solidFill>
+            <a:srgbClr val="FFFFFF"/>
+          </a:solidFill>
+          <a:ln w="25400">
             <a:solidFill>
               <a:srgbClr val="1A1A1A"/>
             </a:solidFill>
             <a:prstDash val="solid"/>
           </a:ln>
-        </p:spPr>
-      </p:sp>
-      <p:sp>
-        <p:nvSpPr>
-          <p:cNvPr id="15" name="step-num-text"/>
+          <a:effectLst>
+            <a:outerShdw sx="100000" sy="100000" kx="0" ky="0" algn="bl" rotWithShape="0" blurRad="101600" dist="38100" dir="2700000">
+              <a:srgbClr val="1A1A1A">
+                <a:alpha val="100000"/>
+              </a:srgbClr>
+            </a:outerShdw>
+          </a:effectLst>
+        </p:spPr>
+      </p:sp>
+      <p:sp>
+        <p:nvSpPr>
+          <p:cNvPr id="14" name="Text 12"/>
           <p:cNvSpPr txBox="1"/>
           <p:nvPr/>
         </p:nvSpPr>
         <p:spPr>
           <a:xfrm>
-            <a:off x="548640" y="3383280"/>
-            <a:ext cx="384048" cy="384048"/>
+            <a:off x="640080" y="3385566"/>
+            <a:ext cx="400050" cy="400050"/>
+          </a:xfrm>
+          <a:prstGeom prst="ellipse">
+            <a:avLst/>
+          </a:prstGeom>
+          <a:solidFill>
+            <a:srgbClr val="DD6420"/>
+          </a:solidFill>
+          <a:ln w="19050">
+            <a:solidFill>
+              <a:srgbClr val="1A1A1A"/>
+            </a:solidFill>
+          </a:ln>
+        </p:spPr>
+        <p:txBody>
+          <a:bodyPr wrap="square" lIns="0" tIns="0" rIns="0" bIns="0" rtlCol="0" anchor="ctr"/>
+          <a:lstStyle/>
+          <a:p>
+            <a:pPr algn="ctr" indent="0" marL="0">
+              <a:buNone/>
+            </a:pPr>
+            <a:r>
+              <a:rPr lang="ja-JP" altLang="en-US" sz="1500" dirty="0">
+                <a:solidFill>
+                  <a:srgbClr val="FFFFFF"/>
+                </a:solidFill>
+                <a:latin typeface="Dela Gothic One" pitchFamily="34" charset="0"/>
+                <a:ea typeface="けいふぉんと" pitchFamily="34" charset="-122"/>
+                <a:cs typeface="Dela Gothic One" pitchFamily="34" charset="-120"/>
+              </a:rPr>
+              <a:t>4</a:t>
+            </a:r>
+            <a:endParaRPr lang="ja-JP" sz="1500" dirty="0"/>
+          </a:p>
+        </p:txBody>
+      </p:sp>
+      <p:sp>
+        <p:nvSpPr>
+          <p:cNvPr id="15" name="step-text"/>
+          <p:cNvSpPr txBox="1"/>
+          <p:nvPr/>
+        </p:nvSpPr>
+        <p:spPr>
+          <a:xfrm>
+            <a:off x="1234440" y="3330702"/>
+            <a:ext cx="7269480" cy="509778"/>
           </a:xfrm>
           <a:prstGeom prst="rect">
             <a:avLst/>
@@ -4593,144 +4647,80 @@
           <a:ln/>
         </p:spPr>
         <p:txBody>
-          <a:bodyPr wrap="square" lIns="0" tIns="0" rIns="0" bIns="0" rtlCol="0" anchor="ctr"/>
+          <a:bodyPr wrap="square" lIns="0" tIns="0" rIns="0" bIns="0" rtlCol="0" anchor="ctr">
+            <a:normAutofit/>
+          </a:bodyPr>
+          <a:lstStyle/>
+          <a:p>
+            <a:pPr indent="0" marL="0">
+              <a:buNone/>
+            </a:pPr>
+            <a:r>
+              <a:rPr lang="ja-JP" altLang="en-US" sz="1400" b="1" dirty="0">
+                <a:solidFill>
+                  <a:srgbClr val="1A1A1A"/>
+                </a:solidFill>
+                <a:latin typeface="Noto Sans JP" pitchFamily="34" charset="0"/>
+                <a:ea typeface="Noto Sans JP" pitchFamily="34" charset="-122"/>
+                <a:cs typeface="Noto Sans JP" pitchFamily="34" charset="-120"/>
+              </a:rPr>
+              <a:t>公開されたURLを自分のスマホで開く</a:t>
+            </a:r>
+            <a:endParaRPr lang="ja-JP" sz="1400" dirty="0"/>
+          </a:p>
+        </p:txBody>
+      </p:sp>
+      <p:sp>
+        <p:nvSpPr>
+          <p:cNvPr id="16" name="Text 14"/>
+          <p:cNvSpPr txBox="1"/>
+          <p:nvPr/>
+        </p:nvSpPr>
+        <p:spPr>
+          <a:xfrm rot="-60000">
+            <a:off x="502920" y="4005072"/>
+            <a:ext cx="8138160" cy="502920"/>
+          </a:xfrm>
+          <a:prstGeom prst="rect">
+            <a:avLst/>
+          </a:prstGeom>
+          <a:solidFill>
+            <a:srgbClr val="DD6420"/>
+          </a:solidFill>
+          <a:ln w="19050">
+            <a:solidFill>
+              <a:srgbClr val="1A1A1A"/>
+            </a:solidFill>
+          </a:ln>
+          <a:effectLst>
+            <a:outerShdw sx="100000" sy="100000" kx="0" ky="0" algn="bl" rotWithShape="0" blurRad="101600" dist="38100" dir="2700000">
+              <a:srgbClr val="1A1A1A">
+                <a:alpha val="100000"/>
+              </a:srgbClr>
+            </a:outerShdw>
+          </a:effectLst>
+        </p:spPr>
+        <p:txBody>
+          <a:bodyPr wrap="square" lIns="0" tIns="1905" rIns="1905" bIns="0" rtlCol="0" anchor="ctr">
+            <a:normAutofit/>
+          </a:bodyPr>
           <a:lstStyle/>
           <a:p>
             <a:pPr algn="ctr" indent="0" marL="0">
               <a:buNone/>
             </a:pPr>
             <a:r>
-              <a:rPr lang="en-US" sz="1400" b="1" dirty="0">
-                <a:solidFill>
-                  <a:schemeClr val="tx1"/>
-                </a:solidFill>
-              </a:rPr>
-              <a:t>4</a:t>
-            </a:r>
-            <a:endParaRPr lang="en-US" sz="1400" dirty="0"/>
-          </a:p>
-        </p:txBody>
-      </p:sp>
-      <p:sp>
-        <p:nvSpPr>
-          <p:cNvPr id="16" name="step-text"/>
-          <p:cNvSpPr txBox="1"/>
-          <p:nvPr/>
-        </p:nvSpPr>
-        <p:spPr>
-          <a:xfrm>
-            <a:off x="1097280" y="3273552"/>
-            <a:ext cx="7498080" cy="603504"/>
-          </a:xfrm>
-          <a:prstGeom prst="rect">
-            <a:avLst/>
-          </a:prstGeom>
-          <a:noFill/>
-          <a:ln/>
-        </p:spPr>
-        <p:txBody>
-          <a:bodyPr wrap="square" lIns="0" tIns="0" rIns="0" bIns="0" rtlCol="0" anchor="ctr"/>
-          <a:lstStyle/>
-          <a:p>
-            <a:pPr indent="0" marL="0">
-              <a:buNone/>
-            </a:pPr>
-            <a:r>
-              <a:rPr lang="en-US" sz="1450" dirty="0">
-                <a:solidFill>
-                  <a:schemeClr val="tx1"/>
-                </a:solidFill>
-              </a:rPr>
-              <a:t>公開されたURLを自分のスマホで開く</a:t>
-            </a:r>
-            <a:endParaRPr lang="en-US" sz="1450" dirty="0"/>
-          </a:p>
-        </p:txBody>
-      </p:sp>
-      <p:sp>
-        <p:nvSpPr>
-          <p:cNvPr id="17" name="foot-box"/>
-          <p:cNvSpPr/>
-          <p:nvPr/>
-        </p:nvSpPr>
-        <p:spPr>
-          <a:xfrm>
-            <a:off x="548640" y="3977640"/>
-            <a:ext cx="8046720" cy="502920"/>
-          </a:xfrm>
-          <a:prstGeom prst="roundRect">
-            <a:avLst>
-              <a:gd name="adj" fmla="val 18182"/>
-            </a:avLst>
-          </a:prstGeom>
-          <a:solidFill>
-            <a:schemeClr val="bg2"/>
-          </a:solidFill>
-          <a:ln w="12700">
-            <a:solidFill>
-              <a:schemeClr val="bg2"/>
-            </a:solidFill>
-            <a:prstDash val="solid"/>
-          </a:ln>
-        </p:spPr>
-      </p:sp>
-      <p:pic>
-        <p:nvPicPr>
-          <p:cNvPr id="18" name="foot-icon" descr="preencoded.png">    </p:cNvPr>
-          <p:cNvPicPr>
-            <a:picLocks noChangeAspect="1"/>
-          </p:cNvPicPr>
-          <p:nvPr/>
-        </p:nvPicPr>
-        <p:blipFill>
-          <a:blip r:embed="rId1"/>
-          <a:stretch>
-            <a:fillRect/>
-          </a:stretch>
-        </p:blipFill>
-        <p:spPr>
-          <a:xfrm>
-            <a:off x="685800" y="4105656"/>
-            <a:ext cx="246888" cy="246888"/>
-          </a:xfrm>
-          <a:prstGeom prst="rect">
-            <a:avLst/>
-          </a:prstGeom>
-        </p:spPr>
-      </p:pic>
-      <p:sp>
-        <p:nvSpPr>
-          <p:cNvPr id="19" name="foot-text"/>
-          <p:cNvSpPr txBox="1"/>
-          <p:nvPr/>
-        </p:nvSpPr>
-        <p:spPr>
-          <a:xfrm>
-            <a:off x="1051560" y="3977640"/>
-            <a:ext cx="7406640" cy="502920"/>
-          </a:xfrm>
-          <a:prstGeom prst="rect">
-            <a:avLst/>
-          </a:prstGeom>
-          <a:noFill/>
-          <a:ln/>
-        </p:spPr>
-        <p:txBody>
-          <a:bodyPr wrap="square" lIns="0" tIns="0" rIns="0" bIns="0" rtlCol="0" anchor="ctr"/>
-          <a:lstStyle/>
-          <a:p>
-            <a:pPr indent="0" marL="0">
-              <a:buNone/>
-            </a:pPr>
-            <a:r>
-              <a:rPr lang="en-US" sz="1150" dirty="0">
-                <a:solidFill>
-                  <a:schemeClr val="tx1"/>
-                </a:solidFill>
+              <a:rPr lang="ja-JP" altLang="en-US" sz="1300" b="1" dirty="0">
+                <a:solidFill>
+                  <a:srgbClr val="FFFFFF"/>
+                </a:solidFill>
+                <a:latin typeface="Noto Sans JP" pitchFamily="34" charset="0"/>
+                <a:ea typeface="Noto Sans JP" pitchFamily="34" charset="-122"/>
+                <a:cs typeface="Noto Sans JP" pitchFamily="34" charset="-120"/>
               </a:rPr>
               <a:t>うまくいかないときは、エラー文をそのままClaude Codeに貼って原因を聞く</a:t>
             </a:r>
-            <a:endParaRPr lang="en-US" sz="1150" dirty="0"/>
+            <a:endParaRPr lang="ja-JP" sz="1300" dirty="0"/>
           </a:p>
         </p:txBody>
       </p:sp>
@@ -4746,8 +4736,8 @@
         </p:nvSpPr>
         <p:spPr>
           <a:xfrm>
-            <a:off x="8229600" y="4773168"/>
-            <a:ext cx="365760" cy="228600"/>
+            <a:off x="8366760" y="4754880"/>
+            <a:ext cx="365760" cy="274320"/>
           </a:xfrm>
           <a:prstGeom prst="rect">
             <a:avLst/>
@@ -4759,20 +4749,23 @@
           </a:extLst>
         </p:spPr>
         <p:txBody>
-          <a:bodyPr/>
+          <a:bodyPr anchor="ctr"/>
           <a:lstStyle>
             <a:lvl1pPr>
-              <a:defRPr sz="900">
-                <a:solidFill>
-                  <a:srgbClr val="5A6872"/>
-                </a:solidFill>
+              <a:defRPr sz="850">
+                <a:solidFill>
+                  <a:srgbClr val="FFFFFF"/>
+                </a:solidFill>
+                <a:latin typeface="Noto Sans JP"/>
+                <a:ea typeface="Noto Sans JP"/>
+                <a:cs typeface="Noto Sans JP"/>
               </a:defRPr>
             </a:lvl1pPr>
           </a:lstStyle>
           <a:p>
             <a:pPr algn="r"/>
             <a:fld id="{F7021451-1387-4CA6-816F-3879F97B5CBC}" type="slidenum">
-              <a:rPr b="0" lang="en-US"/>
+              <a:rPr b="1" lang="en-US"/>
               <a:t>4</a:t>
             </a:fld>
             <a:endParaRPr lang="en-US"/>
@@ -4807,15 +4800,58 @@
       <p:sp>
         <p:nvSpPr>
           <p:cNvPr id="2" name="Text 0"/>
-          <p:cNvSpPr/>
-          <p:nvPr>
-            <p:ph idx="100" type="title" hasCustomPrompt="1"/>
-          </p:nvPr>
-        </p:nvSpPr>
-        <p:spPr>
-          <a:xfrm>
-            <a:off x="548640" y="658368"/>
-            <a:ext cx="8046720" cy="566928"/>
+          <p:cNvSpPr txBox="1"/>
+          <p:nvPr/>
+        </p:nvSpPr>
+        <p:spPr>
+          <a:xfrm rot="-180000">
+            <a:off x="411480" y="201168"/>
+            <a:ext cx="1478128" cy="352044"/>
+          </a:xfrm>
+          <a:prstGeom prst="rect">
+            <a:avLst/>
+          </a:prstGeom>
+          <a:solidFill>
+            <a:srgbClr val="1A1A1A"/>
+          </a:solidFill>
+          <a:ln>
+            <a:solidFill>
+              <a:srgbClr val="1A1A1A"/>
+            </a:solidFill>
+          </a:ln>
+        </p:spPr>
+        <p:txBody>
+          <a:bodyPr wrap="square" lIns="0" tIns="0" rIns="0" bIns="0" rtlCol="0" anchor="ctr"/>
+          <a:lstStyle/>
+          <a:p>
+            <a:pPr algn="ctr" indent="0" marL="0">
+              <a:buNone/>
+            </a:pPr>
+            <a:r>
+              <a:rPr lang="ja-JP" altLang="en-US" sz="1100" dirty="0">
+                <a:solidFill>
+                  <a:srgbClr val="FFFFFF"/>
+                </a:solidFill>
+                <a:latin typeface="Dela Gothic One" pitchFamily="34" charset="0"/>
+                <a:ea typeface="けいふぉんと" pitchFamily="34" charset="-122"/>
+                <a:cs typeface="Dela Gothic One" pitchFamily="34" charset="-120"/>
+              </a:rPr>
+              <a:t>説明② 10分</a:t>
+            </a:r>
+            <a:endParaRPr lang="ja-JP" sz="1100" dirty="0"/>
+          </a:p>
+        </p:txBody>
+      </p:sp>
+      <p:sp>
+        <p:nvSpPr>
+          <p:cNvPr id="3" name="Text 1"/>
+          <p:cNvSpPr txBox="1"/>
+          <p:nvPr/>
+        </p:nvSpPr>
+        <p:spPr>
+          <a:xfrm>
+            <a:off x="411480" y="502920"/>
+            <a:ext cx="8321040" cy="685800"/>
           </a:xfrm>
           <a:prstGeom prst="rect">
             <a:avLst/>
@@ -4824,105 +4860,79 @@
           <a:ln/>
         </p:spPr>
         <p:txBody>
-          <a:bodyPr wrap="square" lIns="0" tIns="0" rIns="0" bIns="0" rtlCol="0" anchor="ctr"/>
-          <a:lstStyle/>
-          <a:p>
-            <a:pPr algn="l" indent="0" marL="0">
-              <a:buNone/>
-            </a:pPr>
-            <a:r>
-              <a:rPr lang="en-US" sz="2400" b="1" dirty="0">
-                <a:solidFill>
-                  <a:schemeClr val="tx1"/>
-                </a:solidFill>
+          <a:bodyPr wrap="square" lIns="0" tIns="0" rIns="0" bIns="0" rtlCol="0" anchor="ctr">
+            <a:normAutofit/>
+          </a:bodyPr>
+          <a:lstStyle/>
+          <a:p>
+            <a:pPr indent="0" marL="0">
+              <a:buNone/>
+            </a:pPr>
+            <a:r>
+              <a:rPr lang="ja-JP" altLang="en-US" sz="2600" dirty="0">
+                <a:solidFill>
+                  <a:srgbClr val="1A1A1A"/>
+                </a:solidFill>
+                <a:latin typeface="Dela Gothic One" pitchFamily="34" charset="0"/>
+                <a:ea typeface="けいふぉんと" pitchFamily="34" charset="-122"/>
+                <a:cs typeface="Dela Gothic One" pitchFamily="34" charset="-120"/>
               </a:rPr>
               <a:t>公開したら気をつけること</a:t>
             </a:r>
-            <a:endParaRPr lang="en-US" sz="2400" dirty="0"/>
-          </a:p>
-        </p:txBody>
-      </p:sp>
-      <p:sp>
-        <p:nvSpPr>
-          <p:cNvPr id="3" name="chip"/>
+            <a:endParaRPr lang="ja-JP" sz="2600" dirty="0"/>
+          </a:p>
+        </p:txBody>
+      </p:sp>
+      <p:sp>
+        <p:nvSpPr>
+          <p:cNvPr id="4" name="card"/>
           <p:cNvSpPr/>
           <p:nvPr/>
         </p:nvSpPr>
         <p:spPr>
           <a:xfrm>
-            <a:off x="548640" y="292608"/>
-            <a:ext cx="1344168" cy="292608"/>
+            <a:off x="502920" y="1417320"/>
+            <a:ext cx="2542032" cy="2331720"/>
           </a:xfrm>
           <a:prstGeom prst="roundRect">
             <a:avLst>
-              <a:gd name="adj" fmla="val 50000"/>
+              <a:gd name="adj" fmla="val 3922"/>
             </a:avLst>
           </a:prstGeom>
           <a:solidFill>
-            <a:schemeClr val="tx1"/>
-          </a:solidFill>
-          <a:ln w="12700">
+            <a:srgbClr val="FFFFFF"/>
+          </a:solidFill>
+          <a:ln w="25400">
             <a:solidFill>
-              <a:schemeClr val="tx1"/>
+              <a:srgbClr val="1A1A1A"/>
             </a:solidFill>
             <a:prstDash val="solid"/>
           </a:ln>
-        </p:spPr>
-      </p:sp>
-      <p:sp>
-        <p:nvSpPr>
-          <p:cNvPr id="4" name="chip-text"/>
-          <p:cNvSpPr txBox="1"/>
-          <p:nvPr/>
-        </p:nvSpPr>
-        <p:spPr>
-          <a:xfrm>
-            <a:off x="548640" y="292608"/>
-            <a:ext cx="1344168" cy="292608"/>
-          </a:xfrm>
-          <a:prstGeom prst="rect">
-            <a:avLst/>
-          </a:prstGeom>
-          <a:noFill/>
-          <a:ln/>
-        </p:spPr>
-        <p:txBody>
-          <a:bodyPr wrap="square" lIns="0" tIns="0" rIns="0" bIns="0" rtlCol="0" anchor="ctr"/>
-          <a:lstStyle/>
-          <a:p>
-            <a:pPr algn="ctr" indent="0" marL="0">
-              <a:buNone/>
-            </a:pPr>
-            <a:r>
-              <a:rPr lang="en-US" sz="1100" b="1" dirty="0">
-                <a:solidFill>
-                  <a:schemeClr val="accent1"/>
-                </a:solidFill>
-              </a:rPr>
-              <a:t>説明② 10分</a:t>
-            </a:r>
-            <a:endParaRPr lang="en-US" sz="1100" dirty="0"/>
-          </a:p>
-        </p:txBody>
-      </p:sp>
-      <p:sp>
-        <p:nvSpPr>
-          <p:cNvPr id="5" name="card"/>
+          <a:effectLst>
+            <a:outerShdw sx="100000" sy="100000" kx="0" ky="0" algn="bl" rotWithShape="0" blurRad="101600" dist="50800" dir="2700000">
+              <a:srgbClr val="1A1A1A">
+                <a:alpha val="100000"/>
+              </a:srgbClr>
+            </a:outerShdw>
+          </a:effectLst>
+        </p:spPr>
+      </p:sp>
+      <p:sp>
+        <p:nvSpPr>
+          <p:cNvPr id="5" name="icon-circle"/>
           <p:cNvSpPr/>
           <p:nvPr/>
         </p:nvSpPr>
         <p:spPr>
           <a:xfrm>
-            <a:off x="548640" y="1463040"/>
-            <a:ext cx="2529840" cy="2286000"/>
-          </a:xfrm>
-          <a:prstGeom prst="roundRect">
-            <a:avLst>
-              <a:gd name="adj" fmla="val 4800"/>
-            </a:avLst>
-          </a:prstGeom>
-          <a:solidFill>
-            <a:schemeClr val="bg1"/>
+            <a:off x="704088" y="1618488"/>
+            <a:ext cx="548640" cy="548640"/>
+          </a:xfrm>
+          <a:prstGeom prst="ellipse">
+            <a:avLst/>
+          </a:prstGeom>
+          <a:solidFill>
+            <a:srgbClr val="DD6420"/>
           </a:solidFill>
           <a:ln w="19050">
             <a:solidFill>
@@ -4930,43 +4940,11 @@
             </a:solidFill>
             <a:prstDash val="solid"/>
           </a:ln>
-          <a:effectLst>
-            <a:outerShdw sx="100000" sy="100000" kx="0" ky="0" algn="bl" rotWithShape="0" blurRad="101600" dist="38100" dir="2700000">
-              <a:srgbClr val="000000">
-                <a:alpha val="18000"/>
-              </a:srgbClr>
-            </a:outerShdw>
-          </a:effectLst>
-        </p:spPr>
-      </p:sp>
-      <p:sp>
-        <p:nvSpPr>
-          <p:cNvPr id="6" name="icon-circle"/>
-          <p:cNvSpPr/>
-          <p:nvPr/>
-        </p:nvSpPr>
-        <p:spPr>
-          <a:xfrm>
-            <a:off x="731520" y="1645920"/>
-            <a:ext cx="502920" cy="502920"/>
-          </a:xfrm>
-          <a:prstGeom prst="ellipse">
-            <a:avLst/>
-          </a:prstGeom>
-          <a:solidFill>
-            <a:schemeClr val="accent1"/>
-          </a:solidFill>
-          <a:ln w="15875">
-            <a:solidFill>
-              <a:srgbClr val="1A1A1A"/>
-            </a:solidFill>
-            <a:prstDash val="solid"/>
-          </a:ln>
         </p:spPr>
       </p:sp>
       <p:pic>
         <p:nvPicPr>
-          <p:cNvPr id="7" name="icon" descr="preencoded.png">    </p:cNvPr>
+          <p:cNvPr id="6" name="icon" descr="preencoded.png">    </p:cNvPr>
           <p:cNvPicPr>
             <a:picLocks noChangeAspect="1"/>
           </p:cNvPicPr>
@@ -4980,8 +4958,8 @@
         </p:blipFill>
         <p:spPr>
           <a:xfrm>
-            <a:off x="862279" y="1776679"/>
-            <a:ext cx="241402" cy="241402"/>
+            <a:off x="841248" y="1755648"/>
+            <a:ext cx="274320" cy="274320"/>
           </a:xfrm>
           <a:prstGeom prst="rect">
             <a:avLst/>
@@ -4990,14 +4968,14 @@
       </p:pic>
       <p:sp>
         <p:nvSpPr>
-          <p:cNvPr id="8" name="card-head"/>
+          <p:cNvPr id="7" name="Text 4"/>
           <p:cNvSpPr txBox="1"/>
           <p:nvPr/>
         </p:nvSpPr>
         <p:spPr>
           <a:xfrm>
-            <a:off x="731520" y="2286000"/>
-            <a:ext cx="2164080" cy="365760"/>
+            <a:off x="1371600" y="1618488"/>
+            <a:ext cx="1490472" cy="548640"/>
           </a:xfrm>
           <a:prstGeom prst="rect">
             <a:avLst/>
@@ -5006,34 +4984,39 @@
           <a:ln/>
         </p:spPr>
         <p:txBody>
-          <a:bodyPr wrap="square" lIns="0" tIns="0" rIns="0" bIns="0" rtlCol="0" anchor="ctr"/>
+          <a:bodyPr wrap="square" lIns="0" tIns="0" rIns="0" bIns="0" rtlCol="0" anchor="ctr">
+            <a:normAutofit/>
+          </a:bodyPr>
           <a:lstStyle/>
           <a:p>
             <a:pPr indent="0" marL="0">
               <a:buNone/>
             </a:pPr>
             <a:r>
-              <a:rPr lang="en-US" sz="1500" b="1" dirty="0">
-                <a:solidFill>
-                  <a:schemeClr val="tx1"/>
-                </a:solidFill>
+              <a:rPr lang="ja-JP" altLang="en-US" sz="1500" dirty="0">
+                <a:solidFill>
+                  <a:srgbClr val="1A1A1A"/>
+                </a:solidFill>
+                <a:latin typeface="Dela Gothic One" pitchFamily="34" charset="0"/>
+                <a:ea typeface="けいふぉんと" pitchFamily="34" charset="-122"/>
+                <a:cs typeface="Dela Gothic One" pitchFamily="34" charset="-120"/>
               </a:rPr>
               <a:t>スマホで確認</a:t>
             </a:r>
-            <a:endParaRPr lang="en-US" sz="1500" dirty="0"/>
-          </a:p>
-        </p:txBody>
-      </p:sp>
-      <p:sp>
-        <p:nvSpPr>
-          <p:cNvPr id="9" name="card-body"/>
+            <a:endParaRPr lang="ja-JP" sz="1500" dirty="0"/>
+          </a:p>
+        </p:txBody>
+      </p:sp>
+      <p:sp>
+        <p:nvSpPr>
+          <p:cNvPr id="8" name="card-body"/>
           <p:cNvSpPr txBox="1"/>
           <p:nvPr/>
         </p:nvSpPr>
         <p:spPr>
           <a:xfrm>
-            <a:off x="731520" y="2697480"/>
-            <a:ext cx="2164080" cy="914400"/>
+            <a:off x="704088" y="2313432"/>
+            <a:ext cx="2139696" cy="1298448"/>
           </a:xfrm>
           <a:prstGeom prst="rect">
             <a:avLst/>
@@ -5042,7 +5025,9 @@
           <a:ln/>
         </p:spPr>
         <p:txBody>
-          <a:bodyPr wrap="square" lIns="0" tIns="0" rIns="0" bIns="0" rtlCol="0" anchor="t"/>
+          <a:bodyPr wrap="square" lIns="0" tIns="0" rIns="0" bIns="0" rtlCol="0" anchor="t">
+            <a:normAutofit/>
+          </a:bodyPr>
           <a:lstStyle/>
           <a:p>
             <a:pPr indent="0" marL="0">
@@ -5052,35 +5037,70 @@
               <a:buNone/>
             </a:pPr>
             <a:r>
-              <a:rPr lang="en-US" sz="1300" dirty="0">
-                <a:solidFill>
-                  <a:schemeClr val="tx1"/>
-                </a:solidFill>
+              <a:rPr lang="ja-JP" altLang="en-US" sz="1350" b="1" dirty="0">
+                <a:solidFill>
+                  <a:srgbClr val="1A1A1A"/>
+                </a:solidFill>
+                <a:latin typeface="Noto Sans JP" pitchFamily="34" charset="0"/>
+                <a:ea typeface="Noto Sans JP" pitchFamily="34" charset="-122"/>
+                <a:cs typeface="Noto Sans JP" pitchFamily="34" charset="-120"/>
               </a:rPr>
               <a:t>お客様の多くはスマホ。PCとスマホの両方で見るクセを</a:t>
             </a:r>
-            <a:endParaRPr lang="en-US" sz="1300" dirty="0"/>
-          </a:p>
-        </p:txBody>
-      </p:sp>
-      <p:sp>
-        <p:nvSpPr>
-          <p:cNvPr id="10" name="card"/>
+            <a:endParaRPr lang="ja-JP" sz="1350" dirty="0"/>
+          </a:p>
+        </p:txBody>
+      </p:sp>
+      <p:sp>
+        <p:nvSpPr>
+          <p:cNvPr id="9" name="card"/>
           <p:cNvSpPr/>
           <p:nvPr/>
         </p:nvSpPr>
         <p:spPr>
           <a:xfrm>
-            <a:off x="3307080" y="1463040"/>
-            <a:ext cx="2529840" cy="2286000"/>
+            <a:off x="3300984" y="1417320"/>
+            <a:ext cx="2542032" cy="2331720"/>
           </a:xfrm>
           <a:prstGeom prst="roundRect">
             <a:avLst>
-              <a:gd name="adj" fmla="val 4800"/>
+              <a:gd name="adj" fmla="val 3922"/>
             </a:avLst>
           </a:prstGeom>
           <a:solidFill>
-            <a:schemeClr val="bg1"/>
+            <a:srgbClr val="FFFFFF"/>
+          </a:solidFill>
+          <a:ln w="25400">
+            <a:solidFill>
+              <a:srgbClr val="1A1A1A"/>
+            </a:solidFill>
+            <a:prstDash val="solid"/>
+          </a:ln>
+          <a:effectLst>
+            <a:outerShdw sx="100000" sy="100000" kx="0" ky="0" algn="bl" rotWithShape="0" blurRad="101600" dist="50800" dir="2700000">
+              <a:srgbClr val="1A1A1A">
+                <a:alpha val="100000"/>
+              </a:srgbClr>
+            </a:outerShdw>
+          </a:effectLst>
+        </p:spPr>
+      </p:sp>
+      <p:sp>
+        <p:nvSpPr>
+          <p:cNvPr id="10" name="icon-circle"/>
+          <p:cNvSpPr/>
+          <p:nvPr/>
+        </p:nvSpPr>
+        <p:spPr>
+          <a:xfrm>
+            <a:off x="3502152" y="1618488"/>
+            <a:ext cx="548640" cy="548640"/>
+          </a:xfrm>
+          <a:prstGeom prst="ellipse">
+            <a:avLst/>
+          </a:prstGeom>
+          <a:solidFill>
+            <a:srgbClr val="DD6420"/>
           </a:solidFill>
           <a:ln w="19050">
             <a:solidFill>
@@ -5088,43 +5108,11 @@
             </a:solidFill>
             <a:prstDash val="solid"/>
           </a:ln>
-          <a:effectLst>
-            <a:outerShdw sx="100000" sy="100000" kx="0" ky="0" algn="bl" rotWithShape="0" blurRad="101600" dist="38100" dir="2700000">
-              <a:srgbClr val="000000">
-                <a:alpha val="18000"/>
-              </a:srgbClr>
-            </a:outerShdw>
-          </a:effectLst>
-        </p:spPr>
-      </p:sp>
-      <p:sp>
-        <p:nvSpPr>
-          <p:cNvPr id="11" name="icon-circle"/>
-          <p:cNvSpPr/>
-          <p:nvPr/>
-        </p:nvSpPr>
-        <p:spPr>
-          <a:xfrm>
-            <a:off x="3489960" y="1645920"/>
-            <a:ext cx="502920" cy="502920"/>
-          </a:xfrm>
-          <a:prstGeom prst="ellipse">
-            <a:avLst/>
-          </a:prstGeom>
-          <a:solidFill>
-            <a:schemeClr val="accent1"/>
-          </a:solidFill>
-          <a:ln w="15875">
-            <a:solidFill>
-              <a:srgbClr val="1A1A1A"/>
-            </a:solidFill>
-            <a:prstDash val="solid"/>
-          </a:ln>
         </p:spPr>
       </p:sp>
       <p:pic>
         <p:nvPicPr>
-          <p:cNvPr id="12" name="icon" descr="preencoded.png">    </p:cNvPr>
+          <p:cNvPr id="11" name="icon" descr="preencoded.png">    </p:cNvPr>
           <p:cNvPicPr>
             <a:picLocks noChangeAspect="1"/>
           </p:cNvPicPr>
@@ -5138,8 +5126,8 @@
         </p:blipFill>
         <p:spPr>
           <a:xfrm>
-            <a:off x="3620719" y="1776679"/>
-            <a:ext cx="241402" cy="241402"/>
+            <a:off x="3639312" y="1755648"/>
+            <a:ext cx="274320" cy="274320"/>
           </a:xfrm>
           <a:prstGeom prst="rect">
             <a:avLst/>
@@ -5148,14 +5136,14 @@
       </p:pic>
       <p:sp>
         <p:nvSpPr>
-          <p:cNvPr id="13" name="card-head"/>
+          <p:cNvPr id="12" name="Text 8"/>
           <p:cNvSpPr txBox="1"/>
           <p:nvPr/>
         </p:nvSpPr>
         <p:spPr>
           <a:xfrm>
-            <a:off x="3489960" y="2286000"/>
-            <a:ext cx="2164080" cy="365760"/>
+            <a:off x="4169664" y="1618488"/>
+            <a:ext cx="1490472" cy="548640"/>
           </a:xfrm>
           <a:prstGeom prst="rect">
             <a:avLst/>
@@ -5164,34 +5152,39 @@
           <a:ln/>
         </p:spPr>
         <p:txBody>
-          <a:bodyPr wrap="square" lIns="0" tIns="0" rIns="0" bIns="0" rtlCol="0" anchor="ctr"/>
+          <a:bodyPr wrap="square" lIns="0" tIns="0" rIns="0" bIns="0" rtlCol="0" anchor="ctr">
+            <a:normAutofit/>
+          </a:bodyPr>
           <a:lstStyle/>
           <a:p>
             <a:pPr indent="0" marL="0">
               <a:buNone/>
             </a:pPr>
             <a:r>
-              <a:rPr lang="en-US" sz="1500" b="1" dirty="0">
-                <a:solidFill>
-                  <a:schemeClr val="tx1"/>
-                </a:solidFill>
+              <a:rPr lang="ja-JP" altLang="en-US" sz="1700" dirty="0">
+                <a:solidFill>
+                  <a:srgbClr val="1A1A1A"/>
+                </a:solidFill>
+                <a:latin typeface="Dela Gothic One" pitchFamily="34" charset="0"/>
+                <a:ea typeface="けいふぉんと" pitchFamily="34" charset="-122"/>
+                <a:cs typeface="Dela Gothic One" pitchFamily="34" charset="-120"/>
               </a:rPr>
               <a:t>自動で反映</a:t>
             </a:r>
-            <a:endParaRPr lang="en-US" sz="1500" dirty="0"/>
-          </a:p>
-        </p:txBody>
-      </p:sp>
-      <p:sp>
-        <p:nvSpPr>
-          <p:cNvPr id="14" name="card-body"/>
+            <a:endParaRPr lang="ja-JP" sz="1700" dirty="0"/>
+          </a:p>
+        </p:txBody>
+      </p:sp>
+      <p:sp>
+        <p:nvSpPr>
+          <p:cNvPr id="13" name="card-body"/>
           <p:cNvSpPr txBox="1"/>
           <p:nvPr/>
         </p:nvSpPr>
         <p:spPr>
           <a:xfrm>
-            <a:off x="3489960" y="2697480"/>
-            <a:ext cx="2164080" cy="914400"/>
+            <a:off x="3502152" y="2313432"/>
+            <a:ext cx="2139696" cy="1298448"/>
           </a:xfrm>
           <a:prstGeom prst="rect">
             <a:avLst/>
@@ -5200,7 +5193,9 @@
           <a:ln/>
         </p:spPr>
         <p:txBody>
-          <a:bodyPr wrap="square" lIns="0" tIns="0" rIns="0" bIns="0" rtlCol="0" anchor="t"/>
+          <a:bodyPr wrap="square" lIns="0" tIns="0" rIns="0" bIns="0" rtlCol="0" anchor="t">
+            <a:normAutofit/>
+          </a:bodyPr>
           <a:lstStyle/>
           <a:p>
             <a:pPr indent="0" marL="0">
@@ -5210,35 +5205,70 @@
               <a:buNone/>
             </a:pPr>
             <a:r>
-              <a:rPr lang="en-US" sz="1300" dirty="0">
-                <a:solidFill>
-                  <a:schemeClr val="tx1"/>
-                </a:solidFill>
+              <a:rPr lang="ja-JP" altLang="en-US" sz="1350" b="1" dirty="0">
+                <a:solidFill>
+                  <a:srgbClr val="1A1A1A"/>
+                </a:solidFill>
+                <a:latin typeface="Noto Sans JP" pitchFamily="34" charset="0"/>
+                <a:ea typeface="Noto Sans JP" pitchFamily="34" charset="-122"/>
+                <a:cs typeface="Noto Sans JP" pitchFamily="34" charset="-120"/>
               </a:rPr>
               <a:t>GitHubに保存するたびに、数十秒〜数分で公開し直される</a:t>
             </a:r>
-            <a:endParaRPr lang="en-US" sz="1300" dirty="0"/>
-          </a:p>
-        </p:txBody>
-      </p:sp>
-      <p:sp>
-        <p:nvSpPr>
-          <p:cNvPr id="15" name="card"/>
+            <a:endParaRPr lang="ja-JP" sz="1350" dirty="0"/>
+          </a:p>
+        </p:txBody>
+      </p:sp>
+      <p:sp>
+        <p:nvSpPr>
+          <p:cNvPr id="14" name="card"/>
           <p:cNvSpPr/>
           <p:nvPr/>
         </p:nvSpPr>
         <p:spPr>
           <a:xfrm>
-            <a:off x="6065520" y="1463040"/>
-            <a:ext cx="2529840" cy="2286000"/>
+            <a:off x="6099048" y="1417320"/>
+            <a:ext cx="2542032" cy="2331720"/>
           </a:xfrm>
           <a:prstGeom prst="roundRect">
             <a:avLst>
-              <a:gd name="adj" fmla="val 4800"/>
+              <a:gd name="adj" fmla="val 3922"/>
             </a:avLst>
           </a:prstGeom>
           <a:solidFill>
-            <a:schemeClr val="bg1"/>
+            <a:srgbClr val="FFFFFF"/>
+          </a:solidFill>
+          <a:ln w="25400">
+            <a:solidFill>
+              <a:srgbClr val="1A1A1A"/>
+            </a:solidFill>
+            <a:prstDash val="solid"/>
+          </a:ln>
+          <a:effectLst>
+            <a:outerShdw sx="100000" sy="100000" kx="0" ky="0" algn="bl" rotWithShape="0" blurRad="101600" dist="50800" dir="2700000">
+              <a:srgbClr val="1A1A1A">
+                <a:alpha val="100000"/>
+              </a:srgbClr>
+            </a:outerShdw>
+          </a:effectLst>
+        </p:spPr>
+      </p:sp>
+      <p:sp>
+        <p:nvSpPr>
+          <p:cNvPr id="15" name="icon-circle"/>
+          <p:cNvSpPr/>
+          <p:nvPr/>
+        </p:nvSpPr>
+        <p:spPr>
+          <a:xfrm>
+            <a:off x="6300216" y="1618488"/>
+            <a:ext cx="548640" cy="548640"/>
+          </a:xfrm>
+          <a:prstGeom prst="ellipse">
+            <a:avLst/>
+          </a:prstGeom>
+          <a:solidFill>
+            <a:srgbClr val="DD6420"/>
           </a:solidFill>
           <a:ln w="19050">
             <a:solidFill>
@@ -5246,43 +5276,11 @@
             </a:solidFill>
             <a:prstDash val="solid"/>
           </a:ln>
-          <a:effectLst>
-            <a:outerShdw sx="100000" sy="100000" kx="0" ky="0" algn="bl" rotWithShape="0" blurRad="101600" dist="38100" dir="2700000">
-              <a:srgbClr val="000000">
-                <a:alpha val="18000"/>
-              </a:srgbClr>
-            </a:outerShdw>
-          </a:effectLst>
-        </p:spPr>
-      </p:sp>
-      <p:sp>
-        <p:nvSpPr>
-          <p:cNvPr id="16" name="icon-circle"/>
-          <p:cNvSpPr/>
-          <p:nvPr/>
-        </p:nvSpPr>
-        <p:spPr>
-          <a:xfrm>
-            <a:off x="6248400" y="1645920"/>
-            <a:ext cx="502920" cy="502920"/>
-          </a:xfrm>
-          <a:prstGeom prst="ellipse">
-            <a:avLst/>
-          </a:prstGeom>
-          <a:solidFill>
-            <a:schemeClr val="accent1"/>
-          </a:solidFill>
-          <a:ln w="15875">
-            <a:solidFill>
-              <a:srgbClr val="1A1A1A"/>
-            </a:solidFill>
-            <a:prstDash val="solid"/>
-          </a:ln>
         </p:spPr>
       </p:sp>
       <p:pic>
         <p:nvPicPr>
-          <p:cNvPr id="17" name="icon" descr="preencoded.png">    </p:cNvPr>
+          <p:cNvPr id="16" name="icon" descr="preencoded.png">    </p:cNvPr>
           <p:cNvPicPr>
             <a:picLocks noChangeAspect="1"/>
           </p:cNvPicPr>
@@ -5296,8 +5294,8 @@
         </p:blipFill>
         <p:spPr>
           <a:xfrm>
-            <a:off x="6379159" y="1776679"/>
-            <a:ext cx="241402" cy="241402"/>
+            <a:off x="6437376" y="1755648"/>
+            <a:ext cx="274320" cy="274320"/>
           </a:xfrm>
           <a:prstGeom prst="rect">
             <a:avLst/>
@@ -5306,14 +5304,14 @@
       </p:pic>
       <p:sp>
         <p:nvSpPr>
-          <p:cNvPr id="18" name="card-head"/>
+          <p:cNvPr id="17" name="Text 12"/>
           <p:cNvSpPr txBox="1"/>
           <p:nvPr/>
         </p:nvSpPr>
         <p:spPr>
           <a:xfrm>
-            <a:off x="6248400" y="2286000"/>
-            <a:ext cx="2164080" cy="365760"/>
+            <a:off x="6967728" y="1618488"/>
+            <a:ext cx="1490472" cy="548640"/>
           </a:xfrm>
           <a:prstGeom prst="rect">
             <a:avLst/>
@@ -5322,34 +5320,39 @@
           <a:ln/>
         </p:spPr>
         <p:txBody>
-          <a:bodyPr wrap="square" lIns="0" tIns="0" rIns="0" bIns="0" rtlCol="0" anchor="ctr"/>
+          <a:bodyPr wrap="square" lIns="0" tIns="0" rIns="0" bIns="0" rtlCol="0" anchor="ctr">
+            <a:normAutofit/>
+          </a:bodyPr>
           <a:lstStyle/>
           <a:p>
             <a:pPr indent="0" marL="0">
               <a:buNone/>
             </a:pPr>
             <a:r>
-              <a:rPr lang="en-US" sz="1500" b="1" dirty="0">
-                <a:solidFill>
-                  <a:schemeClr val="tx1"/>
-                </a:solidFill>
+              <a:rPr lang="ja-JP" altLang="en-US" sz="1500" dirty="0">
+                <a:solidFill>
+                  <a:srgbClr val="1A1A1A"/>
+                </a:solidFill>
+                <a:latin typeface="Dela Gothic One" pitchFamily="34" charset="0"/>
+                <a:ea typeface="けいふぉんと" pitchFamily="34" charset="-122"/>
+                <a:cs typeface="Dela Gothic One" pitchFamily="34" charset="-120"/>
               </a:rPr>
               <a:t>誰でも見られる</a:t>
             </a:r>
-            <a:endParaRPr lang="en-US" sz="1500" dirty="0"/>
-          </a:p>
-        </p:txBody>
-      </p:sp>
-      <p:sp>
-        <p:nvSpPr>
-          <p:cNvPr id="19" name="card-body"/>
+            <a:endParaRPr lang="ja-JP" sz="1500" dirty="0"/>
+          </a:p>
+        </p:txBody>
+      </p:sp>
+      <p:sp>
+        <p:nvSpPr>
+          <p:cNvPr id="18" name="card-body"/>
           <p:cNvSpPr txBox="1"/>
           <p:nvPr/>
         </p:nvSpPr>
         <p:spPr>
           <a:xfrm>
-            <a:off x="6248400" y="2697480"/>
-            <a:ext cx="2164080" cy="914400"/>
+            <a:off x="6300216" y="2313432"/>
+            <a:ext cx="2139696" cy="1298448"/>
           </a:xfrm>
           <a:prstGeom prst="rect">
             <a:avLst/>
@@ -5358,7 +5361,9 @@
           <a:ln/>
         </p:spPr>
         <p:txBody>
-          <a:bodyPr wrap="square" lIns="0" tIns="0" rIns="0" bIns="0" rtlCol="0" anchor="t"/>
+          <a:bodyPr wrap="square" lIns="0" tIns="0" rIns="0" bIns="0" rtlCol="0" anchor="t">
+            <a:normAutofit/>
+          </a:bodyPr>
           <a:lstStyle/>
           <a:p>
             <a:pPr indent="0" marL="0">
@@ -5368,14 +5373,17 @@
               <a:buNone/>
             </a:pPr>
             <a:r>
-              <a:rPr lang="en-US" sz="1300" dirty="0">
-                <a:solidFill>
-                  <a:schemeClr val="tx1"/>
-                </a:solidFill>
+              <a:rPr lang="ja-JP" altLang="en-US" sz="1350" b="1" dirty="0">
+                <a:solidFill>
+                  <a:srgbClr val="1A1A1A"/>
+                </a:solidFill>
+                <a:latin typeface="Noto Sans JP" pitchFamily="34" charset="0"/>
+                <a:ea typeface="Noto Sans JP" pitchFamily="34" charset="-122"/>
+                <a:cs typeface="Noto Sans JP" pitchFamily="34" charset="-120"/>
               </a:rPr>
               <a:t>個人情報や社内情報をページに書かない</a:t>
             </a:r>
-            <a:endParaRPr lang="en-US" sz="1300" dirty="0"/>
+            <a:endParaRPr lang="ja-JP" sz="1350" dirty="0"/>
           </a:p>
         </p:txBody>
       </p:sp>
@@ -5391,8 +5399,8 @@
         </p:nvSpPr>
         <p:spPr>
           <a:xfrm>
-            <a:off x="8229600" y="4773168"/>
-            <a:ext cx="365760" cy="228600"/>
+            <a:off x="8366760" y="4754880"/>
+            <a:ext cx="365760" cy="274320"/>
           </a:xfrm>
           <a:prstGeom prst="rect">
             <a:avLst/>
@@ -5404,20 +5412,23 @@
           </a:extLst>
         </p:spPr>
         <p:txBody>
-          <a:bodyPr/>
+          <a:bodyPr anchor="ctr"/>
           <a:lstStyle>
             <a:lvl1pPr>
-              <a:defRPr sz="900">
-                <a:solidFill>
-                  <a:srgbClr val="5A6872"/>
-                </a:solidFill>
+              <a:defRPr sz="850">
+                <a:solidFill>
+                  <a:srgbClr val="FFFFFF"/>
+                </a:solidFill>
+                <a:latin typeface="Noto Sans JP"/>
+                <a:ea typeface="Noto Sans JP"/>
+                <a:cs typeface="Noto Sans JP"/>
               </a:defRPr>
             </a:lvl1pPr>
           </a:lstStyle>
           <a:p>
             <a:pPr algn="r"/>
             <a:fld id="{F7021451-1387-4CA6-816F-3879F97B5CBC}" type="slidenum">
-              <a:rPr b="0" lang="en-US"/>
+              <a:rPr b="1" lang="en-US"/>
               <a:t>5</a:t>
             </a:fld>
             <a:endParaRPr lang="en-US"/>
@@ -5452,15 +5463,58 @@
       <p:sp>
         <p:nvSpPr>
           <p:cNvPr id="2" name="Text 0"/>
-          <p:cNvSpPr/>
-          <p:nvPr>
-            <p:ph idx="100" type="title" hasCustomPrompt="1"/>
-          </p:nvPr>
-        </p:nvSpPr>
-        <p:spPr>
-          <a:xfrm>
-            <a:off x="548640" y="658368"/>
-            <a:ext cx="8046720" cy="566928"/>
+          <p:cNvSpPr txBox="1"/>
+          <p:nvPr/>
+        </p:nvSpPr>
+        <p:spPr>
+          <a:xfrm rot="-180000">
+            <a:off x="411480" y="201168"/>
+            <a:ext cx="1915668" cy="352044"/>
+          </a:xfrm>
+          <a:prstGeom prst="rect">
+            <a:avLst/>
+          </a:prstGeom>
+          <a:solidFill>
+            <a:srgbClr val="DD6420"/>
+          </a:solidFill>
+          <a:ln>
+            <a:solidFill>
+              <a:srgbClr val="DD6420"/>
+            </a:solidFill>
+          </a:ln>
+        </p:spPr>
+        <p:txBody>
+          <a:bodyPr wrap="square" lIns="0" tIns="0" rIns="0" bIns="0" rtlCol="0" anchor="ctr"/>
+          <a:lstStyle/>
+          <a:p>
+            <a:pPr algn="ctr" indent="0" marL="0">
+              <a:buNone/>
+            </a:pPr>
+            <a:r>
+              <a:rPr lang="ja-JP" altLang="en-US" sz="1100" dirty="0">
+                <a:solidFill>
+                  <a:srgbClr val="FFFFFF"/>
+                </a:solidFill>
+                <a:latin typeface="Dela Gothic One" pitchFamily="34" charset="0"/>
+                <a:ea typeface="けいふぉんと" pitchFamily="34" charset="-122"/>
+                <a:cs typeface="Dela Gothic One" pitchFamily="34" charset="-120"/>
+              </a:rPr>
+              <a:t>ハンズオン② 20分</a:t>
+            </a:r>
+            <a:endParaRPr lang="ja-JP" sz="1100" dirty="0"/>
+          </a:p>
+        </p:txBody>
+      </p:sp>
+      <p:sp>
+        <p:nvSpPr>
+          <p:cNvPr id="3" name="Text 1"/>
+          <p:cNvSpPr txBox="1"/>
+          <p:nvPr/>
+        </p:nvSpPr>
+        <p:spPr>
+          <a:xfrm>
+            <a:off x="411480" y="502920"/>
+            <a:ext cx="8321040" cy="685800"/>
           </a:xfrm>
           <a:prstGeom prst="rect">
             <a:avLst/>
@@ -5469,122 +5523,118 @@
           <a:ln/>
         </p:spPr>
         <p:txBody>
-          <a:bodyPr wrap="square" lIns="0" tIns="0" rIns="0" bIns="0" rtlCol="0" anchor="ctr"/>
-          <a:lstStyle/>
-          <a:p>
-            <a:pPr algn="l" indent="0" marL="0">
-              <a:buNone/>
-            </a:pPr>
-            <a:r>
-              <a:rPr lang="en-US" sz="2400" b="1" dirty="0">
-                <a:solidFill>
-                  <a:schemeClr val="tx1"/>
-                </a:solidFill>
+          <a:bodyPr wrap="square" lIns="0" tIns="0" rIns="0" bIns="0" rtlCol="0" anchor="ctr">
+            <a:normAutofit/>
+          </a:bodyPr>
+          <a:lstStyle/>
+          <a:p>
+            <a:pPr indent="0" marL="0">
+              <a:buNone/>
+            </a:pPr>
+            <a:r>
+              <a:rPr lang="ja-JP" altLang="en-US" sz="2600" dirty="0">
+                <a:solidFill>
+                  <a:srgbClr val="1A1A1A"/>
+                </a:solidFill>
+                <a:latin typeface="Dela Gothic One" pitchFamily="34" charset="0"/>
+                <a:ea typeface="けいふぉんと" pitchFamily="34" charset="-122"/>
+                <a:cs typeface="Dela Gothic One" pitchFamily="34" charset="-120"/>
               </a:rPr>
               <a:t>受付ページを作って公開</a:t>
             </a:r>
-            <a:endParaRPr lang="en-US" sz="2400" dirty="0"/>
-          </a:p>
-        </p:txBody>
-      </p:sp>
-      <p:sp>
-        <p:nvSpPr>
-          <p:cNvPr id="3" name="chip"/>
+            <a:endParaRPr lang="ja-JP" sz="2600" dirty="0"/>
+          </a:p>
+        </p:txBody>
+      </p:sp>
+      <p:sp>
+        <p:nvSpPr>
+          <p:cNvPr id="4" name="card"/>
           <p:cNvSpPr/>
           <p:nvPr/>
         </p:nvSpPr>
         <p:spPr>
           <a:xfrm>
-            <a:off x="548640" y="292608"/>
-            <a:ext cx="1755648" cy="292608"/>
+            <a:off x="502920" y="1600200"/>
+            <a:ext cx="8138160" cy="566928"/>
           </a:xfrm>
           <a:prstGeom prst="roundRect">
             <a:avLst>
-              <a:gd name="adj" fmla="val 50000"/>
+              <a:gd name="adj" fmla="val 16129"/>
             </a:avLst>
           </a:prstGeom>
           <a:solidFill>
-            <a:schemeClr val="accent2"/>
-          </a:solidFill>
-          <a:ln w="12700">
-            <a:solidFill>
-              <a:schemeClr val="accent2"/>
-            </a:solidFill>
-            <a:prstDash val="solid"/>
-          </a:ln>
-        </p:spPr>
-      </p:sp>
-      <p:sp>
-        <p:nvSpPr>
-          <p:cNvPr id="4" name="chip-text"/>
-          <p:cNvSpPr txBox="1"/>
-          <p:nvPr/>
-        </p:nvSpPr>
-        <p:spPr>
-          <a:xfrm>
-            <a:off x="548640" y="292608"/>
-            <a:ext cx="1755648" cy="292608"/>
-          </a:xfrm>
-          <a:prstGeom prst="rect">
-            <a:avLst/>
-          </a:prstGeom>
-          <a:noFill/>
-          <a:ln/>
-        </p:spPr>
-        <p:txBody>
-          <a:bodyPr wrap="square" lIns="0" tIns="0" rIns="0" bIns="0" rtlCol="0" anchor="ctr"/>
-          <a:lstStyle/>
-          <a:p>
-            <a:pPr algn="ctr" indent="0" marL="0">
-              <a:buNone/>
-            </a:pPr>
-            <a:r>
-              <a:rPr lang="en-US" sz="1100" b="1" dirty="0">
-                <a:solidFill>
-                  <a:schemeClr val="bg1"/>
-                </a:solidFill>
-              </a:rPr>
-              <a:t>ハンズオン② 20分</a:t>
-            </a:r>
-            <a:endParaRPr lang="en-US" sz="1100" dirty="0"/>
-          </a:p>
-        </p:txBody>
-      </p:sp>
-      <p:sp>
-        <p:nvSpPr>
-          <p:cNvPr id="5" name="step-num"/>
-          <p:cNvSpPr/>
-          <p:nvPr/>
-        </p:nvSpPr>
-        <p:spPr>
-          <a:xfrm>
-            <a:off x="548640" y="1805940"/>
-            <a:ext cx="384048" cy="384048"/>
-          </a:xfrm>
-          <a:prstGeom prst="ellipse">
-            <a:avLst/>
-          </a:prstGeom>
-          <a:solidFill>
-            <a:schemeClr val="accent1"/>
-          </a:solidFill>
-          <a:ln w="15875">
+            <a:srgbClr val="FFFFFF"/>
+          </a:solidFill>
+          <a:ln w="25400">
             <a:solidFill>
               <a:srgbClr val="1A1A1A"/>
             </a:solidFill>
             <a:prstDash val="solid"/>
           </a:ln>
-        </p:spPr>
-      </p:sp>
-      <p:sp>
-        <p:nvSpPr>
-          <p:cNvPr id="6" name="step-num-text"/>
+          <a:effectLst>
+            <a:outerShdw sx="100000" sy="100000" kx="0" ky="0" algn="bl" rotWithShape="0" blurRad="101600" dist="38100" dir="2700000">
+              <a:srgbClr val="1A1A1A">
+                <a:alpha val="100000"/>
+              </a:srgbClr>
+            </a:outerShdw>
+          </a:effectLst>
+        </p:spPr>
+      </p:sp>
+      <p:sp>
+        <p:nvSpPr>
+          <p:cNvPr id="5" name="Text 3"/>
           <p:cNvSpPr txBox="1"/>
           <p:nvPr/>
         </p:nvSpPr>
         <p:spPr>
           <a:xfrm>
-            <a:off x="548640" y="1805940"/>
-            <a:ext cx="384048" cy="384048"/>
+            <a:off x="640080" y="1682496"/>
+            <a:ext cx="402336" cy="402336"/>
+          </a:xfrm>
+          <a:prstGeom prst="ellipse">
+            <a:avLst/>
+          </a:prstGeom>
+          <a:solidFill>
+            <a:srgbClr val="DD6420"/>
+          </a:solidFill>
+          <a:ln w="19050">
+            <a:solidFill>
+              <a:srgbClr val="1A1A1A"/>
+            </a:solidFill>
+          </a:ln>
+        </p:spPr>
+        <p:txBody>
+          <a:bodyPr wrap="square" lIns="0" tIns="0" rIns="0" bIns="0" rtlCol="0" anchor="ctr"/>
+          <a:lstStyle/>
+          <a:p>
+            <a:pPr algn="ctr" indent="0" marL="0">
+              <a:buNone/>
+            </a:pPr>
+            <a:r>
+              <a:rPr lang="ja-JP" altLang="en-US" sz="1500" dirty="0">
+                <a:solidFill>
+                  <a:srgbClr val="FFFFFF"/>
+                </a:solidFill>
+                <a:latin typeface="Dela Gothic One" pitchFamily="34" charset="0"/>
+                <a:ea typeface="けいふぉんと" pitchFamily="34" charset="-122"/>
+                <a:cs typeface="Dela Gothic One" pitchFamily="34" charset="-120"/>
+              </a:rPr>
+              <a:t>1</a:t>
+            </a:r>
+            <a:endParaRPr lang="ja-JP" sz="1500" dirty="0"/>
+          </a:p>
+        </p:txBody>
+      </p:sp>
+      <p:sp>
+        <p:nvSpPr>
+          <p:cNvPr id="6" name="step-text"/>
+          <p:cNvSpPr txBox="1"/>
+          <p:nvPr/>
+        </p:nvSpPr>
+        <p:spPr>
+          <a:xfrm>
+            <a:off x="1234440" y="1600200"/>
+            <a:ext cx="7269480" cy="566928"/>
           </a:xfrm>
           <a:prstGeom prst="rect">
             <a:avLst/>
@@ -5593,95 +5643,118 @@
           <a:ln/>
         </p:spPr>
         <p:txBody>
-          <a:bodyPr wrap="square" lIns="0" tIns="0" rIns="0" bIns="0" rtlCol="0" anchor="ctr"/>
-          <a:lstStyle/>
-          <a:p>
-            <a:pPr algn="ctr" indent="0" marL="0">
-              <a:buNone/>
-            </a:pPr>
-            <a:r>
-              <a:rPr lang="en-US" sz="1400" b="1" dirty="0">
-                <a:solidFill>
-                  <a:schemeClr val="tx1"/>
-                </a:solidFill>
-              </a:rPr>
-              <a:t>1</a:t>
-            </a:r>
-            <a:endParaRPr lang="en-US" sz="1400" dirty="0"/>
-          </a:p>
-        </p:txBody>
-      </p:sp>
-      <p:sp>
-        <p:nvSpPr>
-          <p:cNvPr id="7" name="step-text"/>
-          <p:cNvSpPr txBox="1"/>
-          <p:nvPr/>
-        </p:nvSpPr>
-        <p:spPr>
-          <a:xfrm>
-            <a:off x="1097280" y="1696212"/>
-            <a:ext cx="7498080" cy="603504"/>
-          </a:xfrm>
-          <a:prstGeom prst="rect">
-            <a:avLst/>
-          </a:prstGeom>
-          <a:noFill/>
-          <a:ln/>
-        </p:spPr>
-        <p:txBody>
-          <a:bodyPr wrap="square" lIns="0" tIns="0" rIns="0" bIns="0" rtlCol="0" anchor="ctr"/>
+          <a:bodyPr wrap="square" lIns="0" tIns="0" rIns="0" bIns="0" rtlCol="0" anchor="ctr">
+            <a:normAutofit/>
+          </a:bodyPr>
           <a:lstStyle/>
           <a:p>
             <a:pPr indent="0" marL="0">
               <a:buNone/>
             </a:pPr>
             <a:r>
-              <a:rPr lang="en-US" sz="1450" dirty="0">
-                <a:solidFill>
-                  <a:schemeClr val="tx1"/>
-                </a:solidFill>
+              <a:rPr lang="ja-JP" altLang="en-US" sz="1400" b="1" dirty="0">
+                <a:solidFill>
+                  <a:srgbClr val="1A1A1A"/>
+                </a:solidFill>
+                <a:latin typeface="Noto Sans JP" pitchFamily="34" charset="0"/>
+                <a:ea typeface="Noto Sans JP" pitchFamily="34" charset="-122"/>
+                <a:cs typeface="Noto Sans JP" pitchFamily="34" charset="-120"/>
               </a:rPr>
               <a:t>Claude Codeに受付ページを頼む（プロンプト集 P-05）</a:t>
             </a:r>
-            <a:endParaRPr lang="en-US" sz="1450" dirty="0"/>
-          </a:p>
-        </p:txBody>
-      </p:sp>
-      <p:sp>
-        <p:nvSpPr>
-          <p:cNvPr id="8" name="step-num"/>
+            <a:endParaRPr lang="ja-JP" sz="1400" dirty="0"/>
+          </a:p>
+        </p:txBody>
+      </p:sp>
+      <p:sp>
+        <p:nvSpPr>
+          <p:cNvPr id="7" name="card"/>
           <p:cNvSpPr/>
           <p:nvPr/>
         </p:nvSpPr>
         <p:spPr>
           <a:xfrm>
-            <a:off x="548640" y="2409444"/>
-            <a:ext cx="384048" cy="384048"/>
-          </a:xfrm>
-          <a:prstGeom prst="ellipse">
-            <a:avLst/>
-          </a:prstGeom>
-          <a:solidFill>
-            <a:schemeClr val="accent1"/>
-          </a:solidFill>
-          <a:ln w="15875">
+            <a:off x="502920" y="2295144"/>
+            <a:ext cx="8138160" cy="566928"/>
+          </a:xfrm>
+          <a:prstGeom prst="roundRect">
+            <a:avLst>
+              <a:gd name="adj" fmla="val 16129"/>
+            </a:avLst>
+          </a:prstGeom>
+          <a:solidFill>
+            <a:srgbClr val="FFFFFF"/>
+          </a:solidFill>
+          <a:ln w="25400">
             <a:solidFill>
               <a:srgbClr val="1A1A1A"/>
             </a:solidFill>
             <a:prstDash val="solid"/>
           </a:ln>
-        </p:spPr>
-      </p:sp>
-      <p:sp>
-        <p:nvSpPr>
-          <p:cNvPr id="9" name="step-num-text"/>
+          <a:effectLst>
+            <a:outerShdw sx="100000" sy="100000" kx="0" ky="0" algn="bl" rotWithShape="0" blurRad="101600" dist="38100" dir="2700000">
+              <a:srgbClr val="1A1A1A">
+                <a:alpha val="100000"/>
+              </a:srgbClr>
+            </a:outerShdw>
+          </a:effectLst>
+        </p:spPr>
+      </p:sp>
+      <p:sp>
+        <p:nvSpPr>
+          <p:cNvPr id="8" name="Text 6"/>
           <p:cNvSpPr txBox="1"/>
           <p:nvPr/>
         </p:nvSpPr>
         <p:spPr>
           <a:xfrm>
-            <a:off x="548640" y="2409444"/>
-            <a:ext cx="384048" cy="384048"/>
+            <a:off x="640080" y="2377440"/>
+            <a:ext cx="402336" cy="402336"/>
+          </a:xfrm>
+          <a:prstGeom prst="ellipse">
+            <a:avLst/>
+          </a:prstGeom>
+          <a:solidFill>
+            <a:srgbClr val="DD6420"/>
+          </a:solidFill>
+          <a:ln w="19050">
+            <a:solidFill>
+              <a:srgbClr val="1A1A1A"/>
+            </a:solidFill>
+          </a:ln>
+        </p:spPr>
+        <p:txBody>
+          <a:bodyPr wrap="square" lIns="0" tIns="0" rIns="0" bIns="0" rtlCol="0" anchor="ctr"/>
+          <a:lstStyle/>
+          <a:p>
+            <a:pPr algn="ctr" indent="0" marL="0">
+              <a:buNone/>
+            </a:pPr>
+            <a:r>
+              <a:rPr lang="ja-JP" altLang="en-US" sz="1500" dirty="0">
+                <a:solidFill>
+                  <a:srgbClr val="FFFFFF"/>
+                </a:solidFill>
+                <a:latin typeface="Dela Gothic One" pitchFamily="34" charset="0"/>
+                <a:ea typeface="けいふぉんと" pitchFamily="34" charset="-122"/>
+                <a:cs typeface="Dela Gothic One" pitchFamily="34" charset="-120"/>
+              </a:rPr>
+              <a:t>2</a:t>
+            </a:r>
+            <a:endParaRPr lang="ja-JP" sz="1500" dirty="0"/>
+          </a:p>
+        </p:txBody>
+      </p:sp>
+      <p:sp>
+        <p:nvSpPr>
+          <p:cNvPr id="9" name="step-text"/>
+          <p:cNvSpPr txBox="1"/>
+          <p:nvPr/>
+        </p:nvSpPr>
+        <p:spPr>
+          <a:xfrm>
+            <a:off x="1234440" y="2295144"/>
+            <a:ext cx="7269480" cy="566928"/>
           </a:xfrm>
           <a:prstGeom prst="rect">
             <a:avLst/>
@@ -5690,95 +5763,118 @@
           <a:ln/>
         </p:spPr>
         <p:txBody>
-          <a:bodyPr wrap="square" lIns="0" tIns="0" rIns="0" bIns="0" rtlCol="0" anchor="ctr"/>
-          <a:lstStyle/>
-          <a:p>
-            <a:pPr algn="ctr" indent="0" marL="0">
-              <a:buNone/>
-            </a:pPr>
-            <a:r>
-              <a:rPr lang="en-US" sz="1400" b="1" dirty="0">
-                <a:solidFill>
-                  <a:schemeClr val="tx1"/>
-                </a:solidFill>
-              </a:rPr>
-              <a:t>2</a:t>
-            </a:r>
-            <a:endParaRPr lang="en-US" sz="1400" dirty="0"/>
-          </a:p>
-        </p:txBody>
-      </p:sp>
-      <p:sp>
-        <p:nvSpPr>
-          <p:cNvPr id="10" name="step-text"/>
-          <p:cNvSpPr txBox="1"/>
-          <p:nvPr/>
-        </p:nvSpPr>
-        <p:spPr>
-          <a:xfrm>
-            <a:off x="1097280" y="2299716"/>
-            <a:ext cx="7498080" cy="603504"/>
-          </a:xfrm>
-          <a:prstGeom prst="rect">
-            <a:avLst/>
-          </a:prstGeom>
-          <a:noFill/>
-          <a:ln/>
-        </p:spPr>
-        <p:txBody>
-          <a:bodyPr wrap="square" lIns="0" tIns="0" rIns="0" bIns="0" rtlCol="0" anchor="ctr"/>
+          <a:bodyPr wrap="square" lIns="0" tIns="0" rIns="0" bIns="0" rtlCol="0" anchor="ctr">
+            <a:normAutofit/>
+          </a:bodyPr>
           <a:lstStyle/>
           <a:p>
             <a:pPr indent="0" marL="0">
               <a:buNone/>
             </a:pPr>
             <a:r>
-              <a:rPr lang="en-US" sz="1450" dirty="0">
-                <a:solidFill>
-                  <a:schemeClr val="tx1"/>
-                </a:solidFill>
+              <a:rPr lang="ja-JP" altLang="en-US" sz="1400" b="1" dirty="0">
+                <a:solidFill>
+                  <a:srgbClr val="1A1A1A"/>
+                </a:solidFill>
+                <a:latin typeface="Noto Sans JP" pitchFamily="34" charset="0"/>
+                <a:ea typeface="Noto Sans JP" pitchFamily="34" charset="-122"/>
+                <a:cs typeface="Noto Sans JP" pitchFamily="34" charset="-120"/>
               </a:rPr>
               <a:t>今回は「見た目だけ」。送信先はまだ作らない</a:t>
             </a:r>
-            <a:endParaRPr lang="en-US" sz="1450" dirty="0"/>
-          </a:p>
-        </p:txBody>
-      </p:sp>
-      <p:sp>
-        <p:nvSpPr>
-          <p:cNvPr id="11" name="step-num"/>
+            <a:endParaRPr lang="ja-JP" sz="1400" dirty="0"/>
+          </a:p>
+        </p:txBody>
+      </p:sp>
+      <p:sp>
+        <p:nvSpPr>
+          <p:cNvPr id="10" name="card"/>
           <p:cNvSpPr/>
           <p:nvPr/>
         </p:nvSpPr>
         <p:spPr>
           <a:xfrm>
-            <a:off x="548640" y="3012948"/>
-            <a:ext cx="384048" cy="384048"/>
-          </a:xfrm>
-          <a:prstGeom prst="ellipse">
-            <a:avLst/>
-          </a:prstGeom>
-          <a:solidFill>
-            <a:schemeClr val="accent1"/>
-          </a:solidFill>
-          <a:ln w="15875">
+            <a:off x="502920" y="2990088"/>
+            <a:ext cx="8138160" cy="566928"/>
+          </a:xfrm>
+          <a:prstGeom prst="roundRect">
+            <a:avLst>
+              <a:gd name="adj" fmla="val 16129"/>
+            </a:avLst>
+          </a:prstGeom>
+          <a:solidFill>
+            <a:srgbClr val="FFFFFF"/>
+          </a:solidFill>
+          <a:ln w="25400">
             <a:solidFill>
               <a:srgbClr val="1A1A1A"/>
             </a:solidFill>
             <a:prstDash val="solid"/>
           </a:ln>
-        </p:spPr>
-      </p:sp>
-      <p:sp>
-        <p:nvSpPr>
-          <p:cNvPr id="12" name="step-num-text"/>
+          <a:effectLst>
+            <a:outerShdw sx="100000" sy="100000" kx="0" ky="0" algn="bl" rotWithShape="0" blurRad="101600" dist="38100" dir="2700000">
+              <a:srgbClr val="1A1A1A">
+                <a:alpha val="100000"/>
+              </a:srgbClr>
+            </a:outerShdw>
+          </a:effectLst>
+        </p:spPr>
+      </p:sp>
+      <p:sp>
+        <p:nvSpPr>
+          <p:cNvPr id="11" name="Text 9"/>
           <p:cNvSpPr txBox="1"/>
           <p:nvPr/>
         </p:nvSpPr>
         <p:spPr>
           <a:xfrm>
-            <a:off x="548640" y="3012948"/>
-            <a:ext cx="384048" cy="384048"/>
+            <a:off x="640080" y="3072384"/>
+            <a:ext cx="402336" cy="402336"/>
+          </a:xfrm>
+          <a:prstGeom prst="ellipse">
+            <a:avLst/>
+          </a:prstGeom>
+          <a:solidFill>
+            <a:srgbClr val="DD6420"/>
+          </a:solidFill>
+          <a:ln w="19050">
+            <a:solidFill>
+              <a:srgbClr val="1A1A1A"/>
+            </a:solidFill>
+          </a:ln>
+        </p:spPr>
+        <p:txBody>
+          <a:bodyPr wrap="square" lIns="0" tIns="0" rIns="0" bIns="0" rtlCol="0" anchor="ctr"/>
+          <a:lstStyle/>
+          <a:p>
+            <a:pPr algn="ctr" indent="0" marL="0">
+              <a:buNone/>
+            </a:pPr>
+            <a:r>
+              <a:rPr lang="ja-JP" altLang="en-US" sz="1500" dirty="0">
+                <a:solidFill>
+                  <a:srgbClr val="FFFFFF"/>
+                </a:solidFill>
+                <a:latin typeface="Dela Gothic One" pitchFamily="34" charset="0"/>
+                <a:ea typeface="けいふぉんと" pitchFamily="34" charset="-122"/>
+                <a:cs typeface="Dela Gothic One" pitchFamily="34" charset="-120"/>
+              </a:rPr>
+              <a:t>3</a:t>
+            </a:r>
+            <a:endParaRPr lang="ja-JP" sz="1500" dirty="0"/>
+          </a:p>
+        </p:txBody>
+      </p:sp>
+      <p:sp>
+        <p:nvSpPr>
+          <p:cNvPr id="12" name="step-text"/>
+          <p:cNvSpPr txBox="1"/>
+          <p:nvPr/>
+        </p:nvSpPr>
+        <p:spPr>
+          <a:xfrm>
+            <a:off x="1234440" y="2990088"/>
+            <a:ext cx="7269480" cy="566928"/>
           </a:xfrm>
           <a:prstGeom prst="rect">
             <a:avLst/>
@@ -5787,95 +5883,118 @@
           <a:ln/>
         </p:spPr>
         <p:txBody>
-          <a:bodyPr wrap="square" lIns="0" tIns="0" rIns="0" bIns="0" rtlCol="0" anchor="ctr"/>
-          <a:lstStyle/>
-          <a:p>
-            <a:pPr algn="ctr" indent="0" marL="0">
-              <a:buNone/>
-            </a:pPr>
-            <a:r>
-              <a:rPr lang="en-US" sz="1400" b="1" dirty="0">
-                <a:solidFill>
-                  <a:schemeClr val="tx1"/>
-                </a:solidFill>
-              </a:rPr>
-              <a:t>3</a:t>
-            </a:r>
-            <a:endParaRPr lang="en-US" sz="1400" dirty="0"/>
-          </a:p>
-        </p:txBody>
-      </p:sp>
-      <p:sp>
-        <p:nvSpPr>
-          <p:cNvPr id="13" name="step-text"/>
-          <p:cNvSpPr txBox="1"/>
-          <p:nvPr/>
-        </p:nvSpPr>
-        <p:spPr>
-          <a:xfrm>
-            <a:off x="1097280" y="2903220"/>
-            <a:ext cx="7498080" cy="603504"/>
-          </a:xfrm>
-          <a:prstGeom prst="rect">
-            <a:avLst/>
-          </a:prstGeom>
-          <a:noFill/>
-          <a:ln/>
-        </p:spPr>
-        <p:txBody>
-          <a:bodyPr wrap="square" lIns="0" tIns="0" rIns="0" bIns="0" rtlCol="0" anchor="ctr"/>
+          <a:bodyPr wrap="square" lIns="0" tIns="0" rIns="0" bIns="0" rtlCol="0" anchor="ctr">
+            <a:normAutofit/>
+          </a:bodyPr>
           <a:lstStyle/>
           <a:p>
             <a:pPr indent="0" marL="0">
               <a:buNone/>
             </a:pPr>
             <a:r>
-              <a:rPr lang="en-US" sz="1450" dirty="0">
-                <a:solidFill>
-                  <a:schemeClr val="tx1"/>
-                </a:solidFill>
+              <a:rPr lang="ja-JP" altLang="en-US" sz="1400" b="1" dirty="0">
+                <a:solidFill>
+                  <a:srgbClr val="1A1A1A"/>
+                </a:solidFill>
+                <a:latin typeface="Noto Sans JP" pitchFamily="34" charset="0"/>
+                <a:ea typeface="Noto Sans JP" pitchFamily="34" charset="-122"/>
+                <a:cs typeface="Noto Sans JP" pitchFamily="34" charset="-120"/>
               </a:rPr>
               <a:t>スマホで確認し、直したい点を2つ直す</a:t>
             </a:r>
-            <a:endParaRPr lang="en-US" sz="1450" dirty="0"/>
-          </a:p>
-        </p:txBody>
-      </p:sp>
-      <p:sp>
-        <p:nvSpPr>
-          <p:cNvPr id="14" name="step-num"/>
+            <a:endParaRPr lang="ja-JP" sz="1400" dirty="0"/>
+          </a:p>
+        </p:txBody>
+      </p:sp>
+      <p:sp>
+        <p:nvSpPr>
+          <p:cNvPr id="13" name="card"/>
           <p:cNvSpPr/>
           <p:nvPr/>
         </p:nvSpPr>
         <p:spPr>
           <a:xfrm>
-            <a:off x="548640" y="3616452"/>
-            <a:ext cx="384048" cy="384048"/>
-          </a:xfrm>
-          <a:prstGeom prst="ellipse">
-            <a:avLst/>
-          </a:prstGeom>
-          <a:solidFill>
-            <a:schemeClr val="accent1"/>
-          </a:solidFill>
-          <a:ln w="15875">
+            <a:off x="502920" y="3685032"/>
+            <a:ext cx="8138160" cy="566928"/>
+          </a:xfrm>
+          <a:prstGeom prst="roundRect">
+            <a:avLst>
+              <a:gd name="adj" fmla="val 16129"/>
+            </a:avLst>
+          </a:prstGeom>
+          <a:solidFill>
+            <a:srgbClr val="FFFFFF"/>
+          </a:solidFill>
+          <a:ln w="25400">
             <a:solidFill>
               <a:srgbClr val="1A1A1A"/>
             </a:solidFill>
             <a:prstDash val="solid"/>
           </a:ln>
-        </p:spPr>
-      </p:sp>
-      <p:sp>
-        <p:nvSpPr>
-          <p:cNvPr id="15" name="step-num-text"/>
+          <a:effectLst>
+            <a:outerShdw sx="100000" sy="100000" kx="0" ky="0" algn="bl" rotWithShape="0" blurRad="101600" dist="38100" dir="2700000">
+              <a:srgbClr val="1A1A1A">
+                <a:alpha val="100000"/>
+              </a:srgbClr>
+            </a:outerShdw>
+          </a:effectLst>
+        </p:spPr>
+      </p:sp>
+      <p:sp>
+        <p:nvSpPr>
+          <p:cNvPr id="14" name="Text 12"/>
           <p:cNvSpPr txBox="1"/>
           <p:nvPr/>
         </p:nvSpPr>
         <p:spPr>
           <a:xfrm>
-            <a:off x="548640" y="3616452"/>
-            <a:ext cx="384048" cy="384048"/>
+            <a:off x="640080" y="3767328"/>
+            <a:ext cx="402336" cy="402336"/>
+          </a:xfrm>
+          <a:prstGeom prst="ellipse">
+            <a:avLst/>
+          </a:prstGeom>
+          <a:solidFill>
+            <a:srgbClr val="DD6420"/>
+          </a:solidFill>
+          <a:ln w="19050">
+            <a:solidFill>
+              <a:srgbClr val="1A1A1A"/>
+            </a:solidFill>
+          </a:ln>
+        </p:spPr>
+        <p:txBody>
+          <a:bodyPr wrap="square" lIns="0" tIns="0" rIns="0" bIns="0" rtlCol="0" anchor="ctr"/>
+          <a:lstStyle/>
+          <a:p>
+            <a:pPr algn="ctr" indent="0" marL="0">
+              <a:buNone/>
+            </a:pPr>
+            <a:r>
+              <a:rPr lang="ja-JP" altLang="en-US" sz="1500" dirty="0">
+                <a:solidFill>
+                  <a:srgbClr val="FFFFFF"/>
+                </a:solidFill>
+                <a:latin typeface="Dela Gothic One" pitchFamily="34" charset="0"/>
+                <a:ea typeface="けいふぉんと" pitchFamily="34" charset="-122"/>
+                <a:cs typeface="Dela Gothic One" pitchFamily="34" charset="-120"/>
+              </a:rPr>
+              <a:t>4</a:t>
+            </a:r>
+            <a:endParaRPr lang="ja-JP" sz="1500" dirty="0"/>
+          </a:p>
+        </p:txBody>
+      </p:sp>
+      <p:sp>
+        <p:nvSpPr>
+          <p:cNvPr id="15" name="step-text"/>
+          <p:cNvSpPr txBox="1"/>
+          <p:nvPr/>
+        </p:nvSpPr>
+        <p:spPr>
+          <a:xfrm>
+            <a:off x="1234440" y="3685032"/>
+            <a:ext cx="7269480" cy="566928"/>
           </a:xfrm>
           <a:prstGeom prst="rect">
             <a:avLst/>
@@ -5884,57 +6003,26 @@
           <a:ln/>
         </p:spPr>
         <p:txBody>
-          <a:bodyPr wrap="square" lIns="0" tIns="0" rIns="0" bIns="0" rtlCol="0" anchor="ctr"/>
-          <a:lstStyle/>
-          <a:p>
-            <a:pPr algn="ctr" indent="0" marL="0">
-              <a:buNone/>
-            </a:pPr>
-            <a:r>
-              <a:rPr lang="en-US" sz="1400" b="1" dirty="0">
-                <a:solidFill>
-                  <a:schemeClr val="tx1"/>
-                </a:solidFill>
-              </a:rPr>
-              <a:t>4</a:t>
-            </a:r>
-            <a:endParaRPr lang="en-US" sz="1400" dirty="0"/>
-          </a:p>
-        </p:txBody>
-      </p:sp>
-      <p:sp>
-        <p:nvSpPr>
-          <p:cNvPr id="16" name="step-text"/>
-          <p:cNvSpPr txBox="1"/>
-          <p:nvPr/>
-        </p:nvSpPr>
-        <p:spPr>
-          <a:xfrm>
-            <a:off x="1097280" y="3506724"/>
-            <a:ext cx="7498080" cy="603504"/>
-          </a:xfrm>
-          <a:prstGeom prst="rect">
-            <a:avLst/>
-          </a:prstGeom>
-          <a:noFill/>
-          <a:ln/>
-        </p:spPr>
-        <p:txBody>
-          <a:bodyPr wrap="square" lIns="0" tIns="0" rIns="0" bIns="0" rtlCol="0" anchor="ctr"/>
+          <a:bodyPr wrap="square" lIns="0" tIns="0" rIns="0" bIns="0" rtlCol="0" anchor="ctr">
+            <a:normAutofit/>
+          </a:bodyPr>
           <a:lstStyle/>
           <a:p>
             <a:pPr indent="0" marL="0">
               <a:buNone/>
             </a:pPr>
             <a:r>
-              <a:rPr lang="en-US" sz="1450" dirty="0">
-                <a:solidFill>
-                  <a:schemeClr val="tx1"/>
-                </a:solidFill>
+              <a:rPr lang="ja-JP" altLang="en-US" sz="1400" b="1" dirty="0">
+                <a:solidFill>
+                  <a:srgbClr val="1A1A1A"/>
+                </a:solidFill>
+                <a:latin typeface="Noto Sans JP" pitchFamily="34" charset="0"/>
+                <a:ea typeface="Noto Sans JP" pitchFamily="34" charset="-122"/>
+                <a:cs typeface="Noto Sans JP" pitchFamily="34" charset="-120"/>
               </a:rPr>
               <a:t>記録 → GitHubに保存 → 公開URLに反映されたか確かめる</a:t>
             </a:r>
-            <a:endParaRPr lang="en-US" sz="1450" dirty="0"/>
+            <a:endParaRPr lang="ja-JP" sz="1400" dirty="0"/>
           </a:p>
         </p:txBody>
       </p:sp>
@@ -5950,8 +6038,8 @@
         </p:nvSpPr>
         <p:spPr>
           <a:xfrm>
-            <a:off x="8229600" y="4773168"/>
-            <a:ext cx="365760" cy="228600"/>
+            <a:off x="8366760" y="4754880"/>
+            <a:ext cx="365760" cy="274320"/>
           </a:xfrm>
           <a:prstGeom prst="rect">
             <a:avLst/>
@@ -5963,20 +6051,23 @@
           </a:extLst>
         </p:spPr>
         <p:txBody>
-          <a:bodyPr/>
+          <a:bodyPr anchor="ctr"/>
           <a:lstStyle>
             <a:lvl1pPr>
-              <a:defRPr sz="900">
-                <a:solidFill>
-                  <a:srgbClr val="5A6872"/>
-                </a:solidFill>
+              <a:defRPr sz="850">
+                <a:solidFill>
+                  <a:srgbClr val="FFFFFF"/>
+                </a:solidFill>
+                <a:latin typeface="Noto Sans JP"/>
+                <a:ea typeface="Noto Sans JP"/>
+                <a:cs typeface="Noto Sans JP"/>
               </a:defRPr>
             </a:lvl1pPr>
           </a:lstStyle>
           <a:p>
             <a:pPr algn="r"/>
             <a:fld id="{F7021451-1387-4CA6-816F-3879F97B5CBC}" type="slidenum">
-              <a:rPr b="0" lang="en-US"/>
+              <a:rPr b="1" lang="en-US"/>
               <a:t>6</a:t>
             </a:fld>
             <a:endParaRPr lang="en-US"/>
@@ -6011,15 +6102,58 @@
       <p:sp>
         <p:nvSpPr>
           <p:cNvPr id="2" name="Text 0"/>
-          <p:cNvSpPr/>
-          <p:nvPr>
-            <p:ph idx="100" type="title" hasCustomPrompt="1"/>
-          </p:nvPr>
-        </p:nvSpPr>
-        <p:spPr>
-          <a:xfrm>
-            <a:off x="548640" y="658368"/>
-            <a:ext cx="8046720" cy="566928"/>
+          <p:cNvSpPr txBox="1"/>
+          <p:nvPr/>
+        </p:nvSpPr>
+        <p:spPr>
+          <a:xfrm rot="-180000">
+            <a:off x="411480" y="201168"/>
+            <a:ext cx="1332281" cy="352044"/>
+          </a:xfrm>
+          <a:prstGeom prst="rect">
+            <a:avLst/>
+          </a:prstGeom>
+          <a:solidFill>
+            <a:srgbClr val="1A1A1A"/>
+          </a:solidFill>
+          <a:ln>
+            <a:solidFill>
+              <a:srgbClr val="1A1A1A"/>
+            </a:solidFill>
+          </a:ln>
+        </p:spPr>
+        <p:txBody>
+          <a:bodyPr wrap="square" lIns="0" tIns="0" rIns="0" bIns="0" rtlCol="0" anchor="ctr"/>
+          <a:lstStyle/>
+          <a:p>
+            <a:pPr algn="ctr" indent="0" marL="0">
+              <a:buNone/>
+            </a:pPr>
+            <a:r>
+              <a:rPr lang="ja-JP" altLang="en-US" sz="1100" dirty="0">
+                <a:solidFill>
+                  <a:srgbClr val="FFFFFF"/>
+                </a:solidFill>
+                <a:latin typeface="Dela Gothic One" pitchFamily="34" charset="0"/>
+                <a:ea typeface="けいふぉんと" pitchFamily="34" charset="-122"/>
+                <a:cs typeface="Dela Gothic One" pitchFamily="34" charset="-120"/>
+              </a:rPr>
+              <a:t>完成イメージ</a:t>
+            </a:r>
+            <a:endParaRPr lang="ja-JP" sz="1100" dirty="0"/>
+          </a:p>
+        </p:txBody>
+      </p:sp>
+      <p:sp>
+        <p:nvSpPr>
+          <p:cNvPr id="3" name="Text 1"/>
+          <p:cNvSpPr txBox="1"/>
+          <p:nvPr/>
+        </p:nvSpPr>
+        <p:spPr>
+          <a:xfrm>
+            <a:off x="411480" y="502920"/>
+            <a:ext cx="8321040" cy="685800"/>
           </a:xfrm>
           <a:prstGeom prst="rect">
             <a:avLst/>
@@ -6028,101 +6162,43 @@
           <a:ln/>
         </p:spPr>
         <p:txBody>
-          <a:bodyPr wrap="square" lIns="0" tIns="0" rIns="0" bIns="0" rtlCol="0" anchor="ctr"/>
-          <a:lstStyle/>
-          <a:p>
-            <a:pPr algn="l" indent="0" marL="0">
-              <a:buNone/>
-            </a:pPr>
-            <a:r>
-              <a:rPr lang="en-US" sz="2400" b="1" dirty="0">
-                <a:solidFill>
-                  <a:schemeClr val="tx1"/>
-                </a:solidFill>
+          <a:bodyPr wrap="square" lIns="0" tIns="0" rIns="0" bIns="0" rtlCol="0" anchor="ctr">
+            <a:normAutofit/>
+          </a:bodyPr>
+          <a:lstStyle/>
+          <a:p>
+            <a:pPr indent="0" marL="0">
+              <a:buNone/>
+            </a:pPr>
+            <a:r>
+              <a:rPr lang="ja-JP" altLang="en-US" sz="2600" dirty="0">
+                <a:solidFill>
+                  <a:srgbClr val="1A1A1A"/>
+                </a:solidFill>
+                <a:latin typeface="Dela Gothic One" pitchFamily="34" charset="0"/>
+                <a:ea typeface="けいふぉんと" pitchFamily="34" charset="-122"/>
+                <a:cs typeface="Dela Gothic One" pitchFamily="34" charset="-120"/>
               </a:rPr>
               <a:t>受付ページの完成イメージ（スマホ）</a:t>
             </a:r>
-            <a:endParaRPr lang="en-US" sz="2400" dirty="0"/>
-          </a:p>
-        </p:txBody>
-      </p:sp>
-      <p:sp>
-        <p:nvSpPr>
-          <p:cNvPr id="3" name="chip"/>
+            <a:endParaRPr lang="ja-JP" sz="2600" dirty="0"/>
+          </a:p>
+        </p:txBody>
+      </p:sp>
+      <p:sp>
+        <p:nvSpPr>
+          <p:cNvPr id="5" name="phone-frame"/>
           <p:cNvSpPr/>
           <p:nvPr/>
         </p:nvSpPr>
         <p:spPr>
-          <a:xfrm>
-            <a:off x="548640" y="292608"/>
-            <a:ext cx="1207008" cy="292608"/>
+          <a:xfrm rot="-180000">
+            <a:off x="640080" y="1463040"/>
+            <a:ext cx="1541433" cy="3099816"/>
           </a:xfrm>
           <a:prstGeom prst="roundRect">
             <a:avLst>
-              <a:gd name="adj" fmla="val 50000"/>
-            </a:avLst>
-          </a:prstGeom>
-          <a:solidFill>
-            <a:schemeClr val="tx1"/>
-          </a:solidFill>
-          <a:ln w="12700">
-            <a:solidFill>
-              <a:schemeClr val="tx1"/>
-            </a:solidFill>
-            <a:prstDash val="solid"/>
-          </a:ln>
-        </p:spPr>
-      </p:sp>
-      <p:sp>
-        <p:nvSpPr>
-          <p:cNvPr id="4" name="chip-text"/>
-          <p:cNvSpPr txBox="1"/>
-          <p:nvPr/>
-        </p:nvSpPr>
-        <p:spPr>
-          <a:xfrm>
-            <a:off x="548640" y="292608"/>
-            <a:ext cx="1207008" cy="292608"/>
-          </a:xfrm>
-          <a:prstGeom prst="rect">
-            <a:avLst/>
-          </a:prstGeom>
-          <a:noFill/>
-          <a:ln/>
-        </p:spPr>
-        <p:txBody>
-          <a:bodyPr wrap="square" lIns="0" tIns="0" rIns="0" bIns="0" rtlCol="0" anchor="ctr"/>
-          <a:lstStyle/>
-          <a:p>
-            <a:pPr algn="ctr" indent="0" marL="0">
-              <a:buNone/>
-            </a:pPr>
-            <a:r>
-              <a:rPr lang="en-US" sz="1100" b="1" dirty="0">
-                <a:solidFill>
-                  <a:schemeClr val="accent1"/>
-                </a:solidFill>
-              </a:rPr>
-              <a:t>完成イメージ</a:t>
-            </a:r>
-            <a:endParaRPr lang="en-US" sz="1100" dirty="0"/>
-          </a:p>
-        </p:txBody>
-      </p:sp>
-      <p:sp>
-        <p:nvSpPr>
-          <p:cNvPr id="6" name="phone-frame"/>
-          <p:cNvSpPr/>
-          <p:nvPr/>
-        </p:nvSpPr>
-        <p:spPr>
-          <a:xfrm>
-            <a:off x="548640" y="1417320"/>
-            <a:ext cx="1563178" cy="3145536"/>
-          </a:xfrm>
-          <a:prstGeom prst="roundRect">
-            <a:avLst>
-              <a:gd name="adj" fmla="val 8189"/>
+              <a:gd name="adj" fmla="val 8305"/>
             </a:avLst>
           </a:prstGeom>
           <a:solidFill>
@@ -6135,9 +6211,9 @@
             <a:prstDash val="solid"/>
           </a:ln>
           <a:effectLst>
-            <a:outerShdw sx="100000" sy="100000" kx="0" ky="0" algn="bl" rotWithShape="0" blurRad="101600" dist="38100" dir="2700000">
-              <a:srgbClr val="000000">
-                <a:alpha val="18000"/>
+            <a:outerShdw sx="100000" sy="100000" kx="0" ky="0" algn="bl" rotWithShape="0" blurRad="101600" dist="50800" dir="2700000">
+              <a:srgbClr val="1A1A1A">
+                <a:alpha val="100000"/>
               </a:srgbClr>
             </a:outerShdw>
           </a:effectLst>
@@ -6145,7 +6221,7 @@
       </p:sp>
       <p:pic>
         <p:nvPicPr>
-          <p:cNvPr id="7" name="phone-screen" descr="まなべ食堂の予約ページ（入力前）">    </p:cNvPr>
+          <p:cNvPr id="6" name="phone-screen" descr="まなべ食堂の予約ページ（入力前）">    </p:cNvPr>
           <p:cNvPicPr>
             <a:picLocks noChangeAspect="1"/>
           </p:cNvPicPr>
@@ -6158,9 +6234,9 @@
           </a:stretch>
         </p:blipFill>
         <p:spPr>
-          <a:xfrm>
-            <a:off x="612648" y="1481328"/>
-            <a:ext cx="1435162" cy="3017520"/>
+          <a:xfrm rot="-180000">
+            <a:off x="704088" y="1527048"/>
+            <a:ext cx="1413417" cy="2971800"/>
           </a:xfrm>
           <a:prstGeom prst="rect">
             <a:avLst/>
@@ -6169,79 +6245,18 @@
       </p:pic>
       <p:sp>
         <p:nvSpPr>
-          <p:cNvPr id="8" name="phone-num"/>
+          <p:cNvPr id="7" name="phone-frame"/>
           <p:cNvSpPr/>
           <p:nvPr/>
         </p:nvSpPr>
         <p:spPr>
-          <a:xfrm>
-            <a:off x="438912" y="1307592"/>
-            <a:ext cx="365760" cy="365760"/>
-          </a:xfrm>
-          <a:prstGeom prst="ellipse">
-            <a:avLst/>
-          </a:prstGeom>
-          <a:solidFill>
-            <a:schemeClr val="accent1"/>
-          </a:solidFill>
-          <a:ln w="15875">
-            <a:solidFill>
-              <a:srgbClr val="1A1A1A"/>
-            </a:solidFill>
-            <a:prstDash val="solid"/>
-          </a:ln>
-        </p:spPr>
-      </p:sp>
-      <p:sp>
-        <p:nvSpPr>
-          <p:cNvPr id="9" name="Text 5"/>
-          <p:cNvSpPr txBox="1"/>
-          <p:nvPr/>
-        </p:nvSpPr>
-        <p:spPr>
-          <a:xfrm>
-            <a:off x="438912" y="1307592"/>
-            <a:ext cx="365760" cy="365760"/>
-          </a:xfrm>
-          <a:prstGeom prst="rect">
-            <a:avLst/>
-          </a:prstGeom>
-          <a:noFill/>
-          <a:ln/>
-        </p:spPr>
-        <p:txBody>
-          <a:bodyPr wrap="square" lIns="0" tIns="0" rIns="0" bIns="0" rtlCol="0" anchor="ctr"/>
-          <a:lstStyle/>
-          <a:p>
-            <a:pPr algn="ctr" indent="0" marL="0">
-              <a:buNone/>
-            </a:pPr>
-            <a:r>
-              <a:rPr lang="en-US" sz="1300" b="1" dirty="0">
-                <a:solidFill>
-                  <a:schemeClr val="tx1"/>
-                </a:solidFill>
-              </a:rPr>
-              <a:t>1</a:t>
-            </a:r>
-            <a:endParaRPr lang="en-US" sz="1300" dirty="0"/>
-          </a:p>
-        </p:txBody>
-      </p:sp>
-      <p:sp>
-        <p:nvSpPr>
-          <p:cNvPr id="10" name="phone-frame"/>
-          <p:cNvSpPr/>
-          <p:nvPr/>
-        </p:nvSpPr>
-        <p:spPr>
-          <a:xfrm>
-            <a:off x="2386138" y="1417320"/>
-            <a:ext cx="1563178" cy="3145536"/>
+          <a:xfrm rot="180000">
+            <a:off x="2501553" y="1463040"/>
+            <a:ext cx="1541433" cy="3099816"/>
           </a:xfrm>
           <a:prstGeom prst="roundRect">
             <a:avLst>
-              <a:gd name="adj" fmla="val 8189"/>
+              <a:gd name="adj" fmla="val 8305"/>
             </a:avLst>
           </a:prstGeom>
           <a:solidFill>
@@ -6254,9 +6269,9 @@
             <a:prstDash val="solid"/>
           </a:ln>
           <a:effectLst>
-            <a:outerShdw sx="100000" sy="100000" kx="0" ky="0" algn="bl" rotWithShape="0" blurRad="101600" dist="38100" dir="2700000">
-              <a:srgbClr val="000000">
-                <a:alpha val="18000"/>
+            <a:outerShdw sx="100000" sy="100000" kx="0" ky="0" algn="bl" rotWithShape="0" blurRad="101600" dist="50800" dir="2700000">
+              <a:srgbClr val="1A1A1A">
+                <a:alpha val="100000"/>
               </a:srgbClr>
             </a:outerShdw>
           </a:effectLst>
@@ -6264,7 +6279,7 @@
       </p:sp>
       <p:pic>
         <p:nvPicPr>
-          <p:cNvPr id="11" name="phone-screen" descr="必須項目が空のときのエラー表示">    </p:cNvPr>
+          <p:cNvPr id="8" name="phone-screen" descr="必須項目が空のときのエラー表示">    </p:cNvPr>
           <p:cNvPicPr>
             <a:picLocks noChangeAspect="1"/>
           </p:cNvPicPr>
@@ -6277,9 +6292,9 @@
           </a:stretch>
         </p:blipFill>
         <p:spPr>
-          <a:xfrm>
-            <a:off x="2450146" y="1481328"/>
-            <a:ext cx="1435162" cy="3017520"/>
+          <a:xfrm rot="180000">
+            <a:off x="2565561" y="1527048"/>
+            <a:ext cx="1413417" cy="2971800"/>
           </a:xfrm>
           <a:prstGeom prst="rect">
             <a:avLst/>
@@ -6288,39 +6303,97 @@
       </p:pic>
       <p:sp>
         <p:nvSpPr>
-          <p:cNvPr id="12" name="phone-num"/>
+          <p:cNvPr id="9" name="card"/>
           <p:cNvSpPr/>
           <p:nvPr/>
         </p:nvSpPr>
         <p:spPr>
           <a:xfrm>
-            <a:off x="2276410" y="1307592"/>
-            <a:ext cx="365760" cy="365760"/>
-          </a:xfrm>
-          <a:prstGeom prst="ellipse">
-            <a:avLst/>
-          </a:prstGeom>
-          <a:solidFill>
-            <a:schemeClr val="accent1"/>
-          </a:solidFill>
-          <a:ln w="15875">
+            <a:off x="4408746" y="1417320"/>
+            <a:ext cx="4232334" cy="3154680"/>
+          </a:xfrm>
+          <a:prstGeom prst="roundRect">
+            <a:avLst>
+              <a:gd name="adj" fmla="val 2899"/>
+            </a:avLst>
+          </a:prstGeom>
+          <a:solidFill>
+            <a:srgbClr val="FFFFFF"/>
+          </a:solidFill>
+          <a:ln w="25400">
             <a:solidFill>
               <a:srgbClr val="1A1A1A"/>
             </a:solidFill>
             <a:prstDash val="solid"/>
           </a:ln>
-        </p:spPr>
-      </p:sp>
-      <p:sp>
-        <p:nvSpPr>
-          <p:cNvPr id="13" name="Text 8"/>
+          <a:effectLst>
+            <a:outerShdw sx="100000" sy="100000" kx="0" ky="0" algn="bl" rotWithShape="0" blurRad="101600" dist="50800" dir="2700000">
+              <a:srgbClr val="1A1A1A">
+                <a:alpha val="100000"/>
+              </a:srgbClr>
+            </a:outerShdw>
+          </a:effectLst>
+        </p:spPr>
+      </p:sp>
+      <p:sp>
+        <p:nvSpPr>
+          <p:cNvPr id="10" name="icon-circle"/>
+          <p:cNvSpPr/>
+          <p:nvPr/>
+        </p:nvSpPr>
+        <p:spPr>
+          <a:xfrm>
+            <a:off x="4591626" y="1655064"/>
+            <a:ext cx="292608" cy="292608"/>
+          </a:xfrm>
+          <a:prstGeom prst="ellipse">
+            <a:avLst/>
+          </a:prstGeom>
+          <a:solidFill>
+            <a:srgbClr val="DD6420"/>
+          </a:solidFill>
+          <a:ln w="19050">
+            <a:solidFill>
+              <a:srgbClr val="1A1A1A"/>
+            </a:solidFill>
+            <a:prstDash val="solid"/>
+          </a:ln>
+        </p:spPr>
+      </p:sp>
+      <p:pic>
+        <p:nvPicPr>
+          <p:cNvPr id="11" name="icon" descr="preencoded.png">    </p:cNvPr>
+          <p:cNvPicPr>
+            <a:picLocks noChangeAspect="1"/>
+          </p:cNvPicPr>
+          <p:nvPr/>
+        </p:nvPicPr>
+        <p:blipFill>
+          <a:blip r:embed="rId3"/>
+          <a:stretch>
+            <a:fillRect/>
+          </a:stretch>
+        </p:blipFill>
+        <p:spPr>
+          <a:xfrm>
+            <a:off x="4664778" y="1728216"/>
+            <a:ext cx="146304" cy="146304"/>
+          </a:xfrm>
+          <a:prstGeom prst="rect">
+            <a:avLst/>
+          </a:prstGeom>
+        </p:spPr>
+      </p:pic>
+      <p:sp>
+        <p:nvSpPr>
+          <p:cNvPr id="12" name="point-head"/>
           <p:cNvSpPr txBox="1"/>
           <p:nvPr/>
         </p:nvSpPr>
         <p:spPr>
           <a:xfrm>
-            <a:off x="2276410" y="1307592"/>
-            <a:ext cx="365760" cy="365760"/>
+            <a:off x="4975674" y="1572768"/>
+            <a:ext cx="3500814" cy="457200"/>
           </a:xfrm>
           <a:prstGeom prst="rect">
             <a:avLst/>
@@ -6329,34 +6402,39 @@
           <a:ln/>
         </p:spPr>
         <p:txBody>
-          <a:bodyPr wrap="square" lIns="0" tIns="0" rIns="0" bIns="0" rtlCol="0" anchor="ctr"/>
-          <a:lstStyle/>
-          <a:p>
-            <a:pPr algn="ctr" indent="0" marL="0">
-              <a:buNone/>
-            </a:pPr>
-            <a:r>
-              <a:rPr lang="en-US" sz="1300" b="1" dirty="0">
-                <a:solidFill>
-                  <a:schemeClr val="tx1"/>
-                </a:solidFill>
-              </a:rPr>
-              <a:t>2</a:t>
-            </a:r>
-            <a:endParaRPr lang="en-US" sz="1300" dirty="0"/>
-          </a:p>
-        </p:txBody>
-      </p:sp>
-      <p:sp>
-        <p:nvSpPr>
-          <p:cNvPr id="14" name="point-head"/>
+          <a:bodyPr wrap="square" lIns="0" tIns="0" rIns="0" bIns="0" rtlCol="0" anchor="ctr">
+            <a:normAutofit/>
+          </a:bodyPr>
+          <a:lstStyle/>
+          <a:p>
+            <a:pPr indent="0" marL="0">
+              <a:buNone/>
+            </a:pPr>
+            <a:r>
+              <a:rPr lang="ja-JP" altLang="en-US" sz="1300" b="1" dirty="0">
+                <a:solidFill>
+                  <a:srgbClr val="DD6420"/>
+                </a:solidFill>
+                <a:latin typeface="Noto Sans JP" pitchFamily="34" charset="0"/>
+                <a:ea typeface="Noto Sans JP" pitchFamily="34" charset="-122"/>
+                <a:cs typeface="Noto Sans JP" pitchFamily="34" charset="-120"/>
+              </a:rPr>
+              <a:t>1 入力欄は大きく、必須がひと目でわかる</a:t>
+            </a:r>
+            <a:endParaRPr lang="ja-JP" sz="1300" dirty="0"/>
+          </a:p>
+        </p:txBody>
+      </p:sp>
+      <p:sp>
+        <p:nvSpPr>
+          <p:cNvPr id="13" name="point-body"/>
           <p:cNvSpPr txBox="1"/>
           <p:nvPr/>
         </p:nvSpPr>
         <p:spPr>
           <a:xfrm>
-            <a:off x="4315076" y="1417320"/>
-            <a:ext cx="4280284" cy="365760"/>
+            <a:off x="4975674" y="2048256"/>
+            <a:ext cx="3500814" cy="429768"/>
           </a:xfrm>
           <a:prstGeom prst="rect">
             <a:avLst/>
@@ -6365,34 +6443,88 @@
           <a:ln/>
         </p:spPr>
         <p:txBody>
-          <a:bodyPr wrap="square" lIns="0" tIns="0" rIns="0" bIns="0" rtlCol="0" anchor="t"/>
+          <a:bodyPr wrap="square" lIns="0" tIns="0" rIns="0" bIns="0" rtlCol="0" anchor="t">
+            <a:normAutofit/>
+          </a:bodyPr>
           <a:lstStyle/>
           <a:p>
             <a:pPr indent="0" marL="0">
               <a:buNone/>
             </a:pPr>
             <a:r>
-              <a:rPr lang="en-US" sz="1500" b="1" dirty="0">
-                <a:solidFill>
-                  <a:schemeClr val="tx1"/>
-                </a:solidFill>
-              </a:rPr>
-              <a:t>1 入力欄は大きく、必須がひと目でわかる</a:t>
-            </a:r>
-            <a:endParaRPr lang="en-US" sz="1500" dirty="0"/>
-          </a:p>
-        </p:txBody>
-      </p:sp>
-      <p:sp>
-        <p:nvSpPr>
-          <p:cNvPr id="15" name="point-body"/>
+              <a:rPr lang="ja-JP" altLang="en-US" sz="1150" dirty="0">
+                <a:solidFill>
+                  <a:srgbClr val="1A1A1A"/>
+                </a:solidFill>
+                <a:latin typeface="Noto Sans JP Medium" pitchFamily="34" charset="0"/>
+                <a:ea typeface="Noto Sans JP Medium" pitchFamily="34" charset="-122"/>
+                <a:cs typeface="Noto Sans JP Medium" pitchFamily="34" charset="-120"/>
+              </a:rPr>
+              <a:t>お客様はスマホで入力する。指で押しやすい大きさにし、「必須」を赤で示す</a:t>
+            </a:r>
+            <a:endParaRPr lang="ja-JP" sz="1150" dirty="0"/>
+          </a:p>
+        </p:txBody>
+      </p:sp>
+      <p:sp>
+        <p:nvSpPr>
+          <p:cNvPr id="14" name="icon-circle"/>
+          <p:cNvSpPr/>
+          <p:nvPr/>
+        </p:nvSpPr>
+        <p:spPr>
+          <a:xfrm>
+            <a:off x="4591626" y="2615184"/>
+            <a:ext cx="292608" cy="292608"/>
+          </a:xfrm>
+          <a:prstGeom prst="ellipse">
+            <a:avLst/>
+          </a:prstGeom>
+          <a:solidFill>
+            <a:srgbClr val="DD6420"/>
+          </a:solidFill>
+          <a:ln w="19050">
+            <a:solidFill>
+              <a:srgbClr val="1A1A1A"/>
+            </a:solidFill>
+            <a:prstDash val="solid"/>
+          </a:ln>
+        </p:spPr>
+      </p:sp>
+      <p:pic>
+        <p:nvPicPr>
+          <p:cNvPr id="15" name="icon" descr="preencoded.png">    </p:cNvPr>
+          <p:cNvPicPr>
+            <a:picLocks noChangeAspect="1"/>
+          </p:cNvPicPr>
+          <p:nvPr/>
+        </p:nvPicPr>
+        <p:blipFill>
+          <a:blip r:embed="rId4"/>
+          <a:stretch>
+            <a:fillRect/>
+          </a:stretch>
+        </p:blipFill>
+        <p:spPr>
+          <a:xfrm>
+            <a:off x="4664778" y="2688336"/>
+            <a:ext cx="146304" cy="146304"/>
+          </a:xfrm>
+          <a:prstGeom prst="rect">
+            <a:avLst/>
+          </a:prstGeom>
+        </p:spPr>
+      </p:pic>
+      <p:sp>
+        <p:nvSpPr>
+          <p:cNvPr id="16" name="point-head"/>
           <p:cNvSpPr txBox="1"/>
           <p:nvPr/>
         </p:nvSpPr>
         <p:spPr>
           <a:xfrm>
-            <a:off x="4315076" y="1801368"/>
-            <a:ext cx="4280284" cy="548640"/>
+            <a:off x="4975674" y="2532888"/>
+            <a:ext cx="3500814" cy="457200"/>
           </a:xfrm>
           <a:prstGeom prst="rect">
             <a:avLst/>
@@ -6401,34 +6533,39 @@
           <a:ln/>
         </p:spPr>
         <p:txBody>
-          <a:bodyPr wrap="square" lIns="0" tIns="0" rIns="0" bIns="0" rtlCol="0" anchor="t"/>
+          <a:bodyPr wrap="square" lIns="0" tIns="0" rIns="0" bIns="0" rtlCol="0" anchor="ctr">
+            <a:normAutofit/>
+          </a:bodyPr>
           <a:lstStyle/>
           <a:p>
             <a:pPr indent="0" marL="0">
               <a:buNone/>
             </a:pPr>
             <a:r>
-              <a:rPr lang="en-US" sz="1250" dirty="0">
-                <a:solidFill>
-                  <a:schemeClr val="tx1"/>
-                </a:solidFill>
-              </a:rPr>
-              <a:t>お客様はスマホで入力する。指で押しやすい大きさにし、「必須」を赤で示す</a:t>
-            </a:r>
-            <a:endParaRPr lang="en-US" sz="1250" dirty="0"/>
-          </a:p>
-        </p:txBody>
-      </p:sp>
-      <p:sp>
-        <p:nvSpPr>
-          <p:cNvPr id="16" name="point-head"/>
+              <a:rPr lang="ja-JP" altLang="en-US" sz="1300" b="1" dirty="0">
+                <a:solidFill>
+                  <a:srgbClr val="DD6420"/>
+                </a:solidFill>
+                <a:latin typeface="Noto Sans JP" pitchFamily="34" charset="0"/>
+                <a:ea typeface="Noto Sans JP" pitchFamily="34" charset="-122"/>
+                <a:cs typeface="Noto Sans JP" pitchFamily="34" charset="-120"/>
+              </a:rPr>
+              <a:t>2 足りないときは、何が足りないかを伝える</a:t>
+            </a:r>
+            <a:endParaRPr lang="ja-JP" sz="1300" dirty="0"/>
+          </a:p>
+        </p:txBody>
+      </p:sp>
+      <p:sp>
+        <p:nvSpPr>
+          <p:cNvPr id="17" name="point-body"/>
           <p:cNvSpPr txBox="1"/>
           <p:nvPr/>
         </p:nvSpPr>
         <p:spPr>
           <a:xfrm>
-            <a:off x="4315076" y="2423160"/>
-            <a:ext cx="4280284" cy="365760"/>
+            <a:off x="4975674" y="3008376"/>
+            <a:ext cx="3500814" cy="429768"/>
           </a:xfrm>
           <a:prstGeom prst="rect">
             <a:avLst/>
@@ -6437,34 +6574,88 @@
           <a:ln/>
         </p:spPr>
         <p:txBody>
-          <a:bodyPr wrap="square" lIns="0" tIns="0" rIns="0" bIns="0" rtlCol="0" anchor="t"/>
+          <a:bodyPr wrap="square" lIns="0" tIns="0" rIns="0" bIns="0" rtlCol="0" anchor="t">
+            <a:normAutofit/>
+          </a:bodyPr>
           <a:lstStyle/>
           <a:p>
             <a:pPr indent="0" marL="0">
               <a:buNone/>
             </a:pPr>
             <a:r>
-              <a:rPr lang="en-US" sz="1500" b="1" dirty="0">
-                <a:solidFill>
-                  <a:schemeClr val="tx1"/>
-                </a:solidFill>
-              </a:rPr>
-              <a:t>2 足りないときは、何が足りないかを伝える</a:t>
-            </a:r>
-            <a:endParaRPr lang="en-US" sz="1500" dirty="0"/>
-          </a:p>
-        </p:txBody>
-      </p:sp>
-      <p:sp>
-        <p:nvSpPr>
-          <p:cNvPr id="17" name="point-body"/>
+              <a:rPr lang="ja-JP" altLang="en-US" sz="1150" dirty="0">
+                <a:solidFill>
+                  <a:srgbClr val="1A1A1A"/>
+                </a:solidFill>
+                <a:latin typeface="Noto Sans JP Medium" pitchFamily="34" charset="0"/>
+                <a:ea typeface="Noto Sans JP Medium" pitchFamily="34" charset="-122"/>
+                <a:cs typeface="Noto Sans JP Medium" pitchFamily="34" charset="-120"/>
+              </a:rPr>
+              <a:t>空のまま送ると、送信せずに不足している項目を表示する</a:t>
+            </a:r>
+            <a:endParaRPr lang="ja-JP" sz="1150" dirty="0"/>
+          </a:p>
+        </p:txBody>
+      </p:sp>
+      <p:sp>
+        <p:nvSpPr>
+          <p:cNvPr id="18" name="icon-circle"/>
+          <p:cNvSpPr/>
+          <p:nvPr/>
+        </p:nvSpPr>
+        <p:spPr>
+          <a:xfrm>
+            <a:off x="4591626" y="3575304"/>
+            <a:ext cx="292608" cy="292608"/>
+          </a:xfrm>
+          <a:prstGeom prst="ellipse">
+            <a:avLst/>
+          </a:prstGeom>
+          <a:solidFill>
+            <a:srgbClr val="DD6420"/>
+          </a:solidFill>
+          <a:ln w="19050">
+            <a:solidFill>
+              <a:srgbClr val="1A1A1A"/>
+            </a:solidFill>
+            <a:prstDash val="solid"/>
+          </a:ln>
+        </p:spPr>
+      </p:sp>
+      <p:pic>
+        <p:nvPicPr>
+          <p:cNvPr id="19" name="icon" descr="preencoded.png">    </p:cNvPr>
+          <p:cNvPicPr>
+            <a:picLocks noChangeAspect="1"/>
+          </p:cNvPicPr>
+          <p:nvPr/>
+        </p:nvPicPr>
+        <p:blipFill>
+          <a:blip r:embed="rId5"/>
+          <a:stretch>
+            <a:fillRect/>
+          </a:stretch>
+        </p:blipFill>
+        <p:spPr>
+          <a:xfrm>
+            <a:off x="4664778" y="3648456"/>
+            <a:ext cx="146304" cy="146304"/>
+          </a:xfrm>
+          <a:prstGeom prst="rect">
+            <a:avLst/>
+          </a:prstGeom>
+        </p:spPr>
+      </p:pic>
+      <p:sp>
+        <p:nvSpPr>
+          <p:cNvPr id="20" name="point-head"/>
           <p:cNvSpPr txBox="1"/>
           <p:nvPr/>
         </p:nvSpPr>
         <p:spPr>
           <a:xfrm>
-            <a:off x="4315076" y="2807208"/>
-            <a:ext cx="4280284" cy="548640"/>
+            <a:off x="4975674" y="3493008"/>
+            <a:ext cx="3500814" cy="457200"/>
           </a:xfrm>
           <a:prstGeom prst="rect">
             <a:avLst/>
@@ -6473,34 +6664,39 @@
           <a:ln/>
         </p:spPr>
         <p:txBody>
-          <a:bodyPr wrap="square" lIns="0" tIns="0" rIns="0" bIns="0" rtlCol="0" anchor="t"/>
+          <a:bodyPr wrap="square" lIns="0" tIns="0" rIns="0" bIns="0" rtlCol="0" anchor="ctr">
+            <a:normAutofit/>
+          </a:bodyPr>
           <a:lstStyle/>
           <a:p>
             <a:pPr indent="0" marL="0">
               <a:buNone/>
             </a:pPr>
             <a:r>
-              <a:rPr lang="en-US" sz="1250" dirty="0">
-                <a:solidFill>
-                  <a:schemeClr val="tx1"/>
-                </a:solidFill>
-              </a:rPr>
-              <a:t>空のまま送ると、送信せずに不足している項目を表示する</a:t>
-            </a:r>
-            <a:endParaRPr lang="en-US" sz="1250" dirty="0"/>
-          </a:p>
-        </p:txBody>
-      </p:sp>
-      <p:sp>
-        <p:nvSpPr>
-          <p:cNvPr id="18" name="point-head"/>
+              <a:rPr lang="ja-JP" altLang="en-US" sz="1300" b="1" dirty="0">
+                <a:solidFill>
+                  <a:srgbClr val="DD6420"/>
+                </a:solidFill>
+                <a:latin typeface="Noto Sans JP" pitchFamily="34" charset="0"/>
+                <a:ea typeface="Noto Sans JP" pitchFamily="34" charset="-122"/>
+                <a:cs typeface="Noto Sans JP" pitchFamily="34" charset="-120"/>
+              </a:rPr>
+              <a:t>この回の範囲</a:t>
+            </a:r>
+            <a:endParaRPr lang="ja-JP" sz="1300" dirty="0"/>
+          </a:p>
+        </p:txBody>
+      </p:sp>
+      <p:sp>
+        <p:nvSpPr>
+          <p:cNvPr id="21" name="point-body"/>
           <p:cNvSpPr txBox="1"/>
           <p:nvPr/>
         </p:nvSpPr>
         <p:spPr>
           <a:xfrm>
-            <a:off x="4315076" y="3429000"/>
-            <a:ext cx="4280284" cy="365760"/>
+            <a:off x="4975674" y="3968496"/>
+            <a:ext cx="3500814" cy="429768"/>
           </a:xfrm>
           <a:prstGeom prst="rect">
             <a:avLst/>
@@ -6509,57 +6705,26 @@
           <a:ln/>
         </p:spPr>
         <p:txBody>
-          <a:bodyPr wrap="square" lIns="0" tIns="0" rIns="0" bIns="0" rtlCol="0" anchor="t"/>
+          <a:bodyPr wrap="square" lIns="0" tIns="0" rIns="0" bIns="0" rtlCol="0" anchor="t">
+            <a:normAutofit/>
+          </a:bodyPr>
           <a:lstStyle/>
           <a:p>
             <a:pPr indent="0" marL="0">
               <a:buNone/>
             </a:pPr>
             <a:r>
-              <a:rPr lang="en-US" sz="1500" b="1" dirty="0">
-                <a:solidFill>
-                  <a:schemeClr val="tx1"/>
-                </a:solidFill>
-              </a:rPr>
-              <a:t>この回の範囲</a:t>
-            </a:r>
-            <a:endParaRPr lang="en-US" sz="1500" dirty="0"/>
-          </a:p>
-        </p:txBody>
-      </p:sp>
-      <p:sp>
-        <p:nvSpPr>
-          <p:cNvPr id="19" name="point-body"/>
-          <p:cNvSpPr txBox="1"/>
-          <p:nvPr/>
-        </p:nvSpPr>
-        <p:spPr>
-          <a:xfrm>
-            <a:off x="4315076" y="3813048"/>
-            <a:ext cx="4280284" cy="548640"/>
-          </a:xfrm>
-          <a:prstGeom prst="rect">
-            <a:avLst/>
-          </a:prstGeom>
-          <a:noFill/>
-          <a:ln/>
-        </p:spPr>
-        <p:txBody>
-          <a:bodyPr wrap="square" lIns="0" tIns="0" rIns="0" bIns="0" rtlCol="0" anchor="t"/>
-          <a:lstStyle/>
-          <a:p>
-            <a:pPr indent="0" marL="0">
-              <a:buNone/>
-            </a:pPr>
-            <a:r>
-              <a:rPr lang="en-US" sz="1250" dirty="0">
-                <a:solidFill>
-                  <a:schemeClr val="tx1"/>
-                </a:solidFill>
+              <a:rPr lang="ja-JP" altLang="en-US" sz="1150" dirty="0">
+                <a:solidFill>
+                  <a:srgbClr val="1A1A1A"/>
+                </a:solidFill>
+                <a:latin typeface="Noto Sans JP Medium" pitchFamily="34" charset="0"/>
+                <a:ea typeface="Noto Sans JP Medium" pitchFamily="34" charset="-122"/>
+                <a:cs typeface="Noto Sans JP Medium" pitchFamily="34" charset="-120"/>
               </a:rPr>
               <a:t>見た目だけ。送信してもまだどこにも保存されない（保存は第9回）</a:t>
             </a:r>
-            <a:endParaRPr lang="en-US" sz="1250" dirty="0"/>
+            <a:endParaRPr lang="ja-JP" sz="1150" dirty="0"/>
           </a:p>
         </p:txBody>
       </p:sp>
@@ -6575,8 +6740,8 @@
         </p:nvSpPr>
         <p:spPr>
           <a:xfrm>
-            <a:off x="8229600" y="4773168"/>
-            <a:ext cx="365760" cy="228600"/>
+            <a:off x="8366760" y="4754880"/>
+            <a:ext cx="365760" cy="274320"/>
           </a:xfrm>
           <a:prstGeom prst="rect">
             <a:avLst/>
@@ -6588,20 +6753,23 @@
           </a:extLst>
         </p:spPr>
         <p:txBody>
-          <a:bodyPr/>
+          <a:bodyPr anchor="ctr"/>
           <a:lstStyle>
             <a:lvl1pPr>
-              <a:defRPr sz="900">
-                <a:solidFill>
-                  <a:srgbClr val="5A6872"/>
-                </a:solidFill>
+              <a:defRPr sz="850">
+                <a:solidFill>
+                  <a:srgbClr val="FFFFFF"/>
+                </a:solidFill>
+                <a:latin typeface="Noto Sans JP"/>
+                <a:ea typeface="Noto Sans JP"/>
+                <a:cs typeface="Noto Sans JP"/>
               </a:defRPr>
             </a:lvl1pPr>
           </a:lstStyle>
           <a:p>
             <a:pPr algn="r"/>
             <a:fld id="{F7021451-1387-4CA6-816F-3879F97B5CBC}" type="slidenum">
-              <a:rPr b="0" lang="en-US"/>
+              <a:rPr b="1" lang="en-US"/>
               <a:t>7</a:t>
             </a:fld>
             <a:endParaRPr lang="en-US"/>
@@ -6636,15 +6804,58 @@
       <p:sp>
         <p:nvSpPr>
           <p:cNvPr id="2" name="Text 0"/>
-          <p:cNvSpPr/>
-          <p:nvPr>
-            <p:ph idx="100" type="title" hasCustomPrompt="1"/>
-          </p:nvPr>
-        </p:nvSpPr>
-        <p:spPr>
-          <a:xfrm>
-            <a:off x="548640" y="658368"/>
-            <a:ext cx="8046720" cy="566928"/>
+          <p:cNvSpPr txBox="1"/>
+          <p:nvPr/>
+        </p:nvSpPr>
+        <p:spPr>
+          <a:xfrm rot="-180000">
+            <a:off x="411480" y="201168"/>
+            <a:ext cx="894740" cy="352044"/>
+          </a:xfrm>
+          <a:prstGeom prst="rect">
+            <a:avLst/>
+          </a:prstGeom>
+          <a:solidFill>
+            <a:srgbClr val="1A1A1A"/>
+          </a:solidFill>
+          <a:ln>
+            <a:solidFill>
+              <a:srgbClr val="1A1A1A"/>
+            </a:solidFill>
+          </a:ln>
+        </p:spPr>
+        <p:txBody>
+          <a:bodyPr wrap="square" lIns="0" tIns="0" rIns="0" bIns="0" rtlCol="0" anchor="ctr"/>
+          <a:lstStyle/>
+          <a:p>
+            <a:pPr algn="ctr" indent="0" marL="0">
+              <a:buNone/>
+            </a:pPr>
+            <a:r>
+              <a:rPr lang="ja-JP" altLang="en-US" sz="1100" dirty="0">
+                <a:solidFill>
+                  <a:srgbClr val="FFFFFF"/>
+                </a:solidFill>
+                <a:latin typeface="Dela Gothic One" pitchFamily="34" charset="0"/>
+                <a:ea typeface="けいふぉんと" pitchFamily="34" charset="-122"/>
+                <a:cs typeface="Dela Gothic One" pitchFamily="34" charset="-120"/>
+              </a:rPr>
+              <a:t>まとめ</a:t>
+            </a:r>
+            <a:endParaRPr lang="ja-JP" sz="1100" dirty="0"/>
+          </a:p>
+        </p:txBody>
+      </p:sp>
+      <p:sp>
+        <p:nvSpPr>
+          <p:cNvPr id="3" name="Text 1"/>
+          <p:cNvSpPr txBox="1"/>
+          <p:nvPr/>
+        </p:nvSpPr>
+        <p:spPr>
+          <a:xfrm>
+            <a:off x="411480" y="502920"/>
+            <a:ext cx="8321040" cy="685800"/>
           </a:xfrm>
           <a:prstGeom prst="rect">
             <a:avLst/>
@@ -6653,105 +6864,79 @@
           <a:ln/>
         </p:spPr>
         <p:txBody>
-          <a:bodyPr wrap="square" lIns="0" tIns="0" rIns="0" bIns="0" rtlCol="0" anchor="ctr"/>
-          <a:lstStyle/>
-          <a:p>
-            <a:pPr algn="l" indent="0" marL="0">
-              <a:buNone/>
-            </a:pPr>
-            <a:r>
-              <a:rPr lang="en-US" sz="2400" b="1" dirty="0">
-                <a:solidFill>
-                  <a:schemeClr val="tx1"/>
-                </a:solidFill>
+          <a:bodyPr wrap="square" lIns="0" tIns="0" rIns="0" bIns="0" rtlCol="0" anchor="ctr">
+            <a:normAutofit/>
+          </a:bodyPr>
+          <a:lstStyle/>
+          <a:p>
+            <a:pPr indent="0" marL="0">
+              <a:buNone/>
+            </a:pPr>
+            <a:r>
+              <a:rPr lang="ja-JP" altLang="en-US" sz="2600" dirty="0">
+                <a:solidFill>
+                  <a:srgbClr val="1A1A1A"/>
+                </a:solidFill>
+                <a:latin typeface="Dela Gothic One" pitchFamily="34" charset="0"/>
+                <a:ea typeface="けいふぉんと" pitchFamily="34" charset="-122"/>
+                <a:cs typeface="Dela Gothic One" pitchFamily="34" charset="-120"/>
               </a:rPr>
               <a:t>宿題と、今日のチェック</a:t>
             </a:r>
-            <a:endParaRPr lang="en-US" sz="2400" dirty="0"/>
-          </a:p>
-        </p:txBody>
-      </p:sp>
-      <p:sp>
-        <p:nvSpPr>
-          <p:cNvPr id="3" name="chip"/>
+            <a:endParaRPr lang="ja-JP" sz="2600" dirty="0"/>
+          </a:p>
+        </p:txBody>
+      </p:sp>
+      <p:sp>
+        <p:nvSpPr>
+          <p:cNvPr id="4" name="card"/>
           <p:cNvSpPr/>
           <p:nvPr/>
         </p:nvSpPr>
         <p:spPr>
           <a:xfrm>
-            <a:off x="548640" y="292608"/>
-            <a:ext cx="795528" cy="292608"/>
+            <a:off x="502920" y="1417320"/>
+            <a:ext cx="3931920" cy="3108960"/>
           </a:xfrm>
           <a:prstGeom prst="roundRect">
             <a:avLst>
-              <a:gd name="adj" fmla="val 50000"/>
+              <a:gd name="adj" fmla="val 2941"/>
             </a:avLst>
           </a:prstGeom>
           <a:solidFill>
-            <a:schemeClr val="tx1"/>
-          </a:solidFill>
-          <a:ln w="12700">
+            <a:srgbClr val="FFFFFF"/>
+          </a:solidFill>
+          <a:ln w="25400">
             <a:solidFill>
-              <a:schemeClr val="tx1"/>
+              <a:srgbClr val="1A1A1A"/>
             </a:solidFill>
             <a:prstDash val="solid"/>
           </a:ln>
-        </p:spPr>
-      </p:sp>
-      <p:sp>
-        <p:nvSpPr>
-          <p:cNvPr id="4" name="chip-text"/>
-          <p:cNvSpPr txBox="1"/>
-          <p:nvPr/>
-        </p:nvSpPr>
-        <p:spPr>
-          <a:xfrm>
-            <a:off x="548640" y="292608"/>
-            <a:ext cx="795528" cy="292608"/>
-          </a:xfrm>
-          <a:prstGeom prst="rect">
-            <a:avLst/>
-          </a:prstGeom>
-          <a:noFill/>
-          <a:ln/>
-        </p:spPr>
-        <p:txBody>
-          <a:bodyPr wrap="square" lIns="0" tIns="0" rIns="0" bIns="0" rtlCol="0" anchor="ctr"/>
-          <a:lstStyle/>
-          <a:p>
-            <a:pPr algn="ctr" indent="0" marL="0">
-              <a:buNone/>
-            </a:pPr>
-            <a:r>
-              <a:rPr lang="en-US" sz="1100" b="1" dirty="0">
-                <a:solidFill>
-                  <a:schemeClr val="accent1"/>
-                </a:solidFill>
-              </a:rPr>
-              <a:t>まとめ</a:t>
-            </a:r>
-            <a:endParaRPr lang="en-US" sz="1100" dirty="0"/>
-          </a:p>
-        </p:txBody>
-      </p:sp>
-      <p:sp>
-        <p:nvSpPr>
-          <p:cNvPr id="5" name="card"/>
+          <a:effectLst>
+            <a:outerShdw sx="100000" sy="100000" kx="0" ky="0" algn="bl" rotWithShape="0" blurRad="101600" dist="50800" dir="2700000">
+              <a:srgbClr val="1A1A1A">
+                <a:alpha val="100000"/>
+              </a:srgbClr>
+            </a:outerShdw>
+          </a:effectLst>
+        </p:spPr>
+      </p:sp>
+      <p:sp>
+        <p:nvSpPr>
+          <p:cNvPr id="5" name="icon-circle"/>
           <p:cNvSpPr/>
           <p:nvPr/>
         </p:nvSpPr>
         <p:spPr>
           <a:xfrm>
-            <a:off x="548640" y="1463040"/>
-            <a:ext cx="3886200" cy="3017520"/>
-          </a:xfrm>
-          <a:prstGeom prst="roundRect">
-            <a:avLst>
-              <a:gd name="adj" fmla="val 3636"/>
-            </a:avLst>
-          </a:prstGeom>
-          <a:solidFill>
-            <a:schemeClr val="bg2"/>
+            <a:off x="704088" y="1600200"/>
+            <a:ext cx="457200" cy="457200"/>
+          </a:xfrm>
+          <a:prstGeom prst="ellipse">
+            <a:avLst/>
+          </a:prstGeom>
+          <a:solidFill>
+            <a:srgbClr val="DD6420"/>
           </a:solidFill>
           <a:ln w="19050">
             <a:solidFill>
@@ -6759,43 +6944,11 @@
             </a:solidFill>
             <a:prstDash val="solid"/>
           </a:ln>
-          <a:effectLst>
-            <a:outerShdw sx="100000" sy="100000" kx="0" ky="0" algn="bl" rotWithShape="0" blurRad="101600" dist="38100" dir="2700000">
-              <a:srgbClr val="000000">
-                <a:alpha val="18000"/>
-              </a:srgbClr>
-            </a:outerShdw>
-          </a:effectLst>
-        </p:spPr>
-      </p:sp>
-      <p:sp>
-        <p:nvSpPr>
-          <p:cNvPr id="6" name="icon-circle"/>
-          <p:cNvSpPr/>
-          <p:nvPr/>
-        </p:nvSpPr>
-        <p:spPr>
-          <a:xfrm>
-            <a:off x="777240" y="1645920"/>
-            <a:ext cx="457200" cy="457200"/>
-          </a:xfrm>
-          <a:prstGeom prst="ellipse">
-            <a:avLst/>
-          </a:prstGeom>
-          <a:solidFill>
-            <a:schemeClr val="accent1"/>
-          </a:solidFill>
-          <a:ln w="15875">
-            <a:solidFill>
-              <a:srgbClr val="1A1A1A"/>
-            </a:solidFill>
-            <a:prstDash val="solid"/>
-          </a:ln>
         </p:spPr>
       </p:sp>
       <p:pic>
         <p:nvPicPr>
-          <p:cNvPr id="7" name="icon" descr="preencoded.png">    </p:cNvPr>
+          <p:cNvPr id="6" name="icon" descr="preencoded.png">    </p:cNvPr>
           <p:cNvPicPr>
             <a:picLocks noChangeAspect="1"/>
           </p:cNvPicPr>
@@ -6809,14 +6962,53 @@
         </p:blipFill>
         <p:spPr>
           <a:xfrm>
-            <a:off x="896112" y="1764792"/>
-            <a:ext cx="219456" cy="219456"/>
+            <a:off x="818388" y="1714500"/>
+            <a:ext cx="228600" cy="228600"/>
           </a:xfrm>
           <a:prstGeom prst="rect">
             <a:avLst/>
           </a:prstGeom>
         </p:spPr>
       </p:pic>
+      <p:sp>
+        <p:nvSpPr>
+          <p:cNvPr id="7" name="Text 4"/>
+          <p:cNvSpPr txBox="1"/>
+          <p:nvPr/>
+        </p:nvSpPr>
+        <p:spPr>
+          <a:xfrm>
+            <a:off x="1280160" y="1600200"/>
+            <a:ext cx="2743200" cy="457200"/>
+          </a:xfrm>
+          <a:prstGeom prst="rect">
+            <a:avLst/>
+          </a:prstGeom>
+          <a:noFill/>
+          <a:ln/>
+        </p:spPr>
+        <p:txBody>
+          <a:bodyPr wrap="square" lIns="0" tIns="0" rIns="0" bIns="0" rtlCol="0" anchor="ctr"/>
+          <a:lstStyle/>
+          <a:p>
+            <a:pPr indent="0" marL="0">
+              <a:buNone/>
+            </a:pPr>
+            <a:r>
+              <a:rPr lang="ja-JP" altLang="en-US" sz="1800" dirty="0">
+                <a:solidFill>
+                  <a:srgbClr val="1A1A1A"/>
+                </a:solidFill>
+                <a:latin typeface="Dela Gothic One" pitchFamily="34" charset="0"/>
+                <a:ea typeface="けいふぉんと" pitchFamily="34" charset="-122"/>
+                <a:cs typeface="Dela Gothic One" pitchFamily="34" charset="-120"/>
+              </a:rPr>
+              <a:t>宿題</a:t>
+            </a:r>
+            <a:endParaRPr lang="ja-JP" sz="1800" dirty="0"/>
+          </a:p>
+        </p:txBody>
+      </p:sp>
       <p:sp>
         <p:nvSpPr>
           <p:cNvPr id="8" name="Text 5"/>
@@ -6825,8 +7017,8 @@
         </p:nvSpPr>
         <p:spPr>
           <a:xfrm>
-            <a:off x="1371600" y="1645920"/>
-            <a:ext cx="2743200" cy="457200"/>
+            <a:off x="731520" y="2240280"/>
+            <a:ext cx="3474720" cy="2148840"/>
           </a:xfrm>
           <a:prstGeom prst="rect">
             <a:avLst/>
@@ -6835,43 +7027,9 @@
           <a:ln/>
         </p:spPr>
         <p:txBody>
-          <a:bodyPr wrap="square" lIns="0" tIns="0" rIns="0" bIns="0" rtlCol="0" anchor="ctr"/>
-          <a:lstStyle/>
-          <a:p>
-            <a:pPr indent="0" marL="0">
-              <a:buNone/>
-            </a:pPr>
-            <a:r>
-              <a:rPr lang="en-US" sz="1700" b="1" dirty="0">
-                <a:solidFill>
-                  <a:schemeClr val="tx1"/>
-                </a:solidFill>
-              </a:rPr>
-              <a:t>宿題</a:t>
-            </a:r>
-            <a:endParaRPr lang="en-US" sz="1700" dirty="0"/>
-          </a:p>
-        </p:txBody>
-      </p:sp>
-      <p:sp>
-        <p:nvSpPr>
-          <p:cNvPr id="9" name="Text 6"/>
-          <p:cNvSpPr txBox="1"/>
-          <p:nvPr/>
-        </p:nvSpPr>
-        <p:spPr>
-          <a:xfrm>
-            <a:off x="777240" y="2286000"/>
-            <a:ext cx="3474720" cy="2057400"/>
-          </a:xfrm>
-          <a:prstGeom prst="rect">
-            <a:avLst/>
-          </a:prstGeom>
-          <a:noFill/>
-          <a:ln/>
-        </p:spPr>
-        <p:txBody>
-          <a:bodyPr wrap="square" lIns="0" tIns="0" rIns="0" bIns="0" rtlCol="0" anchor="t"/>
+          <a:bodyPr wrap="square" lIns="0" tIns="0" rIns="0" bIns="0" rtlCol="0" anchor="t">
+            <a:normAutofit/>
+          </a:bodyPr>
           <a:lstStyle/>
           <a:p>
             <a:pPr marL="342900" indent="-342900">
@@ -6879,38 +7037,73 @@
                 <a:spcPts val="800"/>
               </a:spcAft>
               <a:buSzPct val="100000"/>
-              <a:buChar char="•"/>
-            </a:pPr>
-            <a:r>
-              <a:rPr lang="en-US" sz="1350" dirty="0">
-                <a:solidFill>
-                  <a:schemeClr val="tx1"/>
-                </a:solidFill>
+              <a:buChar char="●"/>
+            </a:pPr>
+            <a:r>
+              <a:rPr lang="ja-JP" altLang="en-US" sz="1350" b="1" dirty="0">
+                <a:solidFill>
+                  <a:srgbClr val="1A1A1A"/>
+                </a:solidFill>
+                <a:latin typeface="Noto Sans JP" pitchFamily="34" charset="0"/>
+                <a:ea typeface="Noto Sans JP" pitchFamily="34" charset="-122"/>
+                <a:cs typeface="Noto Sans JP" pitchFamily="34" charset="-120"/>
               </a:rPr>
               <a:t>公開URLを社内で見てもらい、直したい点を3つ集める（BASEの「改善要望」テーブルへ）</a:t>
             </a:r>
-            <a:endParaRPr lang="en-US" sz="1350" dirty="0"/>
-          </a:p>
-        </p:txBody>
-      </p:sp>
-      <p:sp>
-        <p:nvSpPr>
-          <p:cNvPr id="10" name="card"/>
+            <a:endParaRPr lang="ja-JP" sz="1350" dirty="0"/>
+          </a:p>
+        </p:txBody>
+      </p:sp>
+      <p:sp>
+        <p:nvSpPr>
+          <p:cNvPr id="9" name="card"/>
           <p:cNvSpPr/>
           <p:nvPr/>
         </p:nvSpPr>
         <p:spPr>
           <a:xfrm>
-            <a:off x="4709160" y="1463040"/>
-            <a:ext cx="3886200" cy="3017520"/>
+            <a:off x="4709160" y="1417320"/>
+            <a:ext cx="3931920" cy="3108960"/>
           </a:xfrm>
           <a:prstGeom prst="roundRect">
             <a:avLst>
-              <a:gd name="adj" fmla="val 3636"/>
+              <a:gd name="adj" fmla="val 2941"/>
             </a:avLst>
           </a:prstGeom>
           <a:solidFill>
-            <a:schemeClr val="bg1"/>
+            <a:srgbClr val="FFFFFF"/>
+          </a:solidFill>
+          <a:ln w="25400">
+            <a:solidFill>
+              <a:srgbClr val="1A1A1A"/>
+            </a:solidFill>
+            <a:prstDash val="solid"/>
+          </a:ln>
+          <a:effectLst>
+            <a:outerShdw sx="100000" sy="100000" kx="0" ky="0" algn="bl" rotWithShape="0" blurRad="101600" dist="50800" dir="2700000">
+              <a:srgbClr val="1A1A1A">
+                <a:alpha val="100000"/>
+              </a:srgbClr>
+            </a:outerShdw>
+          </a:effectLst>
+        </p:spPr>
+      </p:sp>
+      <p:sp>
+        <p:nvSpPr>
+          <p:cNvPr id="10" name="icon-circle"/>
+          <p:cNvSpPr/>
+          <p:nvPr/>
+        </p:nvSpPr>
+        <p:spPr>
+          <a:xfrm>
+            <a:off x="4910328" y="1600200"/>
+            <a:ext cx="457200" cy="457200"/>
+          </a:xfrm>
+          <a:prstGeom prst="ellipse">
+            <a:avLst/>
+          </a:prstGeom>
+          <a:solidFill>
+            <a:srgbClr val="DD6420"/>
           </a:solidFill>
           <a:ln w="19050">
             <a:solidFill>
@@ -6918,43 +7111,11 @@
             </a:solidFill>
             <a:prstDash val="solid"/>
           </a:ln>
-          <a:effectLst>
-            <a:outerShdw sx="100000" sy="100000" kx="0" ky="0" algn="bl" rotWithShape="0" blurRad="101600" dist="38100" dir="2700000">
-              <a:srgbClr val="000000">
-                <a:alpha val="18000"/>
-              </a:srgbClr>
-            </a:outerShdw>
-          </a:effectLst>
-        </p:spPr>
-      </p:sp>
-      <p:sp>
-        <p:nvSpPr>
-          <p:cNvPr id="11" name="icon-circle"/>
-          <p:cNvSpPr/>
-          <p:nvPr/>
-        </p:nvSpPr>
-        <p:spPr>
-          <a:xfrm>
-            <a:off x="4937760" y="1645920"/>
-            <a:ext cx="457200" cy="457200"/>
-          </a:xfrm>
-          <a:prstGeom prst="ellipse">
-            <a:avLst/>
-          </a:prstGeom>
-          <a:solidFill>
-            <a:schemeClr val="accent1"/>
-          </a:solidFill>
-          <a:ln w="15875">
-            <a:solidFill>
-              <a:srgbClr val="1A1A1A"/>
-            </a:solidFill>
-            <a:prstDash val="solid"/>
-          </a:ln>
         </p:spPr>
       </p:sp>
       <p:pic>
         <p:nvPicPr>
-          <p:cNvPr id="12" name="icon" descr="preencoded.png">    </p:cNvPr>
+          <p:cNvPr id="11" name="icon" descr="preencoded.png">    </p:cNvPr>
           <p:cNvPicPr>
             <a:picLocks noChangeAspect="1"/>
           </p:cNvPicPr>
@@ -6968,14 +7129,53 @@
         </p:blipFill>
         <p:spPr>
           <a:xfrm>
-            <a:off x="5056632" y="1764792"/>
-            <a:ext cx="219456" cy="219456"/>
+            <a:off x="5024628" y="1714500"/>
+            <a:ext cx="228600" cy="228600"/>
           </a:xfrm>
           <a:prstGeom prst="rect">
             <a:avLst/>
           </a:prstGeom>
         </p:spPr>
       </p:pic>
+      <p:sp>
+        <p:nvSpPr>
+          <p:cNvPr id="12" name="Text 8"/>
+          <p:cNvSpPr txBox="1"/>
+          <p:nvPr/>
+        </p:nvSpPr>
+        <p:spPr>
+          <a:xfrm>
+            <a:off x="5486400" y="1600200"/>
+            <a:ext cx="2743200" cy="457200"/>
+          </a:xfrm>
+          <a:prstGeom prst="rect">
+            <a:avLst/>
+          </a:prstGeom>
+          <a:noFill/>
+          <a:ln/>
+        </p:spPr>
+        <p:txBody>
+          <a:bodyPr wrap="square" lIns="0" tIns="0" rIns="0" bIns="0" rtlCol="0" anchor="ctr"/>
+          <a:lstStyle/>
+          <a:p>
+            <a:pPr indent="0" marL="0">
+              <a:buNone/>
+            </a:pPr>
+            <a:r>
+              <a:rPr lang="ja-JP" altLang="en-US" sz="1800" dirty="0">
+                <a:solidFill>
+                  <a:srgbClr val="1A1A1A"/>
+                </a:solidFill>
+                <a:latin typeface="Dela Gothic One" pitchFamily="34" charset="0"/>
+                <a:ea typeface="けいふぉんと" pitchFamily="34" charset="-122"/>
+                <a:cs typeface="Dela Gothic One" pitchFamily="34" charset="-120"/>
+              </a:rPr>
+              <a:t>できたらチェック</a:t>
+            </a:r>
+            <a:endParaRPr lang="ja-JP" sz="1800" dirty="0"/>
+          </a:p>
+        </p:txBody>
+      </p:sp>
       <p:sp>
         <p:nvSpPr>
           <p:cNvPr id="13" name="Text 9"/>
@@ -6984,8 +7184,8 @@
         </p:nvSpPr>
         <p:spPr>
           <a:xfrm>
-            <a:off x="5532120" y="1645920"/>
-            <a:ext cx="2743200" cy="457200"/>
+            <a:off x="4937760" y="2240280"/>
+            <a:ext cx="3474720" cy="2148840"/>
           </a:xfrm>
           <a:prstGeom prst="rect">
             <a:avLst/>
@@ -6994,43 +7194,9 @@
           <a:ln/>
         </p:spPr>
         <p:txBody>
-          <a:bodyPr wrap="square" lIns="0" tIns="0" rIns="0" bIns="0" rtlCol="0" anchor="ctr"/>
-          <a:lstStyle/>
-          <a:p>
-            <a:pPr indent="0" marL="0">
-              <a:buNone/>
-            </a:pPr>
-            <a:r>
-              <a:rPr lang="en-US" sz="1700" b="1" dirty="0">
-                <a:solidFill>
-                  <a:schemeClr val="tx1"/>
-                </a:solidFill>
-              </a:rPr>
-              <a:t>できたらチェック</a:t>
-            </a:r>
-            <a:endParaRPr lang="en-US" sz="1700" dirty="0"/>
-          </a:p>
-        </p:txBody>
-      </p:sp>
-      <p:sp>
-        <p:nvSpPr>
-          <p:cNvPr id="14" name="Text 10"/>
-          <p:cNvSpPr txBox="1"/>
-          <p:nvPr/>
-        </p:nvSpPr>
-        <p:spPr>
-          <a:xfrm>
-            <a:off x="4937760" y="2286000"/>
-            <a:ext cx="3474720" cy="2057400"/>
-          </a:xfrm>
-          <a:prstGeom prst="rect">
-            <a:avLst/>
-          </a:prstGeom>
-          <a:noFill/>
-          <a:ln/>
-        </p:spPr>
-        <p:txBody>
-          <a:bodyPr wrap="square" lIns="0" tIns="0" rIns="0" bIns="0" rtlCol="0" anchor="t"/>
+          <a:bodyPr wrap="square" lIns="0" tIns="0" rIns="0" bIns="0" rtlCol="0" anchor="t">
+            <a:normAutofit/>
+          </a:bodyPr>
           <a:lstStyle/>
           <a:p>
             <a:pPr indent="0" marL="0">
@@ -7040,14 +7206,17 @@
               <a:buNone/>
             </a:pPr>
             <a:r>
-              <a:rPr lang="en-US" sz="1350" dirty="0">
-                <a:solidFill>
-                  <a:schemeClr val="tx1"/>
-                </a:solidFill>
+              <a:rPr lang="ja-JP" altLang="en-US" sz="1350" b="1" dirty="0">
+                <a:solidFill>
+                  <a:srgbClr val="1A1A1A"/>
+                </a:solidFill>
+                <a:latin typeface="Noto Sans JP" pitchFamily="34" charset="0"/>
+                <a:ea typeface="Noto Sans JP" pitchFamily="34" charset="-122"/>
+                <a:cs typeface="Noto Sans JP" pitchFamily="34" charset="-120"/>
               </a:rPr>
               <a:t>☐ 公開URLをスマホで開けた</a:t>
             </a:r>
-            <a:endParaRPr lang="en-US" sz="1350" dirty="0"/>
+            <a:endParaRPr lang="ja-JP" sz="1350" dirty="0"/>
           </a:p>
           <a:p>
             <a:pPr indent="0" marL="0">
@@ -7057,14 +7226,17 @@
               <a:buNone/>
             </a:pPr>
             <a:r>
-              <a:rPr lang="en-US" sz="1350" dirty="0">
-                <a:solidFill>
-                  <a:schemeClr val="tx1"/>
-                </a:solidFill>
+              <a:rPr lang="ja-JP" altLang="en-US" sz="1350" b="1" dirty="0">
+                <a:solidFill>
+                  <a:srgbClr val="1A1A1A"/>
+                </a:solidFill>
+                <a:latin typeface="Noto Sans JP" pitchFamily="34" charset="0"/>
+                <a:ea typeface="Noto Sans JP" pitchFamily="34" charset="-122"/>
+                <a:cs typeface="Noto Sans JP" pitchFamily="34" charset="-120"/>
               </a:rPr>
               <a:t>☐ 修正が自動で公開ページに反映された</a:t>
             </a:r>
-            <a:endParaRPr lang="en-US" sz="1350" dirty="0"/>
+            <a:endParaRPr lang="ja-JP" sz="1350" dirty="0"/>
           </a:p>
         </p:txBody>
       </p:sp>
@@ -7080,8 +7252,8 @@
         </p:nvSpPr>
         <p:spPr>
           <a:xfrm>
-            <a:off x="8229600" y="4773168"/>
-            <a:ext cx="365760" cy="228600"/>
+            <a:off x="8366760" y="4754880"/>
+            <a:ext cx="365760" cy="274320"/>
           </a:xfrm>
           <a:prstGeom prst="rect">
             <a:avLst/>
@@ -7093,20 +7265,23 @@
           </a:extLst>
         </p:spPr>
         <p:txBody>
-          <a:bodyPr/>
+          <a:bodyPr anchor="ctr"/>
           <a:lstStyle>
             <a:lvl1pPr>
-              <a:defRPr sz="900">
-                <a:solidFill>
-                  <a:srgbClr val="5A6872"/>
-                </a:solidFill>
+              <a:defRPr sz="850">
+                <a:solidFill>
+                  <a:srgbClr val="FFFFFF"/>
+                </a:solidFill>
+                <a:latin typeface="Noto Sans JP"/>
+                <a:ea typeface="Noto Sans JP"/>
+                <a:cs typeface="Noto Sans JP"/>
               </a:defRPr>
             </a:lvl1pPr>
           </a:lstStyle>
           <a:p>
             <a:pPr algn="r"/>
             <a:fld id="{F7021451-1387-4CA6-816F-3879F97B5CBC}" type="slidenum">
-              <a:rPr b="0" lang="en-US"/>
+              <a:rPr b="1" lang="en-US"/>
               <a:t>8</a:t>
             </a:fld>
             <a:endParaRPr lang="en-US"/>
@@ -7138,18 +7313,92 @@
           <a:chExt cx="0" cy="0"/>
         </a:xfrm>
       </p:grpSpPr>
-      <p:sp>
-        <p:nvSpPr>
-          <p:cNvPr id="2" name="Text 0"/>
-          <p:cNvSpPr/>
-          <p:nvPr>
-            <p:ph idx="100" type="title" hasCustomPrompt="1"/>
-          </p:nvPr>
-        </p:nvSpPr>
-        <p:spPr>
-          <a:xfrm>
-            <a:off x="548640" y="1463040"/>
-            <a:ext cx="8046720" cy="1005840"/>
+      <p:pic>
+        <p:nvPicPr>
+          <p:cNvPr id="2" name="portrait" descr="講師 笹原彰朗">    </p:cNvPr>
+          <p:cNvPicPr>
+            <a:picLocks noChangeAspect="1"/>
+          </p:cNvPicPr>
+          <p:nvPr/>
+        </p:nvPicPr>
+        <p:blipFill>
+          <a:blip r:embed="rId1"/>
+          <a:stretch>
+            <a:fillRect/>
+          </a:stretch>
+        </p:blipFill>
+        <p:spPr>
+          <a:xfrm>
+            <a:off x="6003588" y="1211580"/>
+            <a:ext cx="2866092" cy="3931920"/>
+          </a:xfrm>
+          <a:prstGeom prst="rect">
+            <a:avLst/>
+          </a:prstGeom>
+        </p:spPr>
+      </p:pic>
+      <p:sp>
+        <p:nvSpPr>
+          <p:cNvPr id="3" name="Text 0"/>
+          <p:cNvSpPr txBox="1"/>
+          <p:nvPr/>
+        </p:nvSpPr>
+        <p:spPr>
+          <a:xfrm rot="-240000">
+            <a:off x="457200" y="548640"/>
+            <a:ext cx="1280160" cy="548640"/>
+          </a:xfrm>
+          <a:prstGeom prst="rect">
+            <a:avLst/>
+          </a:prstGeom>
+          <a:solidFill>
+            <a:srgbClr val="1A1A1A"/>
+          </a:solidFill>
+          <a:ln>
+            <a:solidFill>
+              <a:srgbClr val="1A1A1A"/>
+            </a:solidFill>
+          </a:ln>
+          <a:effectLst>
+            <a:outerShdw sx="100000" sy="100000" kx="0" ky="0" algn="bl" rotWithShape="0" blurRad="101600" dist="38100" dir="2700000">
+              <a:srgbClr val="1A1A1A">
+                <a:alpha val="100000"/>
+              </a:srgbClr>
+            </a:outerShdw>
+          </a:effectLst>
+        </p:spPr>
+        <p:txBody>
+          <a:bodyPr wrap="square" lIns="0" tIns="0" rIns="0" bIns="0" rtlCol="0" anchor="ctr"/>
+          <a:lstStyle/>
+          <a:p>
+            <a:pPr algn="ctr" indent="0" marL="0">
+              <a:buNone/>
+            </a:pPr>
+            <a:r>
+              <a:rPr lang="ja-JP" altLang="en-US" sz="2000" dirty="0">
+                <a:solidFill>
+                  <a:srgbClr val="FFD600"/>
+                </a:solidFill>
+                <a:latin typeface="Dela Gothic One" pitchFamily="34" charset="0"/>
+                <a:ea typeface="けいふぉんと" pitchFamily="34" charset="-122"/>
+                <a:cs typeface="Dela Gothic One" pitchFamily="34" charset="-120"/>
+              </a:rPr>
+              <a:t>次回</a:t>
+            </a:r>
+            <a:endParaRPr lang="ja-JP" sz="2000" dirty="0"/>
+          </a:p>
+        </p:txBody>
+      </p:sp>
+      <p:sp>
+        <p:nvSpPr>
+          <p:cNvPr id="4" name="Text 1"/>
+          <p:cNvSpPr txBox="1"/>
+          <p:nvPr/>
+        </p:nvSpPr>
+        <p:spPr>
+          <a:xfrm>
+            <a:off x="457200" y="1280160"/>
+            <a:ext cx="5852160" cy="1554480"/>
           </a:xfrm>
           <a:prstGeom prst="rect">
             <a:avLst/>
@@ -7158,36 +7407,90 @@
           <a:ln/>
         </p:spPr>
         <p:txBody>
-          <a:bodyPr wrap="square" lIns="0" tIns="0" rIns="0" bIns="0" rtlCol="0" anchor="t"/>
-          <a:lstStyle/>
-          <a:p>
-            <a:pPr algn="l" indent="0" marL="0">
-              <a:buNone/>
-            </a:pPr>
-            <a:r>
-              <a:rPr lang="en-US" sz="3000" b="1" dirty="0">
-                <a:solidFill>
-                  <a:schemeClr val="accent1"/>
-                </a:solidFill>
-              </a:rPr>
-              <a:t>次回：第9回 Lark BASEとつなぐ（API）</a:t>
-            </a:r>
-            <a:endParaRPr lang="en-US" sz="3000" dirty="0"/>
-          </a:p>
-        </p:txBody>
-      </p:sp>
-      <p:sp>
-        <p:nvSpPr>
-          <p:cNvPr id="3" name="Text 0"/>
+          <a:bodyPr wrap="square" lIns="0" tIns="0" rIns="0" bIns="0" rtlCol="0" anchor="ctr">
+            <a:normAutofit/>
+          </a:bodyPr>
+          <a:lstStyle/>
+          <a:p>
+            <a:pPr indent="0" marL="0">
+              <a:buNone/>
+            </a:pPr>
+            <a:r>
+              <a:rPr lang="ja-JP" altLang="en-US" sz="3100" dirty="0">
+                <a:solidFill>
+                  <a:srgbClr val="1A1A1A"/>
+                </a:solidFill>
+                <a:latin typeface="Dela Gothic One" pitchFamily="34" charset="0"/>
+                <a:ea typeface="けいふぉんと" pitchFamily="34" charset="-122"/>
+                <a:cs typeface="Dela Gothic One" pitchFamily="34" charset="-120"/>
+              </a:rPr>
+              <a:t>第9回</a:t>
+            </a:r>
+            <a:endParaRPr lang="ja-JP" sz="3100" dirty="0"/>
+          </a:p>
+          <a:p>
+            <a:pPr indent="0" marL="0">
+              <a:buNone/>
+            </a:pPr>
+            <a:r>
+              <a:rPr lang="ja-JP" altLang="en-US" sz="3100" dirty="0">
+                <a:solidFill>
+                  <a:srgbClr val="1A1A1A"/>
+                </a:solidFill>
+                <a:latin typeface="Dela Gothic One" pitchFamily="34" charset="0"/>
+                <a:ea typeface="けいふぉんと" pitchFamily="34" charset="-122"/>
+                <a:cs typeface="Dela Gothic One" pitchFamily="34" charset="-120"/>
+              </a:rPr>
+              <a:t>Lark BASEとつなぐ（API）</a:t>
+            </a:r>
+            <a:endParaRPr lang="ja-JP" sz="3100" dirty="0"/>
+          </a:p>
+        </p:txBody>
+      </p:sp>
+      <p:sp>
+        <p:nvSpPr>
+          <p:cNvPr id="5" name="card"/>
           <p:cNvSpPr/>
-          <p:nvPr>
-            <p:ph idx="101" type="body" hasCustomPrompt="1"/>
-          </p:nvPr>
-        </p:nvSpPr>
-        <p:spPr>
-          <a:xfrm>
-            <a:off x="548640" y="2606040"/>
-            <a:ext cx="8046720" cy="1097280"/>
+          <p:nvPr/>
+        </p:nvSpPr>
+        <p:spPr>
+          <a:xfrm>
+            <a:off x="457200" y="3108960"/>
+            <a:ext cx="5394960" cy="1325880"/>
+          </a:xfrm>
+          <a:prstGeom prst="roundRect">
+            <a:avLst>
+              <a:gd name="adj" fmla="val 6897"/>
+            </a:avLst>
+          </a:prstGeom>
+          <a:solidFill>
+            <a:srgbClr val="FFFFFF"/>
+          </a:solidFill>
+          <a:ln w="25400">
+            <a:solidFill>
+              <a:srgbClr val="1A1A1A"/>
+            </a:solidFill>
+            <a:prstDash val="solid"/>
+          </a:ln>
+          <a:effectLst>
+            <a:outerShdw sx="100000" sy="100000" kx="0" ky="0" algn="bl" rotWithShape="0" blurRad="101600" dist="50800" dir="2700000">
+              <a:srgbClr val="1A1A1A">
+                <a:alpha val="100000"/>
+              </a:srgbClr>
+            </a:outerShdw>
+          </a:effectLst>
+        </p:spPr>
+      </p:sp>
+      <p:sp>
+        <p:nvSpPr>
+          <p:cNvPr id="6" name="Text 3"/>
+          <p:cNvSpPr txBox="1"/>
+          <p:nvPr/>
+        </p:nvSpPr>
+        <p:spPr>
+          <a:xfrm>
+            <a:off x="685800" y="3200400"/>
+            <a:ext cx="4937760" cy="1143000"/>
           </a:xfrm>
           <a:prstGeom prst="rect">
             <a:avLst/>
@@ -7196,35 +7499,49 @@
           <a:ln/>
         </p:spPr>
         <p:txBody>
-          <a:bodyPr wrap="square" lIns="0" tIns="0" rIns="0" bIns="0" rtlCol="0" anchor="t"/>
+          <a:bodyPr wrap="square" lIns="0" tIns="0" rIns="0" bIns="0" rtlCol="0" anchor="ctr">
+            <a:normAutofit/>
+          </a:bodyPr>
           <a:lstStyle/>
           <a:p>
             <a:pPr indent="0" marL="0">
-              <a:buNone/>
-            </a:pPr>
-            <a:r>
-              <a:rPr lang="en-US" sz="1500" dirty="0">
-                <a:solidFill>
-                  <a:schemeClr val="bg1"/>
-                </a:solidFill>
+              <a:spcAft>
+                <a:spcPts val="400"/>
+              </a:spcAft>
+              <a:buNone/>
+            </a:pPr>
+            <a:r>
+              <a:rPr lang="ja-JP" altLang="en-US" sz="1400" b="1" dirty="0">
+                <a:solidFill>
+                  <a:srgbClr val="1A1A1A"/>
+                </a:solidFill>
+                <a:latin typeface="Noto Sans JP" pitchFamily="34" charset="0"/>
+                <a:ea typeface="Noto Sans JP" pitchFamily="34" charset="-122"/>
+                <a:cs typeface="Noto Sans JP" pitchFamily="34" charset="-120"/>
               </a:rPr>
               <a:t>わからないところは、講座グループでいつでも質問してください。</a:t>
             </a:r>
-            <a:endParaRPr lang="en-US" sz="1500" dirty="0"/>
+            <a:endParaRPr lang="ja-JP" sz="1400" dirty="0"/>
           </a:p>
           <a:p>
             <a:pPr indent="0" marL="0">
-              <a:buNone/>
-            </a:pPr>
-            <a:r>
-              <a:rPr lang="en-US" sz="1500" dirty="0">
-                <a:solidFill>
-                  <a:schemeClr val="bg1"/>
-                </a:solidFill>
+              <a:spcAft>
+                <a:spcPts val="400"/>
+              </a:spcAft>
+              <a:buNone/>
+            </a:pPr>
+            <a:r>
+              <a:rPr lang="ja-JP" altLang="en-US" sz="1400" b="1" dirty="0">
+                <a:solidFill>
+                  <a:srgbClr val="1A1A1A"/>
+                </a:solidFill>
+                <a:latin typeface="Noto Sans JP" pitchFamily="34" charset="0"/>
+                <a:ea typeface="Noto Sans JP" pitchFamily="34" charset="-122"/>
+                <a:cs typeface="Noto Sans JP" pitchFamily="34" charset="-120"/>
               </a:rPr>
               <a:t>APIキーやパスワードは送らないでください。</a:t>
             </a:r>
-            <a:endParaRPr lang="en-US" sz="1500" dirty="0"/>
+            <a:endParaRPr lang="ja-JP" sz="1400" dirty="0"/>
           </a:p>
         </p:txBody>
       </p:sp>
@@ -7237,9 +7554,9 @@
 </file>
 
 <file path=ppt/theme/theme1.xml><?xml version="1.0" encoding="utf-8"?>
-<a:theme xmlns:a="http://schemas.openxmlformats.org/drawingml/2006/main" name="Manaberu">
+<a:theme xmlns:a="http://schemas.openxmlformats.org/drawingml/2006/main" name="SasaYell">
   <a:themeElements>
-    <a:clrScheme name="Manaberu">
+    <a:clrScheme name="SasaYell">
       <a:dk1>
         <a:srgbClr val="1A1A1A"/>
       </a:dk1>
@@ -7247,10 +7564,10 @@
         <a:srgbClr val="FFFFFF"/>
       </a:lt1>
       <a:dk2>
-        <a:srgbClr val="5A6872"/>
+        <a:srgbClr val="1A1A1A"/>
       </a:dk2>
       <a:lt2>
-        <a:srgbClr val="FFF6CC"/>
+        <a:srgbClr val="FFD600"/>
       </a:lt2>
       <a:accent1>
         <a:srgbClr val="FFD600"/>
@@ -7259,128 +7576,34 @@
         <a:srgbClr val="DD6420"/>
       </a:accent2>
       <a:accent3>
-        <a:srgbClr val="3370FF"/>
+        <a:srgbClr val="F5A623"/>
       </a:accent3>
       <a:accent4>
-        <a:srgbClr val="06C755"/>
+        <a:srgbClr val="1A1A1A"/>
       </a:accent4>
       <a:accent5>
-        <a:srgbClr val="E53935"/>
+        <a:srgbClr val="FFFFFF"/>
       </a:accent5>
       <a:accent6>
-        <a:srgbClr val="F5A623"/>
+        <a:srgbClr val="DD6420"/>
       </a:accent6>
       <a:hlink>
-        <a:srgbClr val="3370FF"/>
+        <a:srgbClr val="DD6420"/>
       </a:hlink>
       <a:folHlink>
-        <a:srgbClr val="6B4FBB"/>
+        <a:srgbClr val="F5A623"/>
       </a:folHlink>
     </a:clrScheme>
-    <a:fontScheme name="Manaberu">
+    <a:fontScheme name="SasaYell">
       <a:majorFont>
-        <a:latin typeface="Yu Gothic"/>
-        <a:ea typeface=""/>
+        <a:latin typeface="Dela Gothic One"/>
+        <a:ea typeface="けいふぉんと"/>
         <a:cs typeface=""/>
-        <a:font script="Jpan" typeface="游ゴシック Light"/>
-        <a:font script="Hang" typeface="맑은 고딕"/>
-        <a:font script="Hans" typeface="等线 Light"/>
-        <a:font script="Hant" typeface="新細明體"/>
-        <a:font script="Arab" typeface="Times New Roman"/>
-        <a:font script="Hebr" typeface="Times New Roman"/>
-        <a:font script="Thai" typeface="Angsana New"/>
-        <a:font script="Ethi" typeface="Nyala"/>
-        <a:font script="Beng" typeface="Vrinda"/>
-        <a:font script="Gujr" typeface="Shruti"/>
-        <a:font script="Khmr" typeface="MoolBoran"/>
-        <a:font script="Knda" typeface="Tunga"/>
-        <a:font script="Guru" typeface="Raavi"/>
-        <a:font script="Cans" typeface="Euphemia"/>
-        <a:font script="Cher" typeface="Plantagenet Cherokee"/>
-        <a:font script="Yiii" typeface="Microsoft Yi Baiti"/>
-        <a:font script="Tibt" typeface="Microsoft Himalaya"/>
-        <a:font script="Thaa" typeface="MV Boli"/>
-        <a:font script="Deva" typeface="Mangal"/>
-        <a:font script="Telu" typeface="Gautami"/>
-        <a:font script="Taml" typeface="Latha"/>
-        <a:font script="Syrc" typeface="Estrangelo Edessa"/>
-        <a:font script="Orya" typeface="Kalinga"/>
-        <a:font script="Mlym" typeface="Kartika"/>
-        <a:font script="Laoo" typeface="DokChampa"/>
-        <a:font script="Sinh" typeface="Iskoola Pota"/>
-        <a:font script="Mong" typeface="Mongolian Baiti"/>
-        <a:font script="Viet" typeface="Times New Roman"/>
-        <a:font script="Uigh" typeface="Microsoft Uighur"/>
-        <a:font script="Geor" typeface="Sylfaen"/>
-        <a:font script="Armn" typeface="Arial"/>
-        <a:font script="Bugi" typeface="Leelawadee UI"/>
-        <a:font script="Bopo" typeface="Microsoft JhengHei"/>
-        <a:font script="Java" typeface="Javanese Text"/>
-        <a:font script="Lisu" typeface="Segoe UI"/>
-        <a:font script="Mymr" typeface="Myanmar Text"/>
-        <a:font script="Nkoo" typeface="Ebrima"/>
-        <a:font script="Olck" typeface="Nirmala UI"/>
-        <a:font script="Osma" typeface="Ebrima"/>
-        <a:font script="Phag" typeface="Phagspa"/>
-        <a:font script="Syrn" typeface="Estrangelo Edessa"/>
-        <a:font script="Syrj" typeface="Estrangelo Edessa"/>
-        <a:font script="Syre" typeface="Estrangelo Edessa"/>
-        <a:font script="Sora" typeface="Nirmala UI"/>
-        <a:font script="Tale" typeface="Microsoft Tai Le"/>
-        <a:font script="Talu" typeface="Microsoft New Tai Lue"/>
-        <a:font script="Tfng" typeface="Ebrima"/>
       </a:majorFont>
       <a:minorFont>
-        <a:latin typeface="Yu Gothic"/>
-        <a:ea typeface=""/>
+        <a:latin typeface="Noto Sans JP"/>
+        <a:ea typeface="Noto Sans JP"/>
         <a:cs typeface=""/>
-        <a:font script="Jpan" typeface="游ゴシック"/>
-        <a:font script="Hang" typeface="맑은 고딕"/>
-        <a:font script="Hans" typeface="等线"/>
-        <a:font script="Hant" typeface="新細明體"/>
-        <a:font script="Arab" typeface="Arial"/>
-        <a:font script="Hebr" typeface="Arial"/>
-        <a:font script="Thai" typeface="Cordia New"/>
-        <a:font script="Ethi" typeface="Nyala"/>
-        <a:font script="Beng" typeface="Vrinda"/>
-        <a:font script="Gujr" typeface="Shruti"/>
-        <a:font script="Khmr" typeface="DaunPenh"/>
-        <a:font script="Knda" typeface="Tunga"/>
-        <a:font script="Guru" typeface="Raavi"/>
-        <a:font script="Cans" typeface="Euphemia"/>
-        <a:font script="Cher" typeface="Plantagenet Cherokee"/>
-        <a:font script="Yiii" typeface="Microsoft Yi Baiti"/>
-        <a:font script="Tibt" typeface="Microsoft Himalaya"/>
-        <a:font script="Thaa" typeface="MV Boli"/>
-        <a:font script="Deva" typeface="Mangal"/>
-        <a:font script="Telu" typeface="Gautami"/>
-        <a:font script="Taml" typeface="Latha"/>
-        <a:font script="Syrc" typeface="Estrangelo Edessa"/>
-        <a:font script="Orya" typeface="Kalinga"/>
-        <a:font script="Mlym" typeface="Kartika"/>
-        <a:font script="Laoo" typeface="DokChampa"/>
-        <a:font script="Sinh" typeface="Iskoola Pota"/>
-        <a:font script="Mong" typeface="Mongolian Baiti"/>
-        <a:font script="Viet" typeface="Arial"/>
-        <a:font script="Uigh" typeface="Microsoft Uighur"/>
-        <a:font script="Geor" typeface="Sylfaen"/>
-        <a:font script="Armn" typeface="Arial"/>
-        <a:font script="Bugi" typeface="Leelawadee UI"/>
-        <a:font script="Bopo" typeface="Microsoft JhengHei"/>
-        <a:font script="Java" typeface="Javanese Text"/>
-        <a:font script="Lisu" typeface="Segoe UI"/>
-        <a:font script="Mymr" typeface="Myanmar Text"/>
-        <a:font script="Nkoo" typeface="Ebrima"/>
-        <a:font script="Olck" typeface="Nirmala UI"/>
-        <a:font script="Osma" typeface="Ebrima"/>
-        <a:font script="Phag" typeface="Phagspa"/>
-        <a:font script="Syrn" typeface="Estrangelo Edessa"/>
-        <a:font script="Syrj" typeface="Estrangelo Edessa"/>
-        <a:font script="Syre" typeface="Estrangelo Edessa"/>
-        <a:font script="Sora" typeface="Nirmala UI"/>
-        <a:font script="Tale" typeface="Microsoft Tai Le"/>
-        <a:font script="Talu" typeface="Microsoft New Tai Lue"/>
-        <a:font script="Tfng" typeface="Ebrima"/>
       </a:minorFont>
     </a:fontScheme>
     <a:fmtScheme name="Office">
